--- a/mcp-for-everything/slides/session1-mcp-for-everything.pptx
+++ b/mcp-for-everything/slides/session1-mcp-for-everything.pptx
@@ -6749,7 +6749,7 @@
                 <a:ea typeface="Calibri" pitchFamily="34" charset="-122"/>
                 <a:cs typeface="Calibri" pitchFamily="34" charset="-120"/>
               </a:rPr>
-              <a:t>Run the host as an account with the permissions you would give a new hire</a:t>
+              <a:t>Treat the host account like you would a new hire</a:t>
             </a:r>
             <a:endParaRPr lang="en-US" sz="2000" dirty="0"/>
           </a:p>
@@ -6781,6 +6781,281 @@
   <p:clrMapOvr>
     <a:masterClrMapping/>
   </p:clrMapOvr>
+  <p:timing>
+    <p:tnLst>
+      <p:par>
+        <p:cTn id="1" dur="indefinite" restart="never" nodeType="tmRoot">
+          <p:childTnLst>
+            <p:seq concurrent="1" nextAc="seek">
+              <p:cTn id="2" dur="indefinite" nodeType="mainSeq">
+                <p:childTnLst>
+                  <p:par>
+                    <p:cTn id="3" fill="hold">
+                      <p:stCondLst>
+                        <p:cond delay="indefinite"/>
+                      </p:stCondLst>
+                      <p:childTnLst>
+                        <p:par>
+                          <p:cTn id="4" fill="hold">
+                            <p:stCondLst>
+                              <p:cond delay="0"/>
+                            </p:stCondLst>
+                            <p:childTnLst>
+                              <p:par>
+                                <p:cTn id="5" presetID="1" presetClass="entr" presetSubtype="0" fill="hold" nodeType="clickEffect">
+                                  <p:stCondLst>
+                                    <p:cond delay="0"/>
+                                  </p:stCondLst>
+                                  <p:childTnLst>
+                                    <p:set>
+                                      <p:cBhvr>
+                                        <p:cTn id="6" dur="1" fill="hold">
+                                          <p:stCondLst>
+                                            <p:cond delay="0"/>
+                                          </p:stCondLst>
+                                        </p:cTn>
+                                        <p:tgtEl>
+                                          <p:spTgt spid="5">
+                                            <p:txEl>
+                                              <p:pRg st="0" end="0"/>
+                                            </p:txEl>
+                                          </p:spTgt>
+                                        </p:tgtEl>
+                                        <p:attrNameLst>
+                                          <p:attrName>style.visibility</p:attrName>
+                                        </p:attrNameLst>
+                                      </p:cBhvr>
+                                      <p:to>
+                                        <p:strVal val="visible"/>
+                                      </p:to>
+                                    </p:set>
+                                  </p:childTnLst>
+                                </p:cTn>
+                              </p:par>
+                            </p:childTnLst>
+                          </p:cTn>
+                        </p:par>
+                      </p:childTnLst>
+                    </p:cTn>
+                  </p:par>
+                  <p:par>
+                    <p:cTn id="7" fill="hold">
+                      <p:stCondLst>
+                        <p:cond delay="indefinite"/>
+                      </p:stCondLst>
+                      <p:childTnLst>
+                        <p:par>
+                          <p:cTn id="8" fill="hold">
+                            <p:stCondLst>
+                              <p:cond delay="0"/>
+                            </p:stCondLst>
+                            <p:childTnLst>
+                              <p:par>
+                                <p:cTn id="9" presetID="1" presetClass="entr" presetSubtype="0" fill="hold" nodeType="clickEffect">
+                                  <p:stCondLst>
+                                    <p:cond delay="0"/>
+                                  </p:stCondLst>
+                                  <p:childTnLst>
+                                    <p:set>
+                                      <p:cBhvr>
+                                        <p:cTn id="10" dur="1" fill="hold">
+                                          <p:stCondLst>
+                                            <p:cond delay="0"/>
+                                          </p:stCondLst>
+                                        </p:cTn>
+                                        <p:tgtEl>
+                                          <p:spTgt spid="5">
+                                            <p:txEl>
+                                              <p:pRg st="1" end="1"/>
+                                            </p:txEl>
+                                          </p:spTgt>
+                                        </p:tgtEl>
+                                        <p:attrNameLst>
+                                          <p:attrName>style.visibility</p:attrName>
+                                        </p:attrNameLst>
+                                      </p:cBhvr>
+                                      <p:to>
+                                        <p:strVal val="visible"/>
+                                      </p:to>
+                                    </p:set>
+                                  </p:childTnLst>
+                                </p:cTn>
+                              </p:par>
+                            </p:childTnLst>
+                          </p:cTn>
+                        </p:par>
+                      </p:childTnLst>
+                    </p:cTn>
+                  </p:par>
+                  <p:par>
+                    <p:cTn id="11" fill="hold">
+                      <p:stCondLst>
+                        <p:cond delay="indefinite"/>
+                      </p:stCondLst>
+                      <p:childTnLst>
+                        <p:par>
+                          <p:cTn id="12" fill="hold">
+                            <p:stCondLst>
+                              <p:cond delay="0"/>
+                            </p:stCondLst>
+                            <p:childTnLst>
+                              <p:par>
+                                <p:cTn id="13" presetID="1" presetClass="entr" presetSubtype="0" fill="hold" nodeType="clickEffect">
+                                  <p:stCondLst>
+                                    <p:cond delay="0"/>
+                                  </p:stCondLst>
+                                  <p:childTnLst>
+                                    <p:set>
+                                      <p:cBhvr>
+                                        <p:cTn id="14" dur="1" fill="hold">
+                                          <p:stCondLst>
+                                            <p:cond delay="0"/>
+                                          </p:stCondLst>
+                                        </p:cTn>
+                                        <p:tgtEl>
+                                          <p:spTgt spid="5">
+                                            <p:txEl>
+                                              <p:pRg st="2" end="2"/>
+                                            </p:txEl>
+                                          </p:spTgt>
+                                        </p:tgtEl>
+                                        <p:attrNameLst>
+                                          <p:attrName>style.visibility</p:attrName>
+                                        </p:attrNameLst>
+                                      </p:cBhvr>
+                                      <p:to>
+                                        <p:strVal val="visible"/>
+                                      </p:to>
+                                    </p:set>
+                                  </p:childTnLst>
+                                </p:cTn>
+                              </p:par>
+                            </p:childTnLst>
+                          </p:cTn>
+                        </p:par>
+                      </p:childTnLst>
+                    </p:cTn>
+                  </p:par>
+                  <p:par>
+                    <p:cTn id="15" fill="hold">
+                      <p:stCondLst>
+                        <p:cond delay="indefinite"/>
+                      </p:stCondLst>
+                      <p:childTnLst>
+                        <p:par>
+                          <p:cTn id="16" fill="hold">
+                            <p:stCondLst>
+                              <p:cond delay="0"/>
+                            </p:stCondLst>
+                            <p:childTnLst>
+                              <p:par>
+                                <p:cTn id="17" presetID="1" presetClass="entr" presetSubtype="0" fill="hold" nodeType="clickEffect">
+                                  <p:stCondLst>
+                                    <p:cond delay="0"/>
+                                  </p:stCondLst>
+                                  <p:childTnLst>
+                                    <p:set>
+                                      <p:cBhvr>
+                                        <p:cTn id="18" dur="1" fill="hold">
+                                          <p:stCondLst>
+                                            <p:cond delay="0"/>
+                                          </p:stCondLst>
+                                        </p:cTn>
+                                        <p:tgtEl>
+                                          <p:spTgt spid="5">
+                                            <p:txEl>
+                                              <p:pRg st="3" end="3"/>
+                                            </p:txEl>
+                                          </p:spTgt>
+                                        </p:tgtEl>
+                                        <p:attrNameLst>
+                                          <p:attrName>style.visibility</p:attrName>
+                                        </p:attrNameLst>
+                                      </p:cBhvr>
+                                      <p:to>
+                                        <p:strVal val="visible"/>
+                                      </p:to>
+                                    </p:set>
+                                  </p:childTnLst>
+                                </p:cTn>
+                              </p:par>
+                            </p:childTnLst>
+                          </p:cTn>
+                        </p:par>
+                      </p:childTnLst>
+                    </p:cTn>
+                  </p:par>
+                  <p:par>
+                    <p:cTn id="19" fill="hold">
+                      <p:stCondLst>
+                        <p:cond delay="indefinite"/>
+                      </p:stCondLst>
+                      <p:childTnLst>
+                        <p:par>
+                          <p:cTn id="20" fill="hold">
+                            <p:stCondLst>
+                              <p:cond delay="0"/>
+                            </p:stCondLst>
+                            <p:childTnLst>
+                              <p:par>
+                                <p:cTn id="21" presetID="1" presetClass="entr" presetSubtype="0" fill="hold" nodeType="clickEffect">
+                                  <p:stCondLst>
+                                    <p:cond delay="0"/>
+                                  </p:stCondLst>
+                                  <p:childTnLst>
+                                    <p:set>
+                                      <p:cBhvr>
+                                        <p:cTn id="22" dur="1" fill="hold">
+                                          <p:stCondLst>
+                                            <p:cond delay="0"/>
+                                          </p:stCondLst>
+                                        </p:cTn>
+                                        <p:tgtEl>
+                                          <p:spTgt spid="5">
+                                            <p:txEl>
+                                              <p:pRg st="4" end="4"/>
+                                            </p:txEl>
+                                          </p:spTgt>
+                                        </p:tgtEl>
+                                        <p:attrNameLst>
+                                          <p:attrName>style.visibility</p:attrName>
+                                        </p:attrNameLst>
+                                      </p:cBhvr>
+                                      <p:to>
+                                        <p:strVal val="visible"/>
+                                      </p:to>
+                                    </p:set>
+                                  </p:childTnLst>
+                                </p:cTn>
+                              </p:par>
+                            </p:childTnLst>
+                          </p:cTn>
+                        </p:par>
+                      </p:childTnLst>
+                    </p:cTn>
+                  </p:par>
+                </p:childTnLst>
+              </p:cTn>
+              <p:prevCondLst>
+                <p:cond evt="onPrev" delay="0">
+                  <p:tgtEl>
+                    <p:sldTgt/>
+                  </p:tgtEl>
+                </p:cond>
+              </p:prevCondLst>
+              <p:nextCondLst>
+                <p:cond evt="onNext" delay="0">
+                  <p:tgtEl>
+                    <p:sldTgt/>
+                  </p:tgtEl>
+                </p:cond>
+              </p:nextCondLst>
+            </p:seq>
+          </p:childTnLst>
+        </p:cTn>
+      </p:par>
+    </p:tnLst>
+  </p:timing>
 </p:sld>
 </file>
 
@@ -7918,6 +8193,281 @@
   <p:clrMapOvr>
     <a:masterClrMapping/>
   </p:clrMapOvr>
+  <p:timing>
+    <p:tnLst>
+      <p:par>
+        <p:cTn id="1" dur="indefinite" restart="never" nodeType="tmRoot">
+          <p:childTnLst>
+            <p:seq concurrent="1" nextAc="seek">
+              <p:cTn id="2" dur="indefinite" nodeType="mainSeq">
+                <p:childTnLst>
+                  <p:par>
+                    <p:cTn id="3" fill="hold">
+                      <p:stCondLst>
+                        <p:cond delay="indefinite"/>
+                      </p:stCondLst>
+                      <p:childTnLst>
+                        <p:par>
+                          <p:cTn id="4" fill="hold">
+                            <p:stCondLst>
+                              <p:cond delay="0"/>
+                            </p:stCondLst>
+                            <p:childTnLst>
+                              <p:par>
+                                <p:cTn id="5" presetID="1" presetClass="entr" presetSubtype="0" fill="hold" nodeType="clickEffect">
+                                  <p:stCondLst>
+                                    <p:cond delay="0"/>
+                                  </p:stCondLst>
+                                  <p:childTnLst>
+                                    <p:set>
+                                      <p:cBhvr>
+                                        <p:cTn id="6" dur="1" fill="hold">
+                                          <p:stCondLst>
+                                            <p:cond delay="0"/>
+                                          </p:stCondLst>
+                                        </p:cTn>
+                                        <p:tgtEl>
+                                          <p:spTgt spid="5">
+                                            <p:txEl>
+                                              <p:pRg st="0" end="0"/>
+                                            </p:txEl>
+                                          </p:spTgt>
+                                        </p:tgtEl>
+                                        <p:attrNameLst>
+                                          <p:attrName>style.visibility</p:attrName>
+                                        </p:attrNameLst>
+                                      </p:cBhvr>
+                                      <p:to>
+                                        <p:strVal val="visible"/>
+                                      </p:to>
+                                    </p:set>
+                                  </p:childTnLst>
+                                </p:cTn>
+                              </p:par>
+                            </p:childTnLst>
+                          </p:cTn>
+                        </p:par>
+                      </p:childTnLst>
+                    </p:cTn>
+                  </p:par>
+                  <p:par>
+                    <p:cTn id="7" fill="hold">
+                      <p:stCondLst>
+                        <p:cond delay="indefinite"/>
+                      </p:stCondLst>
+                      <p:childTnLst>
+                        <p:par>
+                          <p:cTn id="8" fill="hold">
+                            <p:stCondLst>
+                              <p:cond delay="0"/>
+                            </p:stCondLst>
+                            <p:childTnLst>
+                              <p:par>
+                                <p:cTn id="9" presetID="1" presetClass="entr" presetSubtype="0" fill="hold" nodeType="clickEffect">
+                                  <p:stCondLst>
+                                    <p:cond delay="0"/>
+                                  </p:stCondLst>
+                                  <p:childTnLst>
+                                    <p:set>
+                                      <p:cBhvr>
+                                        <p:cTn id="10" dur="1" fill="hold">
+                                          <p:stCondLst>
+                                            <p:cond delay="0"/>
+                                          </p:stCondLst>
+                                        </p:cTn>
+                                        <p:tgtEl>
+                                          <p:spTgt spid="5">
+                                            <p:txEl>
+                                              <p:pRg st="1" end="1"/>
+                                            </p:txEl>
+                                          </p:spTgt>
+                                        </p:tgtEl>
+                                        <p:attrNameLst>
+                                          <p:attrName>style.visibility</p:attrName>
+                                        </p:attrNameLst>
+                                      </p:cBhvr>
+                                      <p:to>
+                                        <p:strVal val="visible"/>
+                                      </p:to>
+                                    </p:set>
+                                  </p:childTnLst>
+                                </p:cTn>
+                              </p:par>
+                            </p:childTnLst>
+                          </p:cTn>
+                        </p:par>
+                      </p:childTnLst>
+                    </p:cTn>
+                  </p:par>
+                  <p:par>
+                    <p:cTn id="11" fill="hold">
+                      <p:stCondLst>
+                        <p:cond delay="indefinite"/>
+                      </p:stCondLst>
+                      <p:childTnLst>
+                        <p:par>
+                          <p:cTn id="12" fill="hold">
+                            <p:stCondLst>
+                              <p:cond delay="0"/>
+                            </p:stCondLst>
+                            <p:childTnLst>
+                              <p:par>
+                                <p:cTn id="13" presetID="1" presetClass="entr" presetSubtype="0" fill="hold" nodeType="clickEffect">
+                                  <p:stCondLst>
+                                    <p:cond delay="0"/>
+                                  </p:stCondLst>
+                                  <p:childTnLst>
+                                    <p:set>
+                                      <p:cBhvr>
+                                        <p:cTn id="14" dur="1" fill="hold">
+                                          <p:stCondLst>
+                                            <p:cond delay="0"/>
+                                          </p:stCondLst>
+                                        </p:cTn>
+                                        <p:tgtEl>
+                                          <p:spTgt spid="5">
+                                            <p:txEl>
+                                              <p:pRg st="2" end="2"/>
+                                            </p:txEl>
+                                          </p:spTgt>
+                                        </p:tgtEl>
+                                        <p:attrNameLst>
+                                          <p:attrName>style.visibility</p:attrName>
+                                        </p:attrNameLst>
+                                      </p:cBhvr>
+                                      <p:to>
+                                        <p:strVal val="visible"/>
+                                      </p:to>
+                                    </p:set>
+                                  </p:childTnLst>
+                                </p:cTn>
+                              </p:par>
+                            </p:childTnLst>
+                          </p:cTn>
+                        </p:par>
+                      </p:childTnLst>
+                    </p:cTn>
+                  </p:par>
+                  <p:par>
+                    <p:cTn id="15" fill="hold">
+                      <p:stCondLst>
+                        <p:cond delay="indefinite"/>
+                      </p:stCondLst>
+                      <p:childTnLst>
+                        <p:par>
+                          <p:cTn id="16" fill="hold">
+                            <p:stCondLst>
+                              <p:cond delay="0"/>
+                            </p:stCondLst>
+                            <p:childTnLst>
+                              <p:par>
+                                <p:cTn id="17" presetID="1" presetClass="entr" presetSubtype="0" fill="hold" nodeType="clickEffect">
+                                  <p:stCondLst>
+                                    <p:cond delay="0"/>
+                                  </p:stCondLst>
+                                  <p:childTnLst>
+                                    <p:set>
+                                      <p:cBhvr>
+                                        <p:cTn id="18" dur="1" fill="hold">
+                                          <p:stCondLst>
+                                            <p:cond delay="0"/>
+                                          </p:stCondLst>
+                                        </p:cTn>
+                                        <p:tgtEl>
+                                          <p:spTgt spid="5">
+                                            <p:txEl>
+                                              <p:pRg st="3" end="3"/>
+                                            </p:txEl>
+                                          </p:spTgt>
+                                        </p:tgtEl>
+                                        <p:attrNameLst>
+                                          <p:attrName>style.visibility</p:attrName>
+                                        </p:attrNameLst>
+                                      </p:cBhvr>
+                                      <p:to>
+                                        <p:strVal val="visible"/>
+                                      </p:to>
+                                    </p:set>
+                                  </p:childTnLst>
+                                </p:cTn>
+                              </p:par>
+                            </p:childTnLst>
+                          </p:cTn>
+                        </p:par>
+                      </p:childTnLst>
+                    </p:cTn>
+                  </p:par>
+                  <p:par>
+                    <p:cTn id="19" fill="hold">
+                      <p:stCondLst>
+                        <p:cond delay="indefinite"/>
+                      </p:stCondLst>
+                      <p:childTnLst>
+                        <p:par>
+                          <p:cTn id="20" fill="hold">
+                            <p:stCondLst>
+                              <p:cond delay="0"/>
+                            </p:stCondLst>
+                            <p:childTnLst>
+                              <p:par>
+                                <p:cTn id="21" presetID="1" presetClass="entr" presetSubtype="0" fill="hold" nodeType="clickEffect">
+                                  <p:stCondLst>
+                                    <p:cond delay="0"/>
+                                  </p:stCondLst>
+                                  <p:childTnLst>
+                                    <p:set>
+                                      <p:cBhvr>
+                                        <p:cTn id="22" dur="1" fill="hold">
+                                          <p:stCondLst>
+                                            <p:cond delay="0"/>
+                                          </p:stCondLst>
+                                        </p:cTn>
+                                        <p:tgtEl>
+                                          <p:spTgt spid="5">
+                                            <p:txEl>
+                                              <p:pRg st="4" end="4"/>
+                                            </p:txEl>
+                                          </p:spTgt>
+                                        </p:tgtEl>
+                                        <p:attrNameLst>
+                                          <p:attrName>style.visibility</p:attrName>
+                                        </p:attrNameLst>
+                                      </p:cBhvr>
+                                      <p:to>
+                                        <p:strVal val="visible"/>
+                                      </p:to>
+                                    </p:set>
+                                  </p:childTnLst>
+                                </p:cTn>
+                              </p:par>
+                            </p:childTnLst>
+                          </p:cTn>
+                        </p:par>
+                      </p:childTnLst>
+                    </p:cTn>
+                  </p:par>
+                </p:childTnLst>
+              </p:cTn>
+              <p:prevCondLst>
+                <p:cond evt="onPrev" delay="0">
+                  <p:tgtEl>
+                    <p:sldTgt/>
+                  </p:tgtEl>
+                </p:cond>
+              </p:prevCondLst>
+              <p:nextCondLst>
+                <p:cond evt="onNext" delay="0">
+                  <p:tgtEl>
+                    <p:sldTgt/>
+                  </p:tgtEl>
+                </p:cond>
+              </p:nextCondLst>
+            </p:seq>
+          </p:childTnLst>
+        </p:cTn>
+      </p:par>
+    </p:tnLst>
+  </p:timing>
 </p:sld>
 </file>
 
@@ -8567,6 +9117,575 @@
   <p:clrMapOvr>
     <a:masterClrMapping/>
   </p:clrMapOvr>
+  <p:timing>
+    <p:tnLst>
+      <p:par>
+        <p:cTn id="1" dur="indefinite" restart="never" nodeType="tmRoot">
+          <p:childTnLst>
+            <p:seq concurrent="1" nextAc="seek">
+              <p:cTn id="2" dur="indefinite" nodeType="mainSeq">
+                <p:childTnLst>
+                  <p:par>
+                    <p:cTn id="3" fill="hold">
+                      <p:stCondLst>
+                        <p:cond delay="indefinite"/>
+                      </p:stCondLst>
+                      <p:childTnLst>
+                        <p:par>
+                          <p:cTn id="4" fill="hold">
+                            <p:stCondLst>
+                              <p:cond delay="0"/>
+                            </p:stCondLst>
+                            <p:childTnLst>
+                              <p:par>
+                                <p:cTn id="5" presetID="1" presetClass="entr" presetSubtype="0" fill="hold" grpId="0" nodeType="clickEffect">
+                                  <p:stCondLst>
+                                    <p:cond delay="0"/>
+                                  </p:stCondLst>
+                                  <p:childTnLst>
+                                    <p:set>
+                                      <p:cBhvr>
+                                        <p:cTn id="6" dur="1" fill="hold">
+                                          <p:stCondLst>
+                                            <p:cond delay="0"/>
+                                          </p:stCondLst>
+                                        </p:cTn>
+                                        <p:tgtEl>
+                                          <p:spTgt spid="5"/>
+                                        </p:tgtEl>
+                                        <p:attrNameLst>
+                                          <p:attrName>style.visibility</p:attrName>
+                                        </p:attrNameLst>
+                                      </p:cBhvr>
+                                      <p:to>
+                                        <p:strVal val="visible"/>
+                                      </p:to>
+                                    </p:set>
+                                  </p:childTnLst>
+                                </p:cTn>
+                              </p:par>
+                              <p:par>
+                                <p:cTn id="7" presetID="1" presetClass="entr" presetSubtype="0" fill="hold" grpId="0" nodeType="withEffect">
+                                  <p:stCondLst>
+                                    <p:cond delay="0"/>
+                                  </p:stCondLst>
+                                  <p:childTnLst>
+                                    <p:set>
+                                      <p:cBhvr>
+                                        <p:cTn id="8" dur="1" fill="hold">
+                                          <p:stCondLst>
+                                            <p:cond delay="0"/>
+                                          </p:stCondLst>
+                                        </p:cTn>
+                                        <p:tgtEl>
+                                          <p:spTgt spid="6"/>
+                                        </p:tgtEl>
+                                        <p:attrNameLst>
+                                          <p:attrName>style.visibility</p:attrName>
+                                        </p:attrNameLst>
+                                      </p:cBhvr>
+                                      <p:to>
+                                        <p:strVal val="visible"/>
+                                      </p:to>
+                                    </p:set>
+                                  </p:childTnLst>
+                                </p:cTn>
+                              </p:par>
+                              <p:par>
+                                <p:cTn id="9" presetID="1" presetClass="entr" presetSubtype="0" fill="hold" grpId="0" nodeType="withEffect">
+                                  <p:stCondLst>
+                                    <p:cond delay="0"/>
+                                  </p:stCondLst>
+                                  <p:childTnLst>
+                                    <p:set>
+                                      <p:cBhvr>
+                                        <p:cTn id="10" dur="1" fill="hold">
+                                          <p:stCondLst>
+                                            <p:cond delay="0"/>
+                                          </p:stCondLst>
+                                        </p:cTn>
+                                        <p:tgtEl>
+                                          <p:spTgt spid="7"/>
+                                        </p:tgtEl>
+                                        <p:attrNameLst>
+                                          <p:attrName>style.visibility</p:attrName>
+                                        </p:attrNameLst>
+                                      </p:cBhvr>
+                                      <p:to>
+                                        <p:strVal val="visible"/>
+                                      </p:to>
+                                    </p:set>
+                                  </p:childTnLst>
+                                </p:cTn>
+                              </p:par>
+                              <p:par>
+                                <p:cTn id="11" presetID="1" presetClass="entr" presetSubtype="0" fill="hold" grpId="0" nodeType="withEffect">
+                                  <p:stCondLst>
+                                    <p:cond delay="0"/>
+                                  </p:stCondLst>
+                                  <p:childTnLst>
+                                    <p:set>
+                                      <p:cBhvr>
+                                        <p:cTn id="12" dur="1" fill="hold">
+                                          <p:stCondLst>
+                                            <p:cond delay="0"/>
+                                          </p:stCondLst>
+                                        </p:cTn>
+                                        <p:tgtEl>
+                                          <p:spTgt spid="8"/>
+                                        </p:tgtEl>
+                                        <p:attrNameLst>
+                                          <p:attrName>style.visibility</p:attrName>
+                                        </p:attrNameLst>
+                                      </p:cBhvr>
+                                      <p:to>
+                                        <p:strVal val="visible"/>
+                                      </p:to>
+                                    </p:set>
+                                  </p:childTnLst>
+                                </p:cTn>
+                              </p:par>
+                            </p:childTnLst>
+                          </p:cTn>
+                        </p:par>
+                      </p:childTnLst>
+                    </p:cTn>
+                  </p:par>
+                  <p:par>
+                    <p:cTn id="13" fill="hold">
+                      <p:stCondLst>
+                        <p:cond delay="indefinite"/>
+                      </p:stCondLst>
+                      <p:childTnLst>
+                        <p:par>
+                          <p:cTn id="14" fill="hold">
+                            <p:stCondLst>
+                              <p:cond delay="0"/>
+                            </p:stCondLst>
+                            <p:childTnLst>
+                              <p:par>
+                                <p:cTn id="15" presetID="1" presetClass="entr" presetSubtype="0" fill="hold" grpId="0" nodeType="clickEffect">
+                                  <p:stCondLst>
+                                    <p:cond delay="0"/>
+                                  </p:stCondLst>
+                                  <p:childTnLst>
+                                    <p:set>
+                                      <p:cBhvr>
+                                        <p:cTn id="16" dur="1" fill="hold">
+                                          <p:stCondLst>
+                                            <p:cond delay="0"/>
+                                          </p:stCondLst>
+                                        </p:cTn>
+                                        <p:tgtEl>
+                                          <p:spTgt spid="9"/>
+                                        </p:tgtEl>
+                                        <p:attrNameLst>
+                                          <p:attrName>style.visibility</p:attrName>
+                                        </p:attrNameLst>
+                                      </p:cBhvr>
+                                      <p:to>
+                                        <p:strVal val="visible"/>
+                                      </p:to>
+                                    </p:set>
+                                  </p:childTnLst>
+                                </p:cTn>
+                              </p:par>
+                              <p:par>
+                                <p:cTn id="17" presetID="1" presetClass="entr" presetSubtype="0" fill="hold" grpId="0" nodeType="withEffect">
+                                  <p:stCondLst>
+                                    <p:cond delay="0"/>
+                                  </p:stCondLst>
+                                  <p:childTnLst>
+                                    <p:set>
+                                      <p:cBhvr>
+                                        <p:cTn id="18" dur="1" fill="hold">
+                                          <p:stCondLst>
+                                            <p:cond delay="0"/>
+                                          </p:stCondLst>
+                                        </p:cTn>
+                                        <p:tgtEl>
+                                          <p:spTgt spid="10"/>
+                                        </p:tgtEl>
+                                        <p:attrNameLst>
+                                          <p:attrName>style.visibility</p:attrName>
+                                        </p:attrNameLst>
+                                      </p:cBhvr>
+                                      <p:to>
+                                        <p:strVal val="visible"/>
+                                      </p:to>
+                                    </p:set>
+                                  </p:childTnLst>
+                                </p:cTn>
+                              </p:par>
+                              <p:par>
+                                <p:cTn id="19" presetID="1" presetClass="entr" presetSubtype="0" fill="hold" grpId="0" nodeType="withEffect">
+                                  <p:stCondLst>
+                                    <p:cond delay="0"/>
+                                  </p:stCondLst>
+                                  <p:childTnLst>
+                                    <p:set>
+                                      <p:cBhvr>
+                                        <p:cTn id="20" dur="1" fill="hold">
+                                          <p:stCondLst>
+                                            <p:cond delay="0"/>
+                                          </p:stCondLst>
+                                        </p:cTn>
+                                        <p:tgtEl>
+                                          <p:spTgt spid="11"/>
+                                        </p:tgtEl>
+                                        <p:attrNameLst>
+                                          <p:attrName>style.visibility</p:attrName>
+                                        </p:attrNameLst>
+                                      </p:cBhvr>
+                                      <p:to>
+                                        <p:strVal val="visible"/>
+                                      </p:to>
+                                    </p:set>
+                                  </p:childTnLst>
+                                </p:cTn>
+                              </p:par>
+                              <p:par>
+                                <p:cTn id="21" presetID="1" presetClass="entr" presetSubtype="0" fill="hold" grpId="0" nodeType="withEffect">
+                                  <p:stCondLst>
+                                    <p:cond delay="0"/>
+                                  </p:stCondLst>
+                                  <p:childTnLst>
+                                    <p:set>
+                                      <p:cBhvr>
+                                        <p:cTn id="22" dur="1" fill="hold">
+                                          <p:stCondLst>
+                                            <p:cond delay="0"/>
+                                          </p:stCondLst>
+                                        </p:cTn>
+                                        <p:tgtEl>
+                                          <p:spTgt spid="12"/>
+                                        </p:tgtEl>
+                                        <p:attrNameLst>
+                                          <p:attrName>style.visibility</p:attrName>
+                                        </p:attrNameLst>
+                                      </p:cBhvr>
+                                      <p:to>
+                                        <p:strVal val="visible"/>
+                                      </p:to>
+                                    </p:set>
+                                  </p:childTnLst>
+                                </p:cTn>
+                              </p:par>
+                            </p:childTnLst>
+                          </p:cTn>
+                        </p:par>
+                      </p:childTnLst>
+                    </p:cTn>
+                  </p:par>
+                  <p:par>
+                    <p:cTn id="23" fill="hold">
+                      <p:stCondLst>
+                        <p:cond delay="indefinite"/>
+                      </p:stCondLst>
+                      <p:childTnLst>
+                        <p:par>
+                          <p:cTn id="24" fill="hold">
+                            <p:stCondLst>
+                              <p:cond delay="0"/>
+                            </p:stCondLst>
+                            <p:childTnLst>
+                              <p:par>
+                                <p:cTn id="25" presetID="1" presetClass="entr" presetSubtype="0" fill="hold" grpId="0" nodeType="clickEffect">
+                                  <p:stCondLst>
+                                    <p:cond delay="0"/>
+                                  </p:stCondLst>
+                                  <p:childTnLst>
+                                    <p:set>
+                                      <p:cBhvr>
+                                        <p:cTn id="26" dur="1" fill="hold">
+                                          <p:stCondLst>
+                                            <p:cond delay="0"/>
+                                          </p:stCondLst>
+                                        </p:cTn>
+                                        <p:tgtEl>
+                                          <p:spTgt spid="13"/>
+                                        </p:tgtEl>
+                                        <p:attrNameLst>
+                                          <p:attrName>style.visibility</p:attrName>
+                                        </p:attrNameLst>
+                                      </p:cBhvr>
+                                      <p:to>
+                                        <p:strVal val="visible"/>
+                                      </p:to>
+                                    </p:set>
+                                  </p:childTnLst>
+                                </p:cTn>
+                              </p:par>
+                              <p:par>
+                                <p:cTn id="27" presetID="1" presetClass="entr" presetSubtype="0" fill="hold" grpId="0" nodeType="withEffect">
+                                  <p:stCondLst>
+                                    <p:cond delay="0"/>
+                                  </p:stCondLst>
+                                  <p:childTnLst>
+                                    <p:set>
+                                      <p:cBhvr>
+                                        <p:cTn id="28" dur="1" fill="hold">
+                                          <p:stCondLst>
+                                            <p:cond delay="0"/>
+                                          </p:stCondLst>
+                                        </p:cTn>
+                                        <p:tgtEl>
+                                          <p:spTgt spid="14"/>
+                                        </p:tgtEl>
+                                        <p:attrNameLst>
+                                          <p:attrName>style.visibility</p:attrName>
+                                        </p:attrNameLst>
+                                      </p:cBhvr>
+                                      <p:to>
+                                        <p:strVal val="visible"/>
+                                      </p:to>
+                                    </p:set>
+                                  </p:childTnLst>
+                                </p:cTn>
+                              </p:par>
+                              <p:par>
+                                <p:cTn id="29" presetID="1" presetClass="entr" presetSubtype="0" fill="hold" grpId="0" nodeType="withEffect">
+                                  <p:stCondLst>
+                                    <p:cond delay="0"/>
+                                  </p:stCondLst>
+                                  <p:childTnLst>
+                                    <p:set>
+                                      <p:cBhvr>
+                                        <p:cTn id="30" dur="1" fill="hold">
+                                          <p:stCondLst>
+                                            <p:cond delay="0"/>
+                                          </p:stCondLst>
+                                        </p:cTn>
+                                        <p:tgtEl>
+                                          <p:spTgt spid="15"/>
+                                        </p:tgtEl>
+                                        <p:attrNameLst>
+                                          <p:attrName>style.visibility</p:attrName>
+                                        </p:attrNameLst>
+                                      </p:cBhvr>
+                                      <p:to>
+                                        <p:strVal val="visible"/>
+                                      </p:to>
+                                    </p:set>
+                                  </p:childTnLst>
+                                </p:cTn>
+                              </p:par>
+                              <p:par>
+                                <p:cTn id="31" presetID="1" presetClass="entr" presetSubtype="0" fill="hold" grpId="0" nodeType="withEffect">
+                                  <p:stCondLst>
+                                    <p:cond delay="0"/>
+                                  </p:stCondLst>
+                                  <p:childTnLst>
+                                    <p:set>
+                                      <p:cBhvr>
+                                        <p:cTn id="32" dur="1" fill="hold">
+                                          <p:stCondLst>
+                                            <p:cond delay="0"/>
+                                          </p:stCondLst>
+                                        </p:cTn>
+                                        <p:tgtEl>
+                                          <p:spTgt spid="16"/>
+                                        </p:tgtEl>
+                                        <p:attrNameLst>
+                                          <p:attrName>style.visibility</p:attrName>
+                                        </p:attrNameLst>
+                                      </p:cBhvr>
+                                      <p:to>
+                                        <p:strVal val="visible"/>
+                                      </p:to>
+                                    </p:set>
+                                  </p:childTnLst>
+                                </p:cTn>
+                              </p:par>
+                            </p:childTnLst>
+                          </p:cTn>
+                        </p:par>
+                      </p:childTnLst>
+                    </p:cTn>
+                  </p:par>
+                  <p:par>
+                    <p:cTn id="33" fill="hold">
+                      <p:stCondLst>
+                        <p:cond delay="indefinite"/>
+                      </p:stCondLst>
+                      <p:childTnLst>
+                        <p:par>
+                          <p:cTn id="34" fill="hold">
+                            <p:stCondLst>
+                              <p:cond delay="0"/>
+                            </p:stCondLst>
+                            <p:childTnLst>
+                              <p:par>
+                                <p:cTn id="35" presetID="1" presetClass="entr" presetSubtype="0" fill="hold" nodeType="clickEffect">
+                                  <p:stCondLst>
+                                    <p:cond delay="0"/>
+                                  </p:stCondLst>
+                                  <p:childTnLst>
+                                    <p:set>
+                                      <p:cBhvr>
+                                        <p:cTn id="36" dur="1" fill="hold">
+                                          <p:stCondLst>
+                                            <p:cond delay="0"/>
+                                          </p:stCondLst>
+                                        </p:cTn>
+                                        <p:tgtEl>
+                                          <p:spTgt spid="17">
+                                            <p:txEl>
+                                              <p:pRg st="0" end="0"/>
+                                            </p:txEl>
+                                          </p:spTgt>
+                                        </p:tgtEl>
+                                        <p:attrNameLst>
+                                          <p:attrName>style.visibility</p:attrName>
+                                        </p:attrNameLst>
+                                      </p:cBhvr>
+                                      <p:to>
+                                        <p:strVal val="visible"/>
+                                      </p:to>
+                                    </p:set>
+                                  </p:childTnLst>
+                                </p:cTn>
+                              </p:par>
+                            </p:childTnLst>
+                          </p:cTn>
+                        </p:par>
+                      </p:childTnLst>
+                    </p:cTn>
+                  </p:par>
+                  <p:par>
+                    <p:cTn id="37" fill="hold">
+                      <p:stCondLst>
+                        <p:cond delay="indefinite"/>
+                      </p:stCondLst>
+                      <p:childTnLst>
+                        <p:par>
+                          <p:cTn id="38" fill="hold">
+                            <p:stCondLst>
+                              <p:cond delay="0"/>
+                            </p:stCondLst>
+                            <p:childTnLst>
+                              <p:par>
+                                <p:cTn id="39" presetID="1" presetClass="entr" presetSubtype="0" fill="hold" nodeType="clickEffect">
+                                  <p:stCondLst>
+                                    <p:cond delay="0"/>
+                                  </p:stCondLst>
+                                  <p:childTnLst>
+                                    <p:set>
+                                      <p:cBhvr>
+                                        <p:cTn id="40" dur="1" fill="hold">
+                                          <p:stCondLst>
+                                            <p:cond delay="0"/>
+                                          </p:stCondLst>
+                                        </p:cTn>
+                                        <p:tgtEl>
+                                          <p:spTgt spid="17">
+                                            <p:txEl>
+                                              <p:pRg st="1" end="1"/>
+                                            </p:txEl>
+                                          </p:spTgt>
+                                        </p:tgtEl>
+                                        <p:attrNameLst>
+                                          <p:attrName>style.visibility</p:attrName>
+                                        </p:attrNameLst>
+                                      </p:cBhvr>
+                                      <p:to>
+                                        <p:strVal val="visible"/>
+                                      </p:to>
+                                    </p:set>
+                                  </p:childTnLst>
+                                </p:cTn>
+                              </p:par>
+                            </p:childTnLst>
+                          </p:cTn>
+                        </p:par>
+                      </p:childTnLst>
+                    </p:cTn>
+                  </p:par>
+                  <p:par>
+                    <p:cTn id="41" fill="hold">
+                      <p:stCondLst>
+                        <p:cond delay="indefinite"/>
+                      </p:stCondLst>
+                      <p:childTnLst>
+                        <p:par>
+                          <p:cTn id="42" fill="hold">
+                            <p:stCondLst>
+                              <p:cond delay="0"/>
+                            </p:stCondLst>
+                            <p:childTnLst>
+                              <p:par>
+                                <p:cTn id="43" presetID="1" presetClass="entr" presetSubtype="0" fill="hold" nodeType="clickEffect">
+                                  <p:stCondLst>
+                                    <p:cond delay="0"/>
+                                  </p:stCondLst>
+                                  <p:childTnLst>
+                                    <p:set>
+                                      <p:cBhvr>
+                                        <p:cTn id="44" dur="1" fill="hold">
+                                          <p:stCondLst>
+                                            <p:cond delay="0"/>
+                                          </p:stCondLst>
+                                        </p:cTn>
+                                        <p:tgtEl>
+                                          <p:spTgt spid="17">
+                                            <p:txEl>
+                                              <p:pRg st="2" end="2"/>
+                                            </p:txEl>
+                                          </p:spTgt>
+                                        </p:tgtEl>
+                                        <p:attrNameLst>
+                                          <p:attrName>style.visibility</p:attrName>
+                                        </p:attrNameLst>
+                                      </p:cBhvr>
+                                      <p:to>
+                                        <p:strVal val="visible"/>
+                                      </p:to>
+                                    </p:set>
+                                  </p:childTnLst>
+                                </p:cTn>
+                              </p:par>
+                            </p:childTnLst>
+                          </p:cTn>
+                        </p:par>
+                      </p:childTnLst>
+                    </p:cTn>
+                  </p:par>
+                </p:childTnLst>
+              </p:cTn>
+              <p:prevCondLst>
+                <p:cond evt="onPrev" delay="0">
+                  <p:tgtEl>
+                    <p:sldTgt/>
+                  </p:tgtEl>
+                </p:cond>
+              </p:prevCondLst>
+              <p:nextCondLst>
+                <p:cond evt="onNext" delay="0">
+                  <p:tgtEl>
+                    <p:sldTgt/>
+                  </p:tgtEl>
+                </p:cond>
+              </p:nextCondLst>
+            </p:seq>
+          </p:childTnLst>
+        </p:cTn>
+      </p:par>
+    </p:tnLst>
+    <p:bldLst>
+      <p:bldP spid="5" grpId="0" animBg="1"/>
+      <p:bldP spid="6" grpId="0" animBg="1"/>
+      <p:bldP spid="7" grpId="0" animBg="1"/>
+      <p:bldP spid="8" grpId="0" animBg="1"/>
+      <p:bldP spid="9" grpId="0" animBg="1"/>
+      <p:bldP spid="10" grpId="0" animBg="1"/>
+      <p:bldP spid="11" grpId="0" animBg="1"/>
+      <p:bldP spid="12" grpId="0" animBg="1"/>
+      <p:bldP spid="13" grpId="0" animBg="1"/>
+      <p:bldP spid="14" grpId="0" animBg="1"/>
+      <p:bldP spid="15" grpId="0" animBg="1"/>
+      <p:bldP spid="16" grpId="0" animBg="1"/>
+    </p:bldLst>
+  </p:timing>
 </p:sld>
 </file>
 
@@ -10454,8 +11573,8 @@
         </p:nvSpPr>
         <p:spPr>
           <a:xfrm>
-            <a:off x="640080" y="4480560"/>
-            <a:ext cx="3017520" cy="274320"/>
+            <a:off x="1243643" y="4206240"/>
+            <a:ext cx="1307473" cy="274320"/>
           </a:xfrm>
           <a:prstGeom prst="rect">
             <a:avLst/>
@@ -10493,8 +11612,8 @@
         </p:nvSpPr>
         <p:spPr>
           <a:xfrm>
-            <a:off x="5120640" y="4114800"/>
-            <a:ext cx="3017520" cy="274320"/>
+            <a:off x="3908169" y="4206240"/>
+            <a:ext cx="1810591" cy="274320"/>
           </a:xfrm>
           <a:prstGeom prst="rect">
             <a:avLst/>
@@ -10532,8 +11651,8 @@
         </p:nvSpPr>
         <p:spPr>
           <a:xfrm>
-            <a:off x="640080" y="6172200"/>
-            <a:ext cx="10908792" cy="365760"/>
+            <a:off x="2631968" y="5261521"/>
+            <a:ext cx="5800304" cy="365760"/>
           </a:xfrm>
           <a:prstGeom prst="rect">
             <a:avLst/>
@@ -10568,6 +11687,614 @@
   <p:clrMapOvr>
     <a:masterClrMapping/>
   </p:clrMapOvr>
+  <p:timing>
+    <p:tnLst>
+      <p:par>
+        <p:cTn id="1" dur="indefinite" restart="never" nodeType="tmRoot">
+          <p:childTnLst>
+            <p:seq concurrent="1" nextAc="seek">
+              <p:cTn id="2" dur="indefinite" nodeType="mainSeq">
+                <p:childTnLst>
+                  <p:par>
+                    <p:cTn id="3" fill="hold">
+                      <p:stCondLst>
+                        <p:cond delay="indefinite"/>
+                      </p:stCondLst>
+                      <p:childTnLst>
+                        <p:par>
+                          <p:cTn id="4" fill="hold">
+                            <p:stCondLst>
+                              <p:cond delay="0"/>
+                            </p:stCondLst>
+                            <p:childTnLst>
+                              <p:par>
+                                <p:cTn id="5" presetID="1" presetClass="entr" presetSubtype="0" fill="hold" grpId="0" nodeType="clickEffect">
+                                  <p:stCondLst>
+                                    <p:cond delay="0"/>
+                                  </p:stCondLst>
+                                  <p:childTnLst>
+                                    <p:set>
+                                      <p:cBhvr>
+                                        <p:cTn id="6" dur="1" fill="hold">
+                                          <p:stCondLst>
+                                            <p:cond delay="0"/>
+                                          </p:stCondLst>
+                                        </p:cTn>
+                                        <p:tgtEl>
+                                          <p:spTgt spid="11"/>
+                                        </p:tgtEl>
+                                        <p:attrNameLst>
+                                          <p:attrName>style.visibility</p:attrName>
+                                        </p:attrNameLst>
+                                      </p:cBhvr>
+                                      <p:to>
+                                        <p:strVal val="visible"/>
+                                      </p:to>
+                                    </p:set>
+                                  </p:childTnLst>
+                                </p:cTn>
+                              </p:par>
+                              <p:par>
+                                <p:cTn id="7" presetID="1" presetClass="entr" presetSubtype="0" fill="hold" grpId="0" nodeType="withEffect">
+                                  <p:stCondLst>
+                                    <p:cond delay="0"/>
+                                  </p:stCondLst>
+                                  <p:childTnLst>
+                                    <p:set>
+                                      <p:cBhvr>
+                                        <p:cTn id="8" dur="1" fill="hold">
+                                          <p:stCondLst>
+                                            <p:cond delay="0"/>
+                                          </p:stCondLst>
+                                        </p:cTn>
+                                        <p:tgtEl>
+                                          <p:spTgt spid="12"/>
+                                        </p:tgtEl>
+                                        <p:attrNameLst>
+                                          <p:attrName>style.visibility</p:attrName>
+                                        </p:attrNameLst>
+                                      </p:cBhvr>
+                                      <p:to>
+                                        <p:strVal val="visible"/>
+                                      </p:to>
+                                    </p:set>
+                                  </p:childTnLst>
+                                </p:cTn>
+                              </p:par>
+                              <p:par>
+                                <p:cTn id="9" presetID="1" presetClass="entr" presetSubtype="0" fill="hold" grpId="0" nodeType="withEffect">
+                                  <p:stCondLst>
+                                    <p:cond delay="0"/>
+                                  </p:stCondLst>
+                                  <p:childTnLst>
+                                    <p:set>
+                                      <p:cBhvr>
+                                        <p:cTn id="10" dur="1" fill="hold">
+                                          <p:stCondLst>
+                                            <p:cond delay="0"/>
+                                          </p:stCondLst>
+                                        </p:cTn>
+                                        <p:tgtEl>
+                                          <p:spTgt spid="13"/>
+                                        </p:tgtEl>
+                                        <p:attrNameLst>
+                                          <p:attrName>style.visibility</p:attrName>
+                                        </p:attrNameLst>
+                                      </p:cBhvr>
+                                      <p:to>
+                                        <p:strVal val="visible"/>
+                                      </p:to>
+                                    </p:set>
+                                  </p:childTnLst>
+                                </p:cTn>
+                              </p:par>
+                              <p:par>
+                                <p:cTn id="11" presetID="1" presetClass="entr" presetSubtype="0" fill="hold" grpId="0" nodeType="withEffect">
+                                  <p:stCondLst>
+                                    <p:cond delay="0"/>
+                                  </p:stCondLst>
+                                  <p:childTnLst>
+                                    <p:set>
+                                      <p:cBhvr>
+                                        <p:cTn id="12" dur="1" fill="hold">
+                                          <p:stCondLst>
+                                            <p:cond delay="0"/>
+                                          </p:stCondLst>
+                                        </p:cTn>
+                                        <p:tgtEl>
+                                          <p:spTgt spid="24"/>
+                                        </p:tgtEl>
+                                        <p:attrNameLst>
+                                          <p:attrName>style.visibility</p:attrName>
+                                        </p:attrNameLst>
+                                      </p:cBhvr>
+                                      <p:to>
+                                        <p:strVal val="visible"/>
+                                      </p:to>
+                                    </p:set>
+                                  </p:childTnLst>
+                                </p:cTn>
+                              </p:par>
+                              <p:par>
+                                <p:cTn id="13" presetID="1" presetClass="entr" presetSubtype="0" fill="hold" grpId="0" nodeType="withEffect">
+                                  <p:stCondLst>
+                                    <p:cond delay="0"/>
+                                  </p:stCondLst>
+                                  <p:childTnLst>
+                                    <p:set>
+                                      <p:cBhvr>
+                                        <p:cTn id="14" dur="1" fill="hold">
+                                          <p:stCondLst>
+                                            <p:cond delay="0"/>
+                                          </p:stCondLst>
+                                        </p:cTn>
+                                        <p:tgtEl>
+                                          <p:spTgt spid="28"/>
+                                        </p:tgtEl>
+                                        <p:attrNameLst>
+                                          <p:attrName>style.visibility</p:attrName>
+                                        </p:attrNameLst>
+                                      </p:cBhvr>
+                                      <p:to>
+                                        <p:strVal val="visible"/>
+                                      </p:to>
+                                    </p:set>
+                                  </p:childTnLst>
+                                </p:cTn>
+                              </p:par>
+                            </p:childTnLst>
+                          </p:cTn>
+                        </p:par>
+                      </p:childTnLst>
+                    </p:cTn>
+                  </p:par>
+                  <p:par>
+                    <p:cTn id="15" fill="hold">
+                      <p:stCondLst>
+                        <p:cond delay="indefinite"/>
+                      </p:stCondLst>
+                      <p:childTnLst>
+                        <p:par>
+                          <p:cTn id="16" fill="hold">
+                            <p:stCondLst>
+                              <p:cond delay="0"/>
+                            </p:stCondLst>
+                            <p:childTnLst>
+                              <p:par>
+                                <p:cTn id="17" presetID="1" presetClass="entr" presetSubtype="0" fill="hold" grpId="0" nodeType="clickEffect">
+                                  <p:stCondLst>
+                                    <p:cond delay="0"/>
+                                  </p:stCondLst>
+                                  <p:childTnLst>
+                                    <p:set>
+                                      <p:cBhvr>
+                                        <p:cTn id="18" dur="1" fill="hold">
+                                          <p:stCondLst>
+                                            <p:cond delay="0"/>
+                                          </p:stCondLst>
+                                        </p:cTn>
+                                        <p:tgtEl>
+                                          <p:spTgt spid="14"/>
+                                        </p:tgtEl>
+                                        <p:attrNameLst>
+                                          <p:attrName>style.visibility</p:attrName>
+                                        </p:attrNameLst>
+                                      </p:cBhvr>
+                                      <p:to>
+                                        <p:strVal val="visible"/>
+                                      </p:to>
+                                    </p:set>
+                                  </p:childTnLst>
+                                </p:cTn>
+                              </p:par>
+                              <p:par>
+                                <p:cTn id="19" presetID="1" presetClass="entr" presetSubtype="0" fill="hold" grpId="0" nodeType="withEffect">
+                                  <p:stCondLst>
+                                    <p:cond delay="0"/>
+                                  </p:stCondLst>
+                                  <p:childTnLst>
+                                    <p:set>
+                                      <p:cBhvr>
+                                        <p:cTn id="20" dur="1" fill="hold">
+                                          <p:stCondLst>
+                                            <p:cond delay="0"/>
+                                          </p:stCondLst>
+                                        </p:cTn>
+                                        <p:tgtEl>
+                                          <p:spTgt spid="15"/>
+                                        </p:tgtEl>
+                                        <p:attrNameLst>
+                                          <p:attrName>style.visibility</p:attrName>
+                                        </p:attrNameLst>
+                                      </p:cBhvr>
+                                      <p:to>
+                                        <p:strVal val="visible"/>
+                                      </p:to>
+                                    </p:set>
+                                  </p:childTnLst>
+                                </p:cTn>
+                              </p:par>
+                              <p:par>
+                                <p:cTn id="21" presetID="1" presetClass="entr" presetSubtype="0" fill="hold" grpId="0" nodeType="withEffect">
+                                  <p:stCondLst>
+                                    <p:cond delay="0"/>
+                                  </p:stCondLst>
+                                  <p:childTnLst>
+                                    <p:set>
+                                      <p:cBhvr>
+                                        <p:cTn id="22" dur="1" fill="hold">
+                                          <p:stCondLst>
+                                            <p:cond delay="0"/>
+                                          </p:stCondLst>
+                                        </p:cTn>
+                                        <p:tgtEl>
+                                          <p:spTgt spid="25"/>
+                                        </p:tgtEl>
+                                        <p:attrNameLst>
+                                          <p:attrName>style.visibility</p:attrName>
+                                        </p:attrNameLst>
+                                      </p:cBhvr>
+                                      <p:to>
+                                        <p:strVal val="visible"/>
+                                      </p:to>
+                                    </p:set>
+                                  </p:childTnLst>
+                                </p:cTn>
+                              </p:par>
+                            </p:childTnLst>
+                          </p:cTn>
+                        </p:par>
+                      </p:childTnLst>
+                    </p:cTn>
+                  </p:par>
+                  <p:par>
+                    <p:cTn id="23" fill="hold">
+                      <p:stCondLst>
+                        <p:cond delay="indefinite"/>
+                      </p:stCondLst>
+                      <p:childTnLst>
+                        <p:par>
+                          <p:cTn id="24" fill="hold">
+                            <p:stCondLst>
+                              <p:cond delay="0"/>
+                            </p:stCondLst>
+                            <p:childTnLst>
+                              <p:par>
+                                <p:cTn id="25" presetID="1" presetClass="entr" presetSubtype="0" fill="hold" grpId="0" nodeType="clickEffect">
+                                  <p:stCondLst>
+                                    <p:cond delay="0"/>
+                                  </p:stCondLst>
+                                  <p:childTnLst>
+                                    <p:set>
+                                      <p:cBhvr>
+                                        <p:cTn id="26" dur="1" fill="hold">
+                                          <p:stCondLst>
+                                            <p:cond delay="0"/>
+                                          </p:stCondLst>
+                                        </p:cTn>
+                                        <p:tgtEl>
+                                          <p:spTgt spid="16"/>
+                                        </p:tgtEl>
+                                        <p:attrNameLst>
+                                          <p:attrName>style.visibility</p:attrName>
+                                        </p:attrNameLst>
+                                      </p:cBhvr>
+                                      <p:to>
+                                        <p:strVal val="visible"/>
+                                      </p:to>
+                                    </p:set>
+                                  </p:childTnLst>
+                                </p:cTn>
+                              </p:par>
+                              <p:par>
+                                <p:cTn id="27" presetID="1" presetClass="entr" presetSubtype="0" fill="hold" grpId="0" nodeType="withEffect">
+                                  <p:stCondLst>
+                                    <p:cond delay="0"/>
+                                  </p:stCondLst>
+                                  <p:childTnLst>
+                                    <p:set>
+                                      <p:cBhvr>
+                                        <p:cTn id="28" dur="1" fill="hold">
+                                          <p:stCondLst>
+                                            <p:cond delay="0"/>
+                                          </p:stCondLst>
+                                        </p:cTn>
+                                        <p:tgtEl>
+                                          <p:spTgt spid="17"/>
+                                        </p:tgtEl>
+                                        <p:attrNameLst>
+                                          <p:attrName>style.visibility</p:attrName>
+                                        </p:attrNameLst>
+                                      </p:cBhvr>
+                                      <p:to>
+                                        <p:strVal val="visible"/>
+                                      </p:to>
+                                    </p:set>
+                                  </p:childTnLst>
+                                </p:cTn>
+                              </p:par>
+                              <p:par>
+                                <p:cTn id="29" presetID="1" presetClass="entr" presetSubtype="0" fill="hold" grpId="0" nodeType="withEffect">
+                                  <p:stCondLst>
+                                    <p:cond delay="0"/>
+                                  </p:stCondLst>
+                                  <p:childTnLst>
+                                    <p:set>
+                                      <p:cBhvr>
+                                        <p:cTn id="30" dur="1" fill="hold">
+                                          <p:stCondLst>
+                                            <p:cond delay="0"/>
+                                          </p:stCondLst>
+                                        </p:cTn>
+                                        <p:tgtEl>
+                                          <p:spTgt spid="18"/>
+                                        </p:tgtEl>
+                                        <p:attrNameLst>
+                                          <p:attrName>style.visibility</p:attrName>
+                                        </p:attrNameLst>
+                                      </p:cBhvr>
+                                      <p:to>
+                                        <p:strVal val="visible"/>
+                                      </p:to>
+                                    </p:set>
+                                  </p:childTnLst>
+                                </p:cTn>
+                              </p:par>
+                              <p:par>
+                                <p:cTn id="31" presetID="1" presetClass="entr" presetSubtype="0" fill="hold" grpId="0" nodeType="withEffect">
+                                  <p:stCondLst>
+                                    <p:cond delay="0"/>
+                                  </p:stCondLst>
+                                  <p:childTnLst>
+                                    <p:set>
+                                      <p:cBhvr>
+                                        <p:cTn id="32" dur="1" fill="hold">
+                                          <p:stCondLst>
+                                            <p:cond delay="0"/>
+                                          </p:stCondLst>
+                                        </p:cTn>
+                                        <p:tgtEl>
+                                          <p:spTgt spid="19"/>
+                                        </p:tgtEl>
+                                        <p:attrNameLst>
+                                          <p:attrName>style.visibility</p:attrName>
+                                        </p:attrNameLst>
+                                      </p:cBhvr>
+                                      <p:to>
+                                        <p:strVal val="visible"/>
+                                      </p:to>
+                                    </p:set>
+                                  </p:childTnLst>
+                                </p:cTn>
+                              </p:par>
+                              <p:par>
+                                <p:cTn id="33" presetID="1" presetClass="entr" presetSubtype="0" fill="hold" grpId="0" nodeType="withEffect">
+                                  <p:stCondLst>
+                                    <p:cond delay="0"/>
+                                  </p:stCondLst>
+                                  <p:childTnLst>
+                                    <p:set>
+                                      <p:cBhvr>
+                                        <p:cTn id="34" dur="1" fill="hold">
+                                          <p:stCondLst>
+                                            <p:cond delay="0"/>
+                                          </p:stCondLst>
+                                        </p:cTn>
+                                        <p:tgtEl>
+                                          <p:spTgt spid="20"/>
+                                        </p:tgtEl>
+                                        <p:attrNameLst>
+                                          <p:attrName>style.visibility</p:attrName>
+                                        </p:attrNameLst>
+                                      </p:cBhvr>
+                                      <p:to>
+                                        <p:strVal val="visible"/>
+                                      </p:to>
+                                    </p:set>
+                                  </p:childTnLst>
+                                </p:cTn>
+                              </p:par>
+                              <p:par>
+                                <p:cTn id="35" presetID="1" presetClass="entr" presetSubtype="0" fill="hold" grpId="0" nodeType="withEffect">
+                                  <p:stCondLst>
+                                    <p:cond delay="0"/>
+                                  </p:stCondLst>
+                                  <p:childTnLst>
+                                    <p:set>
+                                      <p:cBhvr>
+                                        <p:cTn id="36" dur="1" fill="hold">
+                                          <p:stCondLst>
+                                            <p:cond delay="0"/>
+                                          </p:stCondLst>
+                                        </p:cTn>
+                                        <p:tgtEl>
+                                          <p:spTgt spid="21"/>
+                                        </p:tgtEl>
+                                        <p:attrNameLst>
+                                          <p:attrName>style.visibility</p:attrName>
+                                        </p:attrNameLst>
+                                      </p:cBhvr>
+                                      <p:to>
+                                        <p:strVal val="visible"/>
+                                      </p:to>
+                                    </p:set>
+                                  </p:childTnLst>
+                                </p:cTn>
+                              </p:par>
+                              <p:par>
+                                <p:cTn id="37" presetID="1" presetClass="entr" presetSubtype="0" fill="hold" grpId="0" nodeType="withEffect">
+                                  <p:stCondLst>
+                                    <p:cond delay="0"/>
+                                  </p:stCondLst>
+                                  <p:childTnLst>
+                                    <p:set>
+                                      <p:cBhvr>
+                                        <p:cTn id="38" dur="1" fill="hold">
+                                          <p:stCondLst>
+                                            <p:cond delay="0"/>
+                                          </p:stCondLst>
+                                        </p:cTn>
+                                        <p:tgtEl>
+                                          <p:spTgt spid="22"/>
+                                        </p:tgtEl>
+                                        <p:attrNameLst>
+                                          <p:attrName>style.visibility</p:attrName>
+                                        </p:attrNameLst>
+                                      </p:cBhvr>
+                                      <p:to>
+                                        <p:strVal val="visible"/>
+                                      </p:to>
+                                    </p:set>
+                                  </p:childTnLst>
+                                </p:cTn>
+                              </p:par>
+                              <p:par>
+                                <p:cTn id="39" presetID="1" presetClass="entr" presetSubtype="0" fill="hold" grpId="0" nodeType="withEffect">
+                                  <p:stCondLst>
+                                    <p:cond delay="0"/>
+                                  </p:stCondLst>
+                                  <p:childTnLst>
+                                    <p:set>
+                                      <p:cBhvr>
+                                        <p:cTn id="40" dur="1" fill="hold">
+                                          <p:stCondLst>
+                                            <p:cond delay="0"/>
+                                          </p:stCondLst>
+                                        </p:cTn>
+                                        <p:tgtEl>
+                                          <p:spTgt spid="23"/>
+                                        </p:tgtEl>
+                                        <p:attrNameLst>
+                                          <p:attrName>style.visibility</p:attrName>
+                                        </p:attrNameLst>
+                                      </p:cBhvr>
+                                      <p:to>
+                                        <p:strVal val="visible"/>
+                                      </p:to>
+                                    </p:set>
+                                  </p:childTnLst>
+                                </p:cTn>
+                              </p:par>
+                              <p:par>
+                                <p:cTn id="41" presetID="1" presetClass="entr" presetSubtype="0" fill="hold" grpId="0" nodeType="withEffect">
+                                  <p:stCondLst>
+                                    <p:cond delay="0"/>
+                                  </p:stCondLst>
+                                  <p:childTnLst>
+                                    <p:set>
+                                      <p:cBhvr>
+                                        <p:cTn id="42" dur="1" fill="hold">
+                                          <p:stCondLst>
+                                            <p:cond delay="0"/>
+                                          </p:stCondLst>
+                                        </p:cTn>
+                                        <p:tgtEl>
+                                          <p:spTgt spid="26"/>
+                                        </p:tgtEl>
+                                        <p:attrNameLst>
+                                          <p:attrName>style.visibility</p:attrName>
+                                        </p:attrNameLst>
+                                      </p:cBhvr>
+                                      <p:to>
+                                        <p:strVal val="visible"/>
+                                      </p:to>
+                                    </p:set>
+                                  </p:childTnLst>
+                                </p:cTn>
+                              </p:par>
+                            </p:childTnLst>
+                          </p:cTn>
+                        </p:par>
+                      </p:childTnLst>
+                    </p:cTn>
+                  </p:par>
+                  <p:par>
+                    <p:cTn id="43" fill="hold">
+                      <p:stCondLst>
+                        <p:cond delay="indefinite"/>
+                      </p:stCondLst>
+                      <p:childTnLst>
+                        <p:par>
+                          <p:cTn id="44" fill="hold">
+                            <p:stCondLst>
+                              <p:cond delay="0"/>
+                            </p:stCondLst>
+                            <p:childTnLst>
+                              <p:par>
+                                <p:cTn id="45" presetID="1" presetClass="entr" presetSubtype="0" fill="hold" grpId="0" nodeType="clickEffect">
+                                  <p:stCondLst>
+                                    <p:cond delay="0"/>
+                                  </p:stCondLst>
+                                  <p:childTnLst>
+                                    <p:set>
+                                      <p:cBhvr>
+                                        <p:cTn id="46" dur="1" fill="hold">
+                                          <p:stCondLst>
+                                            <p:cond delay="0"/>
+                                          </p:stCondLst>
+                                        </p:cTn>
+                                        <p:tgtEl>
+                                          <p:spTgt spid="29"/>
+                                        </p:tgtEl>
+                                        <p:attrNameLst>
+                                          <p:attrName>style.visibility</p:attrName>
+                                        </p:attrNameLst>
+                                      </p:cBhvr>
+                                      <p:to>
+                                        <p:strVal val="visible"/>
+                                      </p:to>
+                                    </p:set>
+                                  </p:childTnLst>
+                                </p:cTn>
+                              </p:par>
+                            </p:childTnLst>
+                          </p:cTn>
+                        </p:par>
+                      </p:childTnLst>
+                    </p:cTn>
+                  </p:par>
+                </p:childTnLst>
+              </p:cTn>
+              <p:prevCondLst>
+                <p:cond evt="onPrev" delay="0">
+                  <p:tgtEl>
+                    <p:sldTgt/>
+                  </p:tgtEl>
+                </p:cond>
+              </p:prevCondLst>
+              <p:nextCondLst>
+                <p:cond evt="onNext" delay="0">
+                  <p:tgtEl>
+                    <p:sldTgt/>
+                  </p:tgtEl>
+                </p:cond>
+              </p:nextCondLst>
+            </p:seq>
+          </p:childTnLst>
+        </p:cTn>
+      </p:par>
+    </p:tnLst>
+    <p:bldLst>
+      <p:bldP spid="11" grpId="0" animBg="1"/>
+      <p:bldP spid="12" grpId="0" animBg="1"/>
+      <p:bldP spid="13" grpId="0" animBg="1"/>
+      <p:bldP spid="14" grpId="0" animBg="1"/>
+      <p:bldP spid="15" grpId="0" animBg="1"/>
+      <p:bldP spid="16" grpId="0" animBg="1"/>
+      <p:bldP spid="17" grpId="0" animBg="1"/>
+      <p:bldP spid="18" grpId="0" animBg="1"/>
+      <p:bldP spid="19" grpId="0" animBg="1"/>
+      <p:bldP spid="20" grpId="0" animBg="1"/>
+      <p:bldP spid="21" grpId="0" animBg="1"/>
+      <p:bldP spid="22" grpId="0" animBg="1"/>
+      <p:bldP spid="23" grpId="0" animBg="1"/>
+      <p:bldP spid="24" grpId="0" animBg="1"/>
+      <p:bldP spid="25" grpId="0" animBg="1"/>
+      <p:bldP spid="26" grpId="0" animBg="1"/>
+      <p:bldP spid="28" grpId="0" animBg="1"/>
+      <p:bldP spid="29" grpId="0" animBg="1"/>
+    </p:bldLst>
+  </p:timing>
 </p:sld>
 </file>
 
@@ -12079,34 +13806,32 @@
         </p:nvSpPr>
         <p:spPr>
           <a:xfrm>
-            <a:off x="640080" y="6172200"/>
-            <a:ext cx="10908792" cy="365760"/>
-          </a:xfrm>
-          <a:prstGeom prst="rect">
-            <a:avLst/>
-          </a:prstGeom>
-          <a:noFill/>
-          <a:ln/>
-        </p:spPr>
-        <p:txBody>
-          <a:bodyPr wrap="square" lIns="0" tIns="0" rIns="0" bIns="0" rtlCol="0" anchor="ctr"/>
-          <a:lstStyle/>
-          <a:p>
-            <a:pPr marL="0" indent="0">
-              <a:buNone/>
-            </a:pPr>
-            <a:r>
-              <a:rPr lang="en-US" sz="1500" dirty="0">
-                <a:solidFill>
-                  <a:srgbClr val="8A9AAE"/>
-                </a:solidFill>
-                <a:latin typeface="Calibri" pitchFamily="34" charset="0"/>
-                <a:ea typeface="Calibri" pitchFamily="34" charset="-122"/>
-                <a:cs typeface="Calibri" pitchFamily="34" charset="-120"/>
-              </a:rPr>
-              <a:t>Get-ToolManifest.ps1 reads the AST. No schema is written by hand.</a:t>
-            </a:r>
-            <a:endParaRPr lang="en-US" sz="1500" dirty="0"/>
+            <a:off x="2463209" y="5989320"/>
+            <a:ext cx="7235101" cy="365760"/>
+          </a:xfrm>
+          <a:prstGeom prst="rect">
+            <a:avLst/>
+          </a:prstGeom>
+          <a:noFill/>
+          <a:ln/>
+        </p:spPr>
+        <p:txBody>
+          <a:bodyPr wrap="square" lIns="0" tIns="0" rIns="0" bIns="0" rtlCol="0" anchor="ctr"/>
+          <a:lstStyle/>
+          <a:p>
+            <a:r>
+              <a:rPr lang="en-US" sz="1600" dirty="0">
+                <a:solidFill>
+                  <a:schemeClr val="bg2"/>
+                </a:solidFill>
+              </a:rPr>
+              <a:t>Get-ToolManifest.ps1 reads your param blocks and help. No schema is written by hand.</a:t>
+            </a:r>
+            <a:endParaRPr lang="en-US" sz="1500" dirty="0">
+              <a:solidFill>
+                <a:schemeClr val="bg2"/>
+              </a:solidFill>
+            </a:endParaRPr>
           </a:p>
         </p:txBody>
       </p:sp>

--- a/mcp-for-everything/slides/session1-mcp-for-everything.pptx
+++ b/mcp-for-everything/slides/session1-mcp-for-everything.pptx
@@ -5,7 +5,7 @@
     <p:sldMasterId id="2147483648" r:id="rId1"/>
   </p:sldMasterIdLst>
   <p:notesMasterIdLst>
-    <p:notesMasterId r:id="rId23"/>
+    <p:notesMasterId r:id="rId22"/>
   </p:notesMasterIdLst>
   <p:sldIdLst>
     <p:sldId id="256" r:id="rId2"/>
@@ -25,10 +25,9 @@
     <p:sldId id="270" r:id="rId16"/>
     <p:sldId id="271" r:id="rId17"/>
     <p:sldId id="272" r:id="rId18"/>
-    <p:sldId id="273" r:id="rId19"/>
-    <p:sldId id="274" r:id="rId20"/>
-    <p:sldId id="275" r:id="rId21"/>
-    <p:sldId id="276" r:id="rId22"/>
+    <p:sldId id="274" r:id="rId19"/>
+    <p:sldId id="275" r:id="rId20"/>
+    <p:sldId id="276" r:id="rId21"/>
   </p:sldIdLst>
   <p:sldSz cx="12192000" cy="6858000"/>
   <p:notesSz cx="6858000" cy="12192000"/>
@@ -1086,7 +1085,7 @@
           <a:p>
             <a:r>
               <a:rPr lang="en-US" dirty="0"/>
-              <a:t>Four short things, next slide has them. Default deny: healthz shows registered vs exposed, then -AllowWriteTools. Injection: the ticket tells the assistant to restart the service; show the raw ticket, the fenced output, nothing ran. Audit: Get-Content logs/audit.jsonl | ConvertFrom-Json | Format-Table. Identity: one sentence.</a:t>
+              <a:t>Fencing tool output is mitigation, not a boundary. The boundary is the allowlist and the account the host runs as. Say that plainly.</a:t>
             </a:r>
           </a:p>
         </p:txBody>
@@ -1173,7 +1172,7 @@
           <a:p>
             <a:r>
               <a:rPr lang="en-US" dirty="0"/>
-              <a:t>Fencing tool output is mitigation, not a boundary. The boundary is the allowlist and the account the host runs as. Say that plainly.</a:t>
+              <a:t>Send them home with a task. The same server works from any client - mention Foundry Agent Service and Copilot Studio here, or demo it if the tunnel is up and there is time.</a:t>
             </a:r>
           </a:p>
         </p:txBody>
@@ -1347,7 +1346,7 @@
           <a:p>
             <a:r>
               <a:rPr lang="en-US" dirty="0"/>
-              <a:t>Send them home with a task. The same server works from any client - mention Foundry Agent Service and Copilot Studio here, or demo it if the tunnel is up and there is time.</a:t>
+              <a:t>Repo has the host, every tool, the run of show and this deck's build script. Q&amp;A.</a:t>
             </a:r>
           </a:p>
         </p:txBody>
@@ -1370,93 +1369,6 @@
             <a:fld id="{F7021451-1387-4CA6-816F-3879F97B5CBC}" type="slidenum">
               <a:rPr lang="en-US"/>
               <a:t>20</a:t>
-            </a:fld>
-            <a:endParaRPr lang="en-US"/>
-          </a:p>
-        </p:txBody>
-      </p:sp>
-    </p:spTree>
-    <p:extLst>
-      <p:ext uri="{BB962C8B-B14F-4D97-AF65-F5344CB8AC3E}">
-        <p14:creationId xmlns:p14="http://schemas.microsoft.com/office/powerpoint/2010/main" val="1024086991"/>
-      </p:ext>
-    </p:extLst>
-  </p:cSld>
-  <p:clrMapOvr>
-    <a:masterClrMapping/>
-  </p:clrMapOvr>
-</p:notes>
-</file>
-
-<file path=ppt/notesSlides/notesSlide21.xml><?xml version="1.0" encoding="utf-8"?>
-<p:notes xmlns:a="http://schemas.openxmlformats.org/drawingml/2006/main" xmlns:r="http://schemas.openxmlformats.org/officeDocument/2006/relationships" xmlns:p="http://schemas.openxmlformats.org/presentationml/2006/main">
-  <p:cSld>
-    <p:spTree>
-      <p:nvGrpSpPr>
-        <p:cNvPr id="1" name=""/>
-        <p:cNvGrpSpPr/>
-        <p:nvPr/>
-      </p:nvGrpSpPr>
-      <p:grpSpPr>
-        <a:xfrm>
-          <a:off x="0" y="0"/>
-          <a:ext cx="0" cy="0"/>
-          <a:chOff x="0" y="0"/>
-          <a:chExt cx="0" cy="0"/>
-        </a:xfrm>
-      </p:grpSpPr>
-      <p:sp>
-        <p:nvSpPr>
-          <p:cNvPr id="2" name="Slide Image Placeholder 1"/>
-          <p:cNvSpPr>
-            <a:spLocks noGrp="1" noRot="1" noChangeAspect="1"/>
-          </p:cNvSpPr>
-          <p:nvPr>
-            <p:ph type="sldImg"/>
-          </p:nvPr>
-        </p:nvSpPr>
-        <p:spPr/>
-      </p:sp>
-      <p:sp>
-        <p:nvSpPr>
-          <p:cNvPr id="3" name="Notes Placeholder 2"/>
-          <p:cNvSpPr>
-            <a:spLocks noGrp="1"/>
-          </p:cNvSpPr>
-          <p:nvPr>
-            <p:ph type="body" idx="1"/>
-          </p:nvPr>
-        </p:nvSpPr>
-        <p:spPr/>
-        <p:txBody>
-          <a:bodyPr/>
-          <a:lstStyle/>
-          <a:p>
-            <a:r>
-              <a:rPr lang="en-US" dirty="0"/>
-              <a:t>Repo has the host, every tool, the run of show and this deck's build script. Q&amp;A.</a:t>
-            </a:r>
-          </a:p>
-        </p:txBody>
-      </p:sp>
-      <p:sp>
-        <p:nvSpPr>
-          <p:cNvPr id="4" name="Slide Number Placeholder 3"/>
-          <p:cNvSpPr>
-            <a:spLocks noGrp="1"/>
-          </p:cNvSpPr>
-          <p:nvPr>
-            <p:ph type="sldNum" sz="quarter" idx="10"/>
-          </p:nvPr>
-        </p:nvSpPr>
-        <p:spPr/>
-        <p:txBody>
-          <a:bodyPr/>
-          <a:lstStyle/>
-          <a:p>
-            <a:fld id="{F7021451-1387-4CA6-816F-3879F97B5CBC}" type="slidenum">
-              <a:rPr lang="en-US"/>
-              <a:t>21</a:t>
             </a:fld>
             <a:endParaRPr lang="en-US"/>
           </a:p>
@@ -5571,268 +5483,6 @@
 
 <file path=ppt/slides/slide18.xml><?xml version="1.0" encoding="utf-8"?>
 <p:sld xmlns:a="http://schemas.openxmlformats.org/drawingml/2006/main" xmlns:r="http://schemas.openxmlformats.org/officeDocument/2006/relationships" xmlns:p="http://schemas.openxmlformats.org/presentationml/2006/main">
-  <p:cSld name="Slide 18">
-    <p:bg>
-      <p:bgPr>
-        <a:solidFill>
-          <a:srgbClr val="0F1419"/>
-        </a:solidFill>
-        <a:effectLst/>
-      </p:bgPr>
-    </p:bg>
-    <p:spTree>
-      <p:nvGrpSpPr>
-        <p:cNvPr id="1" name=""/>
-        <p:cNvGrpSpPr/>
-        <p:nvPr/>
-      </p:nvGrpSpPr>
-      <p:grpSpPr>
-        <a:xfrm>
-          <a:off x="0" y="0"/>
-          <a:ext cx="0" cy="0"/>
-          <a:chOff x="0" y="0"/>
-          <a:chExt cx="0" cy="0"/>
-        </a:xfrm>
-      </p:grpSpPr>
-      <p:sp>
-        <p:nvSpPr>
-          <p:cNvPr id="3" name="Text 0"/>
-          <p:cNvSpPr/>
-          <p:nvPr/>
-        </p:nvSpPr>
-        <p:spPr>
-          <a:xfrm>
-            <a:off x="822960" y="1828800"/>
-            <a:ext cx="5486400" cy="365760"/>
-          </a:xfrm>
-          <a:prstGeom prst="rect">
-            <a:avLst/>
-          </a:prstGeom>
-          <a:noFill/>
-          <a:ln/>
-        </p:spPr>
-        <p:txBody>
-          <a:bodyPr wrap="square" lIns="0" tIns="0" rIns="0" bIns="0" rtlCol="0" anchor="ctr"/>
-          <a:lstStyle/>
-          <a:p>
-            <a:pPr marL="0" indent="0">
-              <a:buNone/>
-            </a:pPr>
-            <a:r>
-              <a:rPr lang="en-US" sz="1400" b="1" kern="0" spc="300" dirty="0">
-                <a:solidFill>
-                  <a:srgbClr val="5FD3BC"/>
-                </a:solidFill>
-                <a:latin typeface="Calibri" pitchFamily="34" charset="0"/>
-                <a:ea typeface="Calibri" pitchFamily="34" charset="-122"/>
-                <a:cs typeface="Calibri" pitchFamily="34" charset="-120"/>
-              </a:rPr>
-              <a:t>DEMO 7</a:t>
-            </a:r>
-            <a:endParaRPr lang="en-US" sz="1400" dirty="0"/>
-          </a:p>
-        </p:txBody>
-      </p:sp>
-      <p:sp>
-        <p:nvSpPr>
-          <p:cNvPr id="4" name="Text 1"/>
-          <p:cNvSpPr/>
-          <p:nvPr/>
-        </p:nvSpPr>
-        <p:spPr>
-          <a:xfrm>
-            <a:off x="822960" y="2240280"/>
-            <a:ext cx="10515600" cy="822960"/>
-          </a:xfrm>
-          <a:prstGeom prst="rect">
-            <a:avLst/>
-          </a:prstGeom>
-          <a:noFill/>
-          <a:ln/>
-        </p:spPr>
-        <p:txBody>
-          <a:bodyPr wrap="square" lIns="0" tIns="0" rIns="0" bIns="0" rtlCol="0" anchor="ctr"/>
-          <a:lstStyle/>
-          <a:p>
-            <a:pPr marL="0" indent="0">
-              <a:buNone/>
-            </a:pPr>
-            <a:r>
-              <a:rPr lang="en-US" sz="4000" b="1" dirty="0">
-                <a:solidFill>
-                  <a:srgbClr val="E9EEF5"/>
-                </a:solidFill>
-                <a:latin typeface="Calibri" pitchFamily="34" charset="0"/>
-                <a:ea typeface="Calibri" pitchFamily="34" charset="-122"/>
-                <a:cs typeface="Calibri" pitchFamily="34" charset="-120"/>
-              </a:rPr>
-              <a:t>Guardrails</a:t>
-            </a:r>
-            <a:endParaRPr lang="en-US" sz="4000" dirty="0"/>
-          </a:p>
-        </p:txBody>
-      </p:sp>
-      <p:sp>
-        <p:nvSpPr>
-          <p:cNvPr id="5" name="Text 2"/>
-          <p:cNvSpPr/>
-          <p:nvPr/>
-        </p:nvSpPr>
-        <p:spPr>
-          <a:xfrm>
-            <a:off x="822960" y="3108960"/>
-            <a:ext cx="10515600" cy="457200"/>
-          </a:xfrm>
-          <a:prstGeom prst="rect">
-            <a:avLst/>
-          </a:prstGeom>
-          <a:noFill/>
-          <a:ln/>
-        </p:spPr>
-        <p:txBody>
-          <a:bodyPr wrap="square" lIns="0" tIns="0" rIns="0" bIns="0" rtlCol="0" anchor="ctr"/>
-          <a:lstStyle/>
-          <a:p>
-            <a:pPr marL="0" indent="0">
-              <a:buNone/>
-            </a:pPr>
-            <a:r>
-              <a:rPr lang="en-US" sz="1500" dirty="0">
-                <a:solidFill>
-                  <a:srgbClr val="8A9AAE"/>
-                </a:solidFill>
-                <a:latin typeface="Consolas" pitchFamily="34" charset="0"/>
-                <a:ea typeface="Consolas" pitchFamily="34" charset="-122"/>
-                <a:cs typeface="Consolas" pitchFamily="34" charset="-120"/>
-              </a:rPr>
-              <a:t>Restart-DemoService.ps1   ·   /healthz   ·   logs/audit.jsonl   ·   INC-88301</a:t>
-            </a:r>
-            <a:endParaRPr lang="en-US" sz="1500" dirty="0"/>
-          </a:p>
-        </p:txBody>
-      </p:sp>
-      <p:sp>
-        <p:nvSpPr>
-          <p:cNvPr id="6" name="Shape 3"/>
-          <p:cNvSpPr/>
-          <p:nvPr/>
-        </p:nvSpPr>
-        <p:spPr>
-          <a:xfrm>
-            <a:off x="822960" y="4114800"/>
-            <a:ext cx="10515600" cy="1005840"/>
-          </a:xfrm>
-          <a:prstGeom prst="roundRect">
-            <a:avLst>
-              <a:gd name="adj" fmla="val 5455"/>
-            </a:avLst>
-          </a:prstGeom>
-          <a:solidFill>
-            <a:srgbClr val="1C2530"/>
-          </a:solidFill>
-          <a:ln w="12700">
-            <a:solidFill>
-              <a:srgbClr val="2C3949"/>
-            </a:solidFill>
-            <a:prstDash val="solid"/>
-          </a:ln>
-        </p:spPr>
-        <p:txBody>
-          <a:bodyPr/>
-          <a:lstStyle/>
-          <a:p>
-            <a:endParaRPr lang="en-US"/>
-          </a:p>
-        </p:txBody>
-      </p:sp>
-      <p:sp>
-        <p:nvSpPr>
-          <p:cNvPr id="7" name="Text 4"/>
-          <p:cNvSpPr/>
-          <p:nvPr/>
-        </p:nvSpPr>
-        <p:spPr>
-          <a:xfrm>
-            <a:off x="1051560" y="4251960"/>
-            <a:ext cx="914400" cy="256032"/>
-          </a:xfrm>
-          <a:prstGeom prst="rect">
-            <a:avLst/>
-          </a:prstGeom>
-          <a:noFill/>
-          <a:ln/>
-        </p:spPr>
-        <p:txBody>
-          <a:bodyPr wrap="square" lIns="0" tIns="0" rIns="0" bIns="0" rtlCol="0" anchor="ctr"/>
-          <a:lstStyle/>
-          <a:p>
-            <a:pPr marL="0" indent="0">
-              <a:buNone/>
-            </a:pPr>
-            <a:r>
-              <a:rPr lang="en-US" sz="1100" b="1" kern="0" spc="200" dirty="0">
-                <a:solidFill>
-                  <a:srgbClr val="F2C14E"/>
-                </a:solidFill>
-                <a:latin typeface="Calibri" pitchFamily="34" charset="0"/>
-                <a:ea typeface="Calibri" pitchFamily="34" charset="-122"/>
-                <a:cs typeface="Calibri" pitchFamily="34" charset="-120"/>
-              </a:rPr>
-              <a:t>ASK</a:t>
-            </a:r>
-            <a:endParaRPr lang="en-US" sz="1100" dirty="0"/>
-          </a:p>
-        </p:txBody>
-      </p:sp>
-      <p:sp>
-        <p:nvSpPr>
-          <p:cNvPr id="8" name="Text 5"/>
-          <p:cNvSpPr/>
-          <p:nvPr/>
-        </p:nvSpPr>
-        <p:spPr>
-          <a:xfrm>
-            <a:off x="1051560" y="4526280"/>
-            <a:ext cx="10058400" cy="502920"/>
-          </a:xfrm>
-          <a:prstGeom prst="rect">
-            <a:avLst/>
-          </a:prstGeom>
-          <a:noFill/>
-          <a:ln/>
-        </p:spPr>
-        <p:txBody>
-          <a:bodyPr wrap="square" lIns="0" tIns="0" rIns="0" bIns="0" rtlCol="0" anchor="ctr"/>
-          <a:lstStyle/>
-          <a:p>
-            <a:pPr marL="0" indent="0">
-              <a:buNone/>
-            </a:pPr>
-            <a:r>
-              <a:rPr lang="en-US" sz="1700" dirty="0">
-                <a:solidFill>
-                  <a:srgbClr val="E9EEF5"/>
-                </a:solidFill>
-                <a:latin typeface="Calibri" pitchFamily="34" charset="0"/>
-                <a:ea typeface="Calibri" pitchFamily="34" charset="-122"/>
-                <a:cs typeface="Calibri" pitchFamily="34" charset="-120"/>
-              </a:rPr>
-              <a:t>Search the tickets for anything about maintenance mode.</a:t>
-            </a:r>
-            <a:endParaRPr lang="en-US" sz="1700" dirty="0"/>
-          </a:p>
-        </p:txBody>
-      </p:sp>
-    </p:spTree>
-  </p:cSld>
-  <p:clrMapOvr>
-    <a:masterClrMapping/>
-  </p:clrMapOvr>
-</p:sld>
-</file>
-
-<file path=ppt/slides/slide19.xml><?xml version="1.0" encoding="utf-8"?>
-<p:sld xmlns:a="http://schemas.openxmlformats.org/drawingml/2006/main" xmlns:r="http://schemas.openxmlformats.org/officeDocument/2006/relationships" xmlns:p="http://schemas.openxmlformats.org/presentationml/2006/main">
   <p:cSld name="Slide 19">
     <p:bg>
       <p:bgPr>
@@ -5880,17 +5530,6 @@
             <a:pPr marL="0" indent="0">
               <a:buNone/>
             </a:pPr>
-            <a:r>
-              <a:rPr lang="en-US" sz="1200" b="1" kern="0" spc="200" dirty="0">
-                <a:solidFill>
-                  <a:srgbClr val="8A9AAE"/>
-                </a:solidFill>
-                <a:latin typeface="Calibri" pitchFamily="34" charset="0"/>
-                <a:ea typeface="Calibri" pitchFamily="34" charset="-122"/>
-                <a:cs typeface="Calibri" pitchFamily="34" charset="-120"/>
-              </a:rPr>
-              <a:t>DEMO 7</a:t>
-            </a:r>
             <a:endParaRPr lang="en-US" sz="1200" dirty="0"/>
           </a:p>
         </p:txBody>
@@ -6390,163 +6029,7 @@
 </p:sld>
 </file>
 
-<file path=ppt/slides/slide2.xml><?xml version="1.0" encoding="utf-8"?>
-<p:sld xmlns:a="http://schemas.openxmlformats.org/drawingml/2006/main" xmlns:r="http://schemas.openxmlformats.org/officeDocument/2006/relationships" xmlns:p="http://schemas.openxmlformats.org/presentationml/2006/main">
-  <p:cSld name="Slide 2">
-    <p:bg>
-      <p:bgPr>
-        <a:solidFill>
-          <a:srgbClr val="0F1419"/>
-        </a:solidFill>
-        <a:effectLst/>
-      </p:bgPr>
-    </p:bg>
-    <p:spTree>
-      <p:nvGrpSpPr>
-        <p:cNvPr id="1" name=""/>
-        <p:cNvGrpSpPr/>
-        <p:nvPr/>
-      </p:nvGrpSpPr>
-      <p:grpSpPr>
-        <a:xfrm>
-          <a:off x="0" y="0"/>
-          <a:ext cx="0" cy="0"/>
-          <a:chOff x="0" y="0"/>
-          <a:chExt cx="0" cy="0"/>
-        </a:xfrm>
-      </p:grpSpPr>
-      <p:sp>
-        <p:nvSpPr>
-          <p:cNvPr id="3" name="Text 0"/>
-          <p:cNvSpPr/>
-          <p:nvPr/>
-        </p:nvSpPr>
-        <p:spPr>
-          <a:xfrm>
-            <a:off x="640080" y="411480"/>
-            <a:ext cx="10908792" cy="731520"/>
-          </a:xfrm>
-          <a:prstGeom prst="rect">
-            <a:avLst/>
-          </a:prstGeom>
-          <a:noFill/>
-          <a:ln/>
-        </p:spPr>
-        <p:txBody>
-          <a:bodyPr wrap="square" lIns="0" tIns="0" rIns="0" bIns="0" rtlCol="0" anchor="ctr"/>
-          <a:lstStyle/>
-          <a:p>
-            <a:pPr marL="0" indent="0">
-              <a:buNone/>
-            </a:pPr>
-            <a:r>
-              <a:rPr lang="en-US" sz="3200" b="1" dirty="0">
-                <a:solidFill>
-                  <a:srgbClr val="E9EEF5"/>
-                </a:solidFill>
-                <a:latin typeface="Calibri" pitchFamily="34" charset="0"/>
-                <a:ea typeface="Calibri" pitchFamily="34" charset="-122"/>
-                <a:cs typeface="Calibri" pitchFamily="34" charset="-120"/>
-              </a:rPr>
-              <a:t>Donnie Taylor</a:t>
-            </a:r>
-            <a:endParaRPr lang="en-US" sz="3200" dirty="0"/>
-          </a:p>
-        </p:txBody>
-      </p:sp>
-      <p:sp>
-        <p:nvSpPr>
-          <p:cNvPr id="4" name="Text 1"/>
-          <p:cNvSpPr/>
-          <p:nvPr/>
-        </p:nvSpPr>
-        <p:spPr>
-          <a:xfrm>
-            <a:off x="640080" y="1463040"/>
-            <a:ext cx="10908792" cy="4572000"/>
-          </a:xfrm>
-          <a:prstGeom prst="rect">
-            <a:avLst/>
-          </a:prstGeom>
-          <a:noFill/>
-          <a:ln/>
-        </p:spPr>
-        <p:txBody>
-          <a:bodyPr wrap="square" lIns="0" tIns="0" rIns="0" bIns="0" rtlCol="0" anchor="t"/>
-          <a:lstStyle/>
-          <a:p>
-            <a:pPr marL="279400" indent="-279400">
-              <a:spcAft>
-                <a:spcPts val="1000"/>
-              </a:spcAft>
-              <a:buSzPct val="100000"/>
-              <a:buChar char="•"/>
-            </a:pPr>
-            <a:r>
-              <a:rPr lang="en-US" sz="2000" dirty="0">
-                <a:solidFill>
-                  <a:srgbClr val="E9EEF5"/>
-                </a:solidFill>
-                <a:latin typeface="Calibri" pitchFamily="34" charset="0"/>
-                <a:ea typeface="Calibri" pitchFamily="34" charset="-122"/>
-                <a:cs typeface="Calibri" pitchFamily="34" charset="-120"/>
-              </a:rPr>
-              <a:t>Microsoft MVP</a:t>
-            </a:r>
-            <a:endParaRPr lang="en-US" sz="2000" dirty="0"/>
-          </a:p>
-          <a:p>
-            <a:pPr marL="279400" indent="-279400">
-              <a:spcAft>
-                <a:spcPts val="1000"/>
-              </a:spcAft>
-              <a:buSzPct val="100000"/>
-              <a:buChar char="•"/>
-            </a:pPr>
-            <a:r>
-              <a:rPr lang="en-US" sz="2000" dirty="0">
-                <a:solidFill>
-                  <a:srgbClr val="E9EEF5"/>
-                </a:solidFill>
-                <a:latin typeface="Calibri" pitchFamily="34" charset="0"/>
-                <a:ea typeface="Calibri" pitchFamily="34" charset="-122"/>
-                <a:cs typeface="Calibri" pitchFamily="34" charset="-120"/>
-              </a:rPr>
-              <a:t>Azure, PowerShell, AI wrangler</a:t>
-            </a:r>
-          </a:p>
-          <a:p>
-            <a:pPr marL="279400" indent="-279400">
-              <a:spcAft>
-                <a:spcPts val="1000"/>
-              </a:spcAft>
-              <a:buSzPct val="100000"/>
-              <a:buChar char="•"/>
-            </a:pPr>
-            <a:r>
-              <a:rPr lang="en-US" sz="2000" dirty="0">
-                <a:solidFill>
-                  <a:srgbClr val="E9EEF5"/>
-                </a:solidFill>
-                <a:latin typeface="Calibri" pitchFamily="34" charset="0"/>
-                <a:ea typeface="Calibri" pitchFamily="34" charset="-122"/>
-                <a:cs typeface="Calibri" pitchFamily="34" charset="-120"/>
-              </a:rPr>
-              <a:t>draith.com  ·  github.com/donnietaylor  ·  @donnietaylor.bsky.social</a:t>
-            </a:r>
-            <a:endParaRPr lang="en-US" sz="2000" dirty="0"/>
-          </a:p>
-        </p:txBody>
-      </p:sp>
-    </p:spTree>
-  </p:cSld>
-  <p:clrMapOvr>
-    <a:masterClrMapping/>
-  </p:clrMapOvr>
-</p:sld>
-</file>
-
-<file path=ppt/slides/slide20.xml><?xml version="1.0" encoding="utf-8"?>
+<file path=ppt/slides/slide19.xml><?xml version="1.0" encoding="utf-8"?>
 <p:sld xmlns:a="http://schemas.openxmlformats.org/drawingml/2006/main" xmlns:r="http://schemas.openxmlformats.org/officeDocument/2006/relationships" xmlns:p="http://schemas.openxmlformats.org/presentationml/2006/main">
   <p:cSld name="Slide 20">
     <p:bg>
@@ -7059,7 +6542,163 @@
 </p:sld>
 </file>
 
-<file path=ppt/slides/slide21.xml><?xml version="1.0" encoding="utf-8"?>
+<file path=ppt/slides/slide2.xml><?xml version="1.0" encoding="utf-8"?>
+<p:sld xmlns:a="http://schemas.openxmlformats.org/drawingml/2006/main" xmlns:r="http://schemas.openxmlformats.org/officeDocument/2006/relationships" xmlns:p="http://schemas.openxmlformats.org/presentationml/2006/main">
+  <p:cSld name="Slide 2">
+    <p:bg>
+      <p:bgPr>
+        <a:solidFill>
+          <a:srgbClr val="0F1419"/>
+        </a:solidFill>
+        <a:effectLst/>
+      </p:bgPr>
+    </p:bg>
+    <p:spTree>
+      <p:nvGrpSpPr>
+        <p:cNvPr id="1" name=""/>
+        <p:cNvGrpSpPr/>
+        <p:nvPr/>
+      </p:nvGrpSpPr>
+      <p:grpSpPr>
+        <a:xfrm>
+          <a:off x="0" y="0"/>
+          <a:ext cx="0" cy="0"/>
+          <a:chOff x="0" y="0"/>
+          <a:chExt cx="0" cy="0"/>
+        </a:xfrm>
+      </p:grpSpPr>
+      <p:sp>
+        <p:nvSpPr>
+          <p:cNvPr id="3" name="Text 0"/>
+          <p:cNvSpPr/>
+          <p:nvPr/>
+        </p:nvSpPr>
+        <p:spPr>
+          <a:xfrm>
+            <a:off x="640080" y="411480"/>
+            <a:ext cx="10908792" cy="731520"/>
+          </a:xfrm>
+          <a:prstGeom prst="rect">
+            <a:avLst/>
+          </a:prstGeom>
+          <a:noFill/>
+          <a:ln/>
+        </p:spPr>
+        <p:txBody>
+          <a:bodyPr wrap="square" lIns="0" tIns="0" rIns="0" bIns="0" rtlCol="0" anchor="ctr"/>
+          <a:lstStyle/>
+          <a:p>
+            <a:pPr marL="0" indent="0">
+              <a:buNone/>
+            </a:pPr>
+            <a:r>
+              <a:rPr lang="en-US" sz="3200" b="1" dirty="0">
+                <a:solidFill>
+                  <a:srgbClr val="E9EEF5"/>
+                </a:solidFill>
+                <a:latin typeface="Calibri" pitchFamily="34" charset="0"/>
+                <a:ea typeface="Calibri" pitchFamily="34" charset="-122"/>
+                <a:cs typeface="Calibri" pitchFamily="34" charset="-120"/>
+              </a:rPr>
+              <a:t>Donnie Taylor</a:t>
+            </a:r>
+            <a:endParaRPr lang="en-US" sz="3200" dirty="0"/>
+          </a:p>
+        </p:txBody>
+      </p:sp>
+      <p:sp>
+        <p:nvSpPr>
+          <p:cNvPr id="4" name="Text 1"/>
+          <p:cNvSpPr/>
+          <p:nvPr/>
+        </p:nvSpPr>
+        <p:spPr>
+          <a:xfrm>
+            <a:off x="640080" y="1463040"/>
+            <a:ext cx="10908792" cy="4572000"/>
+          </a:xfrm>
+          <a:prstGeom prst="rect">
+            <a:avLst/>
+          </a:prstGeom>
+          <a:noFill/>
+          <a:ln/>
+        </p:spPr>
+        <p:txBody>
+          <a:bodyPr wrap="square" lIns="0" tIns="0" rIns="0" bIns="0" rtlCol="0" anchor="t"/>
+          <a:lstStyle/>
+          <a:p>
+            <a:pPr marL="279400" indent="-279400">
+              <a:spcAft>
+                <a:spcPts val="1000"/>
+              </a:spcAft>
+              <a:buSzPct val="100000"/>
+              <a:buChar char="•"/>
+            </a:pPr>
+            <a:r>
+              <a:rPr lang="en-US" sz="2000" dirty="0">
+                <a:solidFill>
+                  <a:srgbClr val="E9EEF5"/>
+                </a:solidFill>
+                <a:latin typeface="Calibri" pitchFamily="34" charset="0"/>
+                <a:ea typeface="Calibri" pitchFamily="34" charset="-122"/>
+                <a:cs typeface="Calibri" pitchFamily="34" charset="-120"/>
+              </a:rPr>
+              <a:t>Microsoft MVP</a:t>
+            </a:r>
+            <a:endParaRPr lang="en-US" sz="2000" dirty="0"/>
+          </a:p>
+          <a:p>
+            <a:pPr marL="279400" indent="-279400">
+              <a:spcAft>
+                <a:spcPts val="1000"/>
+              </a:spcAft>
+              <a:buSzPct val="100000"/>
+              <a:buChar char="•"/>
+            </a:pPr>
+            <a:r>
+              <a:rPr lang="en-US" sz="2000" dirty="0">
+                <a:solidFill>
+                  <a:srgbClr val="E9EEF5"/>
+                </a:solidFill>
+                <a:latin typeface="Calibri" pitchFamily="34" charset="0"/>
+                <a:ea typeface="Calibri" pitchFamily="34" charset="-122"/>
+                <a:cs typeface="Calibri" pitchFamily="34" charset="-120"/>
+              </a:rPr>
+              <a:t>Azure, PowerShell, AI wrangler</a:t>
+            </a:r>
+          </a:p>
+          <a:p>
+            <a:pPr marL="279400" indent="-279400">
+              <a:spcAft>
+                <a:spcPts val="1000"/>
+              </a:spcAft>
+              <a:buSzPct val="100000"/>
+              <a:buChar char="•"/>
+            </a:pPr>
+            <a:r>
+              <a:rPr lang="en-US" sz="2000" dirty="0">
+                <a:solidFill>
+                  <a:srgbClr val="E9EEF5"/>
+                </a:solidFill>
+                <a:latin typeface="Calibri" pitchFamily="34" charset="0"/>
+                <a:ea typeface="Calibri" pitchFamily="34" charset="-122"/>
+                <a:cs typeface="Calibri" pitchFamily="34" charset="-120"/>
+              </a:rPr>
+              <a:t>draith.com  ·  github.com/donnietaylor  ·  @donnietaylor.bsky.social</a:t>
+            </a:r>
+            <a:endParaRPr lang="en-US" sz="2000" dirty="0"/>
+          </a:p>
+        </p:txBody>
+      </p:sp>
+    </p:spTree>
+  </p:cSld>
+  <p:clrMapOvr>
+    <a:masterClrMapping/>
+  </p:clrMapOvr>
+</p:sld>
+</file>
+
+<file path=ppt/slides/slide20.xml><?xml version="1.0" encoding="utf-8"?>
 <p:sld xmlns:a="http://schemas.openxmlformats.org/drawingml/2006/main" xmlns:r="http://schemas.openxmlformats.org/officeDocument/2006/relationships" xmlns:p="http://schemas.openxmlformats.org/presentationml/2006/main">
   <p:cSld name="Slide 21">
     <p:bg>

--- a/mcp-for-everything/slides/session1-mcp-for-everything.pptx
+++ b/mcp-for-everything/slides/session1-mcp-for-everything.pptx
@@ -5,29 +5,30 @@
     <p:sldMasterId id="2147483648" r:id="rId1"/>
   </p:sldMasterIdLst>
   <p:notesMasterIdLst>
-    <p:notesMasterId r:id="rId22"/>
+    <p:notesMasterId r:id="rId23"/>
   </p:notesMasterIdLst>
   <p:sldIdLst>
     <p:sldId id="256" r:id="rId2"/>
     <p:sldId id="257" r:id="rId3"/>
-    <p:sldId id="259" r:id="rId4"/>
-    <p:sldId id="258" r:id="rId5"/>
-    <p:sldId id="260" r:id="rId6"/>
-    <p:sldId id="261" r:id="rId7"/>
-    <p:sldId id="262" r:id="rId8"/>
-    <p:sldId id="263" r:id="rId9"/>
-    <p:sldId id="264" r:id="rId10"/>
-    <p:sldId id="265" r:id="rId11"/>
-    <p:sldId id="266" r:id="rId12"/>
-    <p:sldId id="267" r:id="rId13"/>
-    <p:sldId id="268" r:id="rId14"/>
-    <p:sldId id="269" r:id="rId15"/>
-    <p:sldId id="270" r:id="rId16"/>
-    <p:sldId id="271" r:id="rId17"/>
-    <p:sldId id="272" r:id="rId18"/>
-    <p:sldId id="274" r:id="rId19"/>
-    <p:sldId id="275" r:id="rId20"/>
-    <p:sldId id="276" r:id="rId21"/>
+    <p:sldId id="277" r:id="rId4"/>
+    <p:sldId id="259" r:id="rId5"/>
+    <p:sldId id="258" r:id="rId6"/>
+    <p:sldId id="260" r:id="rId7"/>
+    <p:sldId id="261" r:id="rId8"/>
+    <p:sldId id="262" r:id="rId9"/>
+    <p:sldId id="263" r:id="rId10"/>
+    <p:sldId id="264" r:id="rId11"/>
+    <p:sldId id="265" r:id="rId12"/>
+    <p:sldId id="266" r:id="rId13"/>
+    <p:sldId id="267" r:id="rId14"/>
+    <p:sldId id="268" r:id="rId15"/>
+    <p:sldId id="269" r:id="rId16"/>
+    <p:sldId id="270" r:id="rId17"/>
+    <p:sldId id="271" r:id="rId18"/>
+    <p:sldId id="272" r:id="rId19"/>
+    <p:sldId id="274" r:id="rId20"/>
+    <p:sldId id="275" r:id="rId21"/>
+    <p:sldId id="276" r:id="rId22"/>
   </p:sldIdLst>
   <p:sldSz cx="12192000" cy="6858000"/>
   <p:notesSz cx="6858000" cy="12192000"/>
@@ -411,7 +412,7 @@
           <a:p>
             <a:fld id="{F7021451-1387-4CA6-816F-3879F97B5CBC}" type="slidenum">
               <a:rPr lang="en-US"/>
-              <a:t>10</a:t>
+              <a:t>11</a:t>
             </a:fld>
             <a:endParaRPr lang="en-US"/>
           </a:p>
@@ -498,7 +499,7 @@
           <a:p>
             <a:fld id="{F7021451-1387-4CA6-816F-3879F97B5CBC}" type="slidenum">
               <a:rPr lang="en-US"/>
-              <a:t>11</a:t>
+              <a:t>12</a:t>
             </a:fld>
             <a:endParaRPr lang="en-US"/>
           </a:p>
@@ -585,7 +586,7 @@
           <a:p>
             <a:fld id="{F7021451-1387-4CA6-816F-3879F97B5CBC}" type="slidenum">
               <a:rPr lang="en-US"/>
-              <a:t>12</a:t>
+              <a:t>13</a:t>
             </a:fld>
             <a:endParaRPr lang="en-US"/>
           </a:p>
@@ -672,7 +673,7 @@
           <a:p>
             <a:fld id="{F7021451-1387-4CA6-816F-3879F97B5CBC}" type="slidenum">
               <a:rPr lang="en-US"/>
-              <a:t>13</a:t>
+              <a:t>14</a:t>
             </a:fld>
             <a:endParaRPr lang="en-US"/>
           </a:p>
@@ -759,7 +760,7 @@
           <a:p>
             <a:fld id="{F7021451-1387-4CA6-816F-3879F97B5CBC}" type="slidenum">
               <a:rPr lang="en-US"/>
-              <a:t>14</a:t>
+              <a:t>15</a:t>
             </a:fld>
             <a:endParaRPr lang="en-US"/>
           </a:p>
@@ -846,7 +847,7 @@
           <a:p>
             <a:fld id="{F7021451-1387-4CA6-816F-3879F97B5CBC}" type="slidenum">
               <a:rPr lang="en-US"/>
-              <a:t>15</a:t>
+              <a:t>16</a:t>
             </a:fld>
             <a:endParaRPr lang="en-US"/>
           </a:p>
@@ -933,7 +934,7 @@
           <a:p>
             <a:fld id="{F7021451-1387-4CA6-816F-3879F97B5CBC}" type="slidenum">
               <a:rPr lang="en-US"/>
-              <a:t>16</a:t>
+              <a:t>17</a:t>
             </a:fld>
             <a:endParaRPr lang="en-US"/>
           </a:p>
@@ -1020,7 +1021,7 @@
           <a:p>
             <a:fld id="{F7021451-1387-4CA6-816F-3879F97B5CBC}" type="slidenum">
               <a:rPr lang="en-US"/>
-              <a:t>17</a:t>
+              <a:t>18</a:t>
             </a:fld>
             <a:endParaRPr lang="en-US"/>
           </a:p>
@@ -1107,7 +1108,7 @@
           <a:p>
             <a:fld id="{F7021451-1387-4CA6-816F-3879F97B5CBC}" type="slidenum">
               <a:rPr lang="en-US"/>
-              <a:t>18</a:t>
+              <a:t>19</a:t>
             </a:fld>
             <a:endParaRPr lang="en-US"/>
           </a:p>
@@ -1194,7 +1195,7 @@
           <a:p>
             <a:fld id="{F7021451-1387-4CA6-816F-3879F97B5CBC}" type="slidenum">
               <a:rPr lang="en-US"/>
-              <a:t>19</a:t>
+              <a:t>20</a:t>
             </a:fld>
             <a:endParaRPr lang="en-US"/>
           </a:p>
@@ -1368,7 +1369,7 @@
           <a:p>
             <a:fld id="{F7021451-1387-4CA6-816F-3879F97B5CBC}" type="slidenum">
               <a:rPr lang="en-US"/>
-              <a:t>20</a:t>
+              <a:t>21</a:t>
             </a:fld>
             <a:endParaRPr lang="en-US"/>
           </a:p>
@@ -1455,7 +1456,7 @@
           <a:p>
             <a:fld id="{F7021451-1387-4CA6-816F-3879F97B5CBC}" type="slidenum">
               <a:rPr lang="en-US"/>
-              <a:t>3</a:t>
+              <a:t>4</a:t>
             </a:fld>
             <a:endParaRPr lang="en-US"/>
           </a:p>
@@ -1542,7 +1543,7 @@
           <a:p>
             <a:fld id="{F7021451-1387-4CA6-816F-3879F97B5CBC}" type="slidenum">
               <a:rPr lang="en-US"/>
-              <a:t>4</a:t>
+              <a:t>5</a:t>
             </a:fld>
             <a:endParaRPr lang="en-US"/>
           </a:p>
@@ -1629,7 +1630,7 @@
           <a:p>
             <a:fld id="{F7021451-1387-4CA6-816F-3879F97B5CBC}" type="slidenum">
               <a:rPr lang="en-US"/>
-              <a:t>5</a:t>
+              <a:t>6</a:t>
             </a:fld>
             <a:endParaRPr lang="en-US"/>
           </a:p>
@@ -1716,7 +1717,7 @@
           <a:p>
             <a:fld id="{F7021451-1387-4CA6-816F-3879F97B5CBC}" type="slidenum">
               <a:rPr lang="en-US"/>
-              <a:t>6</a:t>
+              <a:t>7</a:t>
             </a:fld>
             <a:endParaRPr lang="en-US"/>
           </a:p>
@@ -1803,7 +1804,7 @@
           <a:p>
             <a:fld id="{F7021451-1387-4CA6-816F-3879F97B5CBC}" type="slidenum">
               <a:rPr lang="en-US"/>
-              <a:t>7</a:t>
+              <a:t>8</a:t>
             </a:fld>
             <a:endParaRPr lang="en-US"/>
           </a:p>
@@ -1890,7 +1891,7 @@
           <a:p>
             <a:fld id="{F7021451-1387-4CA6-816F-3879F97B5CBC}" type="slidenum">
               <a:rPr lang="en-US"/>
-              <a:t>8</a:t>
+              <a:t>9</a:t>
             </a:fld>
             <a:endParaRPr lang="en-US"/>
           </a:p>
@@ -1977,7 +1978,7 @@
           <a:p>
             <a:fld id="{F7021451-1387-4CA6-816F-3879F97B5CBC}" type="slidenum">
               <a:rPr lang="en-US"/>
-              <a:t>9</a:t>
+              <a:t>10</a:t>
             </a:fld>
             <a:endParaRPr lang="en-US"/>
           </a:p>
@@ -2026,6 +2027,47 @@
 </p:sldLayout>
 </file>
 
+<file path=ppt/slideLayouts/slideLayout2.xml><?xml version="1.0" encoding="utf-8"?>
+<p:sldLayout xmlns:a="http://schemas.openxmlformats.org/drawingml/2006/main" xmlns:r="http://schemas.openxmlformats.org/officeDocument/2006/relationships" xmlns:p="http://schemas.openxmlformats.org/presentationml/2006/main">
+  <p:cSld name="Sponsors">
+    <p:bg>
+      <p:bgPr>
+        <a:blipFill dpi="0" rotWithShape="1">
+          <a:blip r:embed="rId2"/>
+          <a:stretch>
+            <a:fillRect/>
+          </a:stretch>
+        </a:blipFill>
+        <a:effectLst/>
+      </p:bgPr>
+    </p:bg>
+    <p:spTree>
+      <p:nvGrpSpPr>
+        <p:cNvPr id="1" name=""/>
+        <p:cNvGrpSpPr/>
+        <p:nvPr/>
+      </p:nvGrpSpPr>
+      <p:grpSpPr>
+        <a:xfrm>
+          <a:off x="0" y="0"/>
+          <a:ext cx="0" cy="0"/>
+          <a:chOff x="0" y="0"/>
+          <a:chExt cx="0" cy="0"/>
+        </a:xfrm>
+      </p:grpSpPr>
+    </p:spTree>
+    <p:extLst>
+      <p:ext uri="{BB962C8B-B14F-4D97-AF65-F5344CB8AC3E}">
+        <p14:creationId xmlns:p14="http://schemas.microsoft.com/office/powerpoint/2010/main" val="751336408"/>
+      </p:ext>
+    </p:extLst>
+  </p:cSld>
+  <p:clrMapOvr>
+    <a:masterClrMapping/>
+  </p:clrMapOvr>
+</p:sldLayout>
+</file>
+
 <file path=ppt/slideMasters/slideMaster1.xml><?xml version="1.0" encoding="utf-8"?>
 <p:sldMaster xmlns:a="http://schemas.openxmlformats.org/drawingml/2006/main" xmlns:r="http://schemas.openxmlformats.org/officeDocument/2006/relationships" xmlns:p="http://schemas.openxmlformats.org/presentationml/2006/main">
   <p:cSld>
@@ -2053,6 +2095,7 @@
   <p:clrMap bg1="lt1" tx1="dk1" bg2="lt2" tx2="dk2" accent1="accent1" accent2="accent2" accent3="accent3" accent4="accent4" accent5="accent5" accent6="accent6" hlink="hlink" folHlink="folHlink"/>
   <p:sldLayoutIdLst>
     <p:sldLayoutId id="2147483649" r:id="rId1"/>
+    <p:sldLayoutId id="2147483650" r:id="rId2"/>
   </p:sldLayoutIdLst>
   <p:hf sldNum="0" hdr="0" ftr="0" dt="0"/>
   <p:txStyles>
@@ -2499,6 +2542,1289 @@
 
 <file path=ppt/slides/slide10.xml><?xml version="1.0" encoding="utf-8"?>
 <p:sld xmlns:a="http://schemas.openxmlformats.org/drawingml/2006/main" xmlns:r="http://schemas.openxmlformats.org/officeDocument/2006/relationships" xmlns:p="http://schemas.openxmlformats.org/presentationml/2006/main">
+  <p:cSld name="Slide 9">
+    <p:bg>
+      <p:bgPr>
+        <a:solidFill>
+          <a:srgbClr val="0F1419"/>
+        </a:solidFill>
+        <a:effectLst/>
+      </p:bgPr>
+    </p:bg>
+    <p:spTree>
+      <p:nvGrpSpPr>
+        <p:cNvPr id="1" name=""/>
+        <p:cNvGrpSpPr/>
+        <p:nvPr/>
+      </p:nvGrpSpPr>
+      <p:grpSpPr>
+        <a:xfrm>
+          <a:off x="0" y="0"/>
+          <a:ext cx="0" cy="0"/>
+          <a:chOff x="0" y="0"/>
+          <a:chExt cx="0" cy="0"/>
+        </a:xfrm>
+      </p:grpSpPr>
+      <p:sp>
+        <p:nvSpPr>
+          <p:cNvPr id="3" name="Text 0"/>
+          <p:cNvSpPr/>
+          <p:nvPr/>
+        </p:nvSpPr>
+        <p:spPr>
+          <a:xfrm>
+            <a:off x="640080" y="201168"/>
+            <a:ext cx="10908792" cy="256032"/>
+          </a:xfrm>
+          <a:prstGeom prst="rect">
+            <a:avLst/>
+          </a:prstGeom>
+          <a:noFill/>
+          <a:ln/>
+        </p:spPr>
+        <p:txBody>
+          <a:bodyPr wrap="square" lIns="0" tIns="0" rIns="0" bIns="0" rtlCol="0" anchor="ctr"/>
+          <a:lstStyle/>
+          <a:p>
+            <a:pPr marL="0" indent="0">
+              <a:buNone/>
+            </a:pPr>
+            <a:r>
+              <a:rPr lang="en-US" sz="1200" b="1" kern="0" spc="200" dirty="0">
+                <a:solidFill>
+                  <a:srgbClr val="8A9AAE"/>
+                </a:solidFill>
+                <a:latin typeface="Calibri" pitchFamily="34" charset="0"/>
+                <a:ea typeface="Calibri" pitchFamily="34" charset="-122"/>
+                <a:cs typeface="Calibri" pitchFamily="34" charset="-120"/>
+              </a:rPr>
+              <a:t>DEMO 1</a:t>
+            </a:r>
+            <a:endParaRPr lang="en-US" sz="1200" dirty="0"/>
+          </a:p>
+        </p:txBody>
+      </p:sp>
+      <p:sp>
+        <p:nvSpPr>
+          <p:cNvPr id="4" name="Text 1"/>
+          <p:cNvSpPr/>
+          <p:nvPr/>
+        </p:nvSpPr>
+        <p:spPr>
+          <a:xfrm>
+            <a:off x="640080" y="411480"/>
+            <a:ext cx="10908792" cy="731520"/>
+          </a:xfrm>
+          <a:prstGeom prst="rect">
+            <a:avLst/>
+          </a:prstGeom>
+          <a:noFill/>
+          <a:ln/>
+        </p:spPr>
+        <p:txBody>
+          <a:bodyPr wrap="square" lIns="0" tIns="0" rIns="0" bIns="0" rtlCol="0" anchor="ctr"/>
+          <a:lstStyle/>
+          <a:p>
+            <a:pPr marL="0" indent="0">
+              <a:buNone/>
+            </a:pPr>
+            <a:r>
+              <a:rPr lang="en-US" sz="3200" b="1" dirty="0">
+                <a:solidFill>
+                  <a:srgbClr val="E9EEF5"/>
+                </a:solidFill>
+                <a:latin typeface="Calibri" pitchFamily="34" charset="0"/>
+                <a:ea typeface="Calibri" pitchFamily="34" charset="-122"/>
+                <a:cs typeface="Calibri" pitchFamily="34" charset="-120"/>
+              </a:rPr>
+              <a:t>How a param block becomes a schema</a:t>
+            </a:r>
+            <a:endParaRPr lang="en-US" sz="3200" dirty="0"/>
+          </a:p>
+        </p:txBody>
+      </p:sp>
+      <p:sp>
+        <p:nvSpPr>
+          <p:cNvPr id="5" name="Text 2"/>
+          <p:cNvSpPr/>
+          <p:nvPr/>
+        </p:nvSpPr>
+        <p:spPr>
+          <a:xfrm>
+            <a:off x="868680" y="1371600"/>
+            <a:ext cx="4754880" cy="274320"/>
+          </a:xfrm>
+          <a:prstGeom prst="rect">
+            <a:avLst/>
+          </a:prstGeom>
+          <a:noFill/>
+          <a:ln/>
+        </p:spPr>
+        <p:txBody>
+          <a:bodyPr wrap="square" lIns="0" tIns="0" rIns="0" bIns="0" rtlCol="0" anchor="ctr"/>
+          <a:lstStyle/>
+          <a:p>
+            <a:pPr marL="0" indent="0">
+              <a:buNone/>
+            </a:pPr>
+            <a:r>
+              <a:rPr lang="en-US" sz="1200" b="1" kern="0" spc="200" dirty="0">
+                <a:solidFill>
+                  <a:srgbClr val="5FD3BC"/>
+                </a:solidFill>
+                <a:latin typeface="Calibri" pitchFamily="34" charset="0"/>
+                <a:ea typeface="Calibri" pitchFamily="34" charset="-122"/>
+                <a:cs typeface="Calibri" pitchFamily="34" charset="-120"/>
+              </a:rPr>
+              <a:t>PowerShell</a:t>
+            </a:r>
+            <a:endParaRPr lang="en-US" sz="1200" dirty="0"/>
+          </a:p>
+        </p:txBody>
+      </p:sp>
+      <p:sp>
+        <p:nvSpPr>
+          <p:cNvPr id="6" name="Text 3"/>
+          <p:cNvSpPr/>
+          <p:nvPr/>
+        </p:nvSpPr>
+        <p:spPr>
+          <a:xfrm>
+            <a:off x="6720840" y="1371600"/>
+            <a:ext cx="4754880" cy="274320"/>
+          </a:xfrm>
+          <a:prstGeom prst="rect">
+            <a:avLst/>
+          </a:prstGeom>
+          <a:noFill/>
+          <a:ln/>
+        </p:spPr>
+        <p:txBody>
+          <a:bodyPr wrap="square" lIns="0" tIns="0" rIns="0" bIns="0" rtlCol="0" anchor="ctr"/>
+          <a:lstStyle/>
+          <a:p>
+            <a:pPr marL="0" indent="0">
+              <a:buNone/>
+            </a:pPr>
+            <a:r>
+              <a:rPr lang="en-US" sz="1200" b="1" kern="0" spc="200" dirty="0">
+                <a:solidFill>
+                  <a:srgbClr val="F2C14E"/>
+                </a:solidFill>
+                <a:latin typeface="Calibri" pitchFamily="34" charset="0"/>
+                <a:ea typeface="Calibri" pitchFamily="34" charset="-122"/>
+                <a:cs typeface="Calibri" pitchFamily="34" charset="-120"/>
+              </a:rPr>
+              <a:t>JSON Schema / MCP</a:t>
+            </a:r>
+            <a:endParaRPr lang="en-US" sz="1200" dirty="0"/>
+          </a:p>
+        </p:txBody>
+      </p:sp>
+      <p:sp>
+        <p:nvSpPr>
+          <p:cNvPr id="7" name="Shape 4"/>
+          <p:cNvSpPr/>
+          <p:nvPr/>
+        </p:nvSpPr>
+        <p:spPr>
+          <a:xfrm>
+            <a:off x="640080" y="1691640"/>
+            <a:ext cx="10881360" cy="530352"/>
+          </a:xfrm>
+          <a:prstGeom prst="roundRect">
+            <a:avLst>
+              <a:gd name="adj" fmla="val 10345"/>
+            </a:avLst>
+          </a:prstGeom>
+          <a:solidFill>
+            <a:srgbClr val="1C2530"/>
+          </a:solidFill>
+          <a:ln w="12700">
+            <a:solidFill>
+              <a:srgbClr val="2C3949"/>
+            </a:solidFill>
+            <a:prstDash val="solid"/>
+          </a:ln>
+        </p:spPr>
+        <p:txBody>
+          <a:bodyPr/>
+          <a:lstStyle/>
+          <a:p>
+            <a:endParaRPr lang="en-US"/>
+          </a:p>
+        </p:txBody>
+      </p:sp>
+      <p:sp>
+        <p:nvSpPr>
+          <p:cNvPr id="8" name="Text 5"/>
+          <p:cNvSpPr/>
+          <p:nvPr/>
+        </p:nvSpPr>
+        <p:spPr>
+          <a:xfrm>
+            <a:off x="868680" y="1691640"/>
+            <a:ext cx="5212080" cy="530352"/>
+          </a:xfrm>
+          <a:prstGeom prst="rect">
+            <a:avLst/>
+          </a:prstGeom>
+          <a:noFill/>
+          <a:ln/>
+        </p:spPr>
+        <p:txBody>
+          <a:bodyPr wrap="square" lIns="0" tIns="0" rIns="0" bIns="0" rtlCol="0" anchor="ctr"/>
+          <a:lstStyle/>
+          <a:p>
+            <a:pPr marL="0" indent="0">
+              <a:buNone/>
+            </a:pPr>
+            <a:r>
+              <a:rPr lang="en-US" sz="1400" dirty="0">
+                <a:solidFill>
+                  <a:srgbClr val="5FD3BC"/>
+                </a:solidFill>
+                <a:latin typeface="Consolas" pitchFamily="34" charset="0"/>
+                <a:ea typeface="Consolas" pitchFamily="34" charset="-122"/>
+                <a:cs typeface="Consolas" pitchFamily="34" charset="-120"/>
+              </a:rPr>
+              <a:t>[Parameter(Mandatory)]</a:t>
+            </a:r>
+            <a:endParaRPr lang="en-US" sz="1400" dirty="0"/>
+          </a:p>
+        </p:txBody>
+      </p:sp>
+      <p:sp>
+        <p:nvSpPr>
+          <p:cNvPr id="9" name="Text 6"/>
+          <p:cNvSpPr/>
+          <p:nvPr/>
+        </p:nvSpPr>
+        <p:spPr>
+          <a:xfrm>
+            <a:off x="6126480" y="1691640"/>
+            <a:ext cx="365760" cy="530352"/>
+          </a:xfrm>
+          <a:prstGeom prst="rect">
+            <a:avLst/>
+          </a:prstGeom>
+          <a:noFill/>
+          <a:ln/>
+        </p:spPr>
+        <p:txBody>
+          <a:bodyPr wrap="square" lIns="0" tIns="0" rIns="0" bIns="0" rtlCol="0" anchor="ctr"/>
+          <a:lstStyle/>
+          <a:p>
+            <a:pPr marL="0" indent="0" algn="ctr">
+              <a:buNone/>
+            </a:pPr>
+            <a:r>
+              <a:rPr lang="en-US" sz="1600" dirty="0">
+                <a:solidFill>
+                  <a:srgbClr val="8A9AAE"/>
+                </a:solidFill>
+                <a:latin typeface="Calibri" pitchFamily="34" charset="0"/>
+                <a:ea typeface="Calibri" pitchFamily="34" charset="-122"/>
+                <a:cs typeface="Calibri" pitchFamily="34" charset="-120"/>
+              </a:rPr>
+              <a:t>→</a:t>
+            </a:r>
+            <a:endParaRPr lang="en-US" sz="1600" dirty="0"/>
+          </a:p>
+        </p:txBody>
+      </p:sp>
+      <p:sp>
+        <p:nvSpPr>
+          <p:cNvPr id="10" name="Text 7"/>
+          <p:cNvSpPr/>
+          <p:nvPr/>
+        </p:nvSpPr>
+        <p:spPr>
+          <a:xfrm>
+            <a:off x="6720840" y="1691640"/>
+            <a:ext cx="4663440" cy="530352"/>
+          </a:xfrm>
+          <a:prstGeom prst="rect">
+            <a:avLst/>
+          </a:prstGeom>
+          <a:noFill/>
+          <a:ln/>
+        </p:spPr>
+        <p:txBody>
+          <a:bodyPr wrap="square" lIns="0" tIns="0" rIns="0" bIns="0" rtlCol="0" anchor="ctr"/>
+          <a:lstStyle/>
+          <a:p>
+            <a:pPr marL="0" indent="0">
+              <a:buNone/>
+            </a:pPr>
+            <a:r>
+              <a:rPr lang="en-US" sz="1400" dirty="0">
+                <a:solidFill>
+                  <a:srgbClr val="F2C14E"/>
+                </a:solidFill>
+                <a:latin typeface="Consolas" pitchFamily="34" charset="0"/>
+                <a:ea typeface="Consolas" pitchFamily="34" charset="-122"/>
+                <a:cs typeface="Consolas" pitchFamily="34" charset="-120"/>
+              </a:rPr>
+              <a:t>required</a:t>
+            </a:r>
+            <a:endParaRPr lang="en-US" sz="1400" dirty="0"/>
+          </a:p>
+        </p:txBody>
+      </p:sp>
+      <p:sp>
+        <p:nvSpPr>
+          <p:cNvPr id="11" name="Shape 8"/>
+          <p:cNvSpPr/>
+          <p:nvPr/>
+        </p:nvSpPr>
+        <p:spPr>
+          <a:xfrm>
+            <a:off x="640080" y="2295144"/>
+            <a:ext cx="10881360" cy="530352"/>
+          </a:xfrm>
+          <a:prstGeom prst="roundRect">
+            <a:avLst>
+              <a:gd name="adj" fmla="val 10345"/>
+            </a:avLst>
+          </a:prstGeom>
+          <a:solidFill>
+            <a:srgbClr val="1C2530"/>
+          </a:solidFill>
+          <a:ln w="12700">
+            <a:solidFill>
+              <a:srgbClr val="2C3949"/>
+            </a:solidFill>
+            <a:prstDash val="solid"/>
+          </a:ln>
+        </p:spPr>
+        <p:txBody>
+          <a:bodyPr/>
+          <a:lstStyle/>
+          <a:p>
+            <a:endParaRPr lang="en-US"/>
+          </a:p>
+        </p:txBody>
+      </p:sp>
+      <p:sp>
+        <p:nvSpPr>
+          <p:cNvPr id="12" name="Text 9"/>
+          <p:cNvSpPr/>
+          <p:nvPr/>
+        </p:nvSpPr>
+        <p:spPr>
+          <a:xfrm>
+            <a:off x="868680" y="2295144"/>
+            <a:ext cx="5212080" cy="530352"/>
+          </a:xfrm>
+          <a:prstGeom prst="rect">
+            <a:avLst/>
+          </a:prstGeom>
+          <a:noFill/>
+          <a:ln/>
+        </p:spPr>
+        <p:txBody>
+          <a:bodyPr wrap="square" lIns="0" tIns="0" rIns="0" bIns="0" rtlCol="0" anchor="ctr"/>
+          <a:lstStyle/>
+          <a:p>
+            <a:pPr marL="0" indent="0">
+              <a:buNone/>
+            </a:pPr>
+            <a:r>
+              <a:rPr lang="en-US" sz="1400" dirty="0">
+                <a:solidFill>
+                  <a:srgbClr val="5FD3BC"/>
+                </a:solidFill>
+                <a:latin typeface="Consolas" pitchFamily="34" charset="0"/>
+                <a:ea typeface="Consolas" pitchFamily="34" charset="-122"/>
+                <a:cs typeface="Consolas" pitchFamily="34" charset="-120"/>
+              </a:rPr>
+              <a:t>[string]  [int]  [bool]  [datetime]</a:t>
+            </a:r>
+            <a:endParaRPr lang="en-US" sz="1400" dirty="0"/>
+          </a:p>
+        </p:txBody>
+      </p:sp>
+      <p:sp>
+        <p:nvSpPr>
+          <p:cNvPr id="13" name="Text 10"/>
+          <p:cNvSpPr/>
+          <p:nvPr/>
+        </p:nvSpPr>
+        <p:spPr>
+          <a:xfrm>
+            <a:off x="6126480" y="2295144"/>
+            <a:ext cx="365760" cy="530352"/>
+          </a:xfrm>
+          <a:prstGeom prst="rect">
+            <a:avLst/>
+          </a:prstGeom>
+          <a:noFill/>
+          <a:ln/>
+        </p:spPr>
+        <p:txBody>
+          <a:bodyPr wrap="square" lIns="0" tIns="0" rIns="0" bIns="0" rtlCol="0" anchor="ctr"/>
+          <a:lstStyle/>
+          <a:p>
+            <a:pPr marL="0" indent="0" algn="ctr">
+              <a:buNone/>
+            </a:pPr>
+            <a:r>
+              <a:rPr lang="en-US" sz="1600" dirty="0">
+                <a:solidFill>
+                  <a:srgbClr val="8A9AAE"/>
+                </a:solidFill>
+                <a:latin typeface="Calibri" pitchFamily="34" charset="0"/>
+                <a:ea typeface="Calibri" pitchFamily="34" charset="-122"/>
+                <a:cs typeface="Calibri" pitchFamily="34" charset="-120"/>
+              </a:rPr>
+              <a:t>→</a:t>
+            </a:r>
+            <a:endParaRPr lang="en-US" sz="1600" dirty="0"/>
+          </a:p>
+        </p:txBody>
+      </p:sp>
+      <p:sp>
+        <p:nvSpPr>
+          <p:cNvPr id="14" name="Text 11"/>
+          <p:cNvSpPr/>
+          <p:nvPr/>
+        </p:nvSpPr>
+        <p:spPr>
+          <a:xfrm>
+            <a:off x="6720840" y="2295144"/>
+            <a:ext cx="4663440" cy="530352"/>
+          </a:xfrm>
+          <a:prstGeom prst="rect">
+            <a:avLst/>
+          </a:prstGeom>
+          <a:noFill/>
+          <a:ln/>
+        </p:spPr>
+        <p:txBody>
+          <a:bodyPr wrap="square" lIns="0" tIns="0" rIns="0" bIns="0" rtlCol="0" anchor="ctr"/>
+          <a:lstStyle/>
+          <a:p>
+            <a:pPr marL="0" indent="0">
+              <a:buNone/>
+            </a:pPr>
+            <a:r>
+              <a:rPr lang="en-US" sz="1400" dirty="0">
+                <a:solidFill>
+                  <a:srgbClr val="F2C14E"/>
+                </a:solidFill>
+                <a:latin typeface="Consolas" pitchFamily="34" charset="0"/>
+                <a:ea typeface="Consolas" pitchFamily="34" charset="-122"/>
+                <a:cs typeface="Consolas" pitchFamily="34" charset="-120"/>
+              </a:rPr>
+              <a:t>type</a:t>
+            </a:r>
+            <a:endParaRPr lang="en-US" sz="1400" dirty="0"/>
+          </a:p>
+        </p:txBody>
+      </p:sp>
+      <p:sp>
+        <p:nvSpPr>
+          <p:cNvPr id="15" name="Shape 12"/>
+          <p:cNvSpPr/>
+          <p:nvPr/>
+        </p:nvSpPr>
+        <p:spPr>
+          <a:xfrm>
+            <a:off x="640080" y="2898648"/>
+            <a:ext cx="10881360" cy="530352"/>
+          </a:xfrm>
+          <a:prstGeom prst="roundRect">
+            <a:avLst>
+              <a:gd name="adj" fmla="val 10345"/>
+            </a:avLst>
+          </a:prstGeom>
+          <a:solidFill>
+            <a:srgbClr val="1C2530"/>
+          </a:solidFill>
+          <a:ln w="12700">
+            <a:solidFill>
+              <a:srgbClr val="2C3949"/>
+            </a:solidFill>
+            <a:prstDash val="solid"/>
+          </a:ln>
+        </p:spPr>
+        <p:txBody>
+          <a:bodyPr/>
+          <a:lstStyle/>
+          <a:p>
+            <a:endParaRPr lang="en-US"/>
+          </a:p>
+        </p:txBody>
+      </p:sp>
+      <p:sp>
+        <p:nvSpPr>
+          <p:cNvPr id="16" name="Text 13"/>
+          <p:cNvSpPr/>
+          <p:nvPr/>
+        </p:nvSpPr>
+        <p:spPr>
+          <a:xfrm>
+            <a:off x="868680" y="2898648"/>
+            <a:ext cx="5212080" cy="530352"/>
+          </a:xfrm>
+          <a:prstGeom prst="rect">
+            <a:avLst/>
+          </a:prstGeom>
+          <a:noFill/>
+          <a:ln/>
+        </p:spPr>
+        <p:txBody>
+          <a:bodyPr wrap="square" lIns="0" tIns="0" rIns="0" bIns="0" rtlCol="0" anchor="ctr"/>
+          <a:lstStyle/>
+          <a:p>
+            <a:pPr marL="0" indent="0">
+              <a:buNone/>
+            </a:pPr>
+            <a:r>
+              <a:rPr lang="en-US" sz="1400" dirty="0">
+                <a:solidFill>
+                  <a:srgbClr val="5FD3BC"/>
+                </a:solidFill>
+                <a:latin typeface="Consolas" pitchFamily="34" charset="0"/>
+                <a:ea typeface="Consolas" pitchFamily="34" charset="-122"/>
+                <a:cs typeface="Consolas" pitchFamily="34" charset="-120"/>
+              </a:rPr>
+              <a:t>[ValidateSet('A','B')]</a:t>
+            </a:r>
+            <a:endParaRPr lang="en-US" sz="1400" dirty="0"/>
+          </a:p>
+        </p:txBody>
+      </p:sp>
+      <p:sp>
+        <p:nvSpPr>
+          <p:cNvPr id="17" name="Text 14"/>
+          <p:cNvSpPr/>
+          <p:nvPr/>
+        </p:nvSpPr>
+        <p:spPr>
+          <a:xfrm>
+            <a:off x="6126480" y="2898648"/>
+            <a:ext cx="365760" cy="530352"/>
+          </a:xfrm>
+          <a:prstGeom prst="rect">
+            <a:avLst/>
+          </a:prstGeom>
+          <a:noFill/>
+          <a:ln/>
+        </p:spPr>
+        <p:txBody>
+          <a:bodyPr wrap="square" lIns="0" tIns="0" rIns="0" bIns="0" rtlCol="0" anchor="ctr"/>
+          <a:lstStyle/>
+          <a:p>
+            <a:pPr marL="0" indent="0" algn="ctr">
+              <a:buNone/>
+            </a:pPr>
+            <a:r>
+              <a:rPr lang="en-US" sz="1600" dirty="0">
+                <a:solidFill>
+                  <a:srgbClr val="8A9AAE"/>
+                </a:solidFill>
+                <a:latin typeface="Calibri" pitchFamily="34" charset="0"/>
+                <a:ea typeface="Calibri" pitchFamily="34" charset="-122"/>
+                <a:cs typeface="Calibri" pitchFamily="34" charset="-120"/>
+              </a:rPr>
+              <a:t>→</a:t>
+            </a:r>
+            <a:endParaRPr lang="en-US" sz="1600" dirty="0"/>
+          </a:p>
+        </p:txBody>
+      </p:sp>
+      <p:sp>
+        <p:nvSpPr>
+          <p:cNvPr id="18" name="Text 15"/>
+          <p:cNvSpPr/>
+          <p:nvPr/>
+        </p:nvSpPr>
+        <p:spPr>
+          <a:xfrm>
+            <a:off x="6720840" y="2898648"/>
+            <a:ext cx="4663440" cy="530352"/>
+          </a:xfrm>
+          <a:prstGeom prst="rect">
+            <a:avLst/>
+          </a:prstGeom>
+          <a:noFill/>
+          <a:ln/>
+        </p:spPr>
+        <p:txBody>
+          <a:bodyPr wrap="square" lIns="0" tIns="0" rIns="0" bIns="0" rtlCol="0" anchor="ctr"/>
+          <a:lstStyle/>
+          <a:p>
+            <a:pPr marL="0" indent="0">
+              <a:buNone/>
+            </a:pPr>
+            <a:r>
+              <a:rPr lang="en-US" sz="1400" dirty="0">
+                <a:solidFill>
+                  <a:srgbClr val="F2C14E"/>
+                </a:solidFill>
+                <a:latin typeface="Consolas" pitchFamily="34" charset="0"/>
+                <a:ea typeface="Consolas" pitchFamily="34" charset="-122"/>
+                <a:cs typeface="Consolas" pitchFamily="34" charset="-120"/>
+              </a:rPr>
+              <a:t>enum</a:t>
+            </a:r>
+            <a:endParaRPr lang="en-US" sz="1400" dirty="0"/>
+          </a:p>
+        </p:txBody>
+      </p:sp>
+      <p:sp>
+        <p:nvSpPr>
+          <p:cNvPr id="19" name="Shape 16"/>
+          <p:cNvSpPr/>
+          <p:nvPr/>
+        </p:nvSpPr>
+        <p:spPr>
+          <a:xfrm>
+            <a:off x="640080" y="3502152"/>
+            <a:ext cx="10881360" cy="530352"/>
+          </a:xfrm>
+          <a:prstGeom prst="roundRect">
+            <a:avLst>
+              <a:gd name="adj" fmla="val 10345"/>
+            </a:avLst>
+          </a:prstGeom>
+          <a:solidFill>
+            <a:srgbClr val="1C2530"/>
+          </a:solidFill>
+          <a:ln w="12700">
+            <a:solidFill>
+              <a:srgbClr val="2C3949"/>
+            </a:solidFill>
+            <a:prstDash val="solid"/>
+          </a:ln>
+        </p:spPr>
+        <p:txBody>
+          <a:bodyPr/>
+          <a:lstStyle/>
+          <a:p>
+            <a:endParaRPr lang="en-US"/>
+          </a:p>
+        </p:txBody>
+      </p:sp>
+      <p:sp>
+        <p:nvSpPr>
+          <p:cNvPr id="20" name="Text 17"/>
+          <p:cNvSpPr/>
+          <p:nvPr/>
+        </p:nvSpPr>
+        <p:spPr>
+          <a:xfrm>
+            <a:off x="868680" y="3502152"/>
+            <a:ext cx="5212080" cy="530352"/>
+          </a:xfrm>
+          <a:prstGeom prst="rect">
+            <a:avLst/>
+          </a:prstGeom>
+          <a:noFill/>
+          <a:ln/>
+        </p:spPr>
+        <p:txBody>
+          <a:bodyPr wrap="square" lIns="0" tIns="0" rIns="0" bIns="0" rtlCol="0" anchor="ctr"/>
+          <a:lstStyle/>
+          <a:p>
+            <a:pPr marL="0" indent="0">
+              <a:buNone/>
+            </a:pPr>
+            <a:r>
+              <a:rPr lang="en-US" sz="1400" dirty="0">
+                <a:solidFill>
+                  <a:srgbClr val="5FD3BC"/>
+                </a:solidFill>
+                <a:latin typeface="Consolas" pitchFamily="34" charset="0"/>
+                <a:ea typeface="Consolas" pitchFamily="34" charset="-122"/>
+                <a:cs typeface="Consolas" pitchFamily="34" charset="-120"/>
+              </a:rPr>
+              <a:t>[ValidateRange(1,5)]</a:t>
+            </a:r>
+            <a:endParaRPr lang="en-US" sz="1400" dirty="0"/>
+          </a:p>
+        </p:txBody>
+      </p:sp>
+      <p:sp>
+        <p:nvSpPr>
+          <p:cNvPr id="21" name="Text 18"/>
+          <p:cNvSpPr/>
+          <p:nvPr/>
+        </p:nvSpPr>
+        <p:spPr>
+          <a:xfrm>
+            <a:off x="6126480" y="3502152"/>
+            <a:ext cx="365760" cy="530352"/>
+          </a:xfrm>
+          <a:prstGeom prst="rect">
+            <a:avLst/>
+          </a:prstGeom>
+          <a:noFill/>
+          <a:ln/>
+        </p:spPr>
+        <p:txBody>
+          <a:bodyPr wrap="square" lIns="0" tIns="0" rIns="0" bIns="0" rtlCol="0" anchor="ctr"/>
+          <a:lstStyle/>
+          <a:p>
+            <a:pPr marL="0" indent="0" algn="ctr">
+              <a:buNone/>
+            </a:pPr>
+            <a:r>
+              <a:rPr lang="en-US" sz="1600" dirty="0">
+                <a:solidFill>
+                  <a:srgbClr val="8A9AAE"/>
+                </a:solidFill>
+                <a:latin typeface="Calibri" pitchFamily="34" charset="0"/>
+                <a:ea typeface="Calibri" pitchFamily="34" charset="-122"/>
+                <a:cs typeface="Calibri" pitchFamily="34" charset="-120"/>
+              </a:rPr>
+              <a:t>→</a:t>
+            </a:r>
+            <a:endParaRPr lang="en-US" sz="1600" dirty="0"/>
+          </a:p>
+        </p:txBody>
+      </p:sp>
+      <p:sp>
+        <p:nvSpPr>
+          <p:cNvPr id="22" name="Text 19"/>
+          <p:cNvSpPr/>
+          <p:nvPr/>
+        </p:nvSpPr>
+        <p:spPr>
+          <a:xfrm>
+            <a:off x="6720840" y="3502152"/>
+            <a:ext cx="4663440" cy="530352"/>
+          </a:xfrm>
+          <a:prstGeom prst="rect">
+            <a:avLst/>
+          </a:prstGeom>
+          <a:noFill/>
+          <a:ln/>
+        </p:spPr>
+        <p:txBody>
+          <a:bodyPr wrap="square" lIns="0" tIns="0" rIns="0" bIns="0" rtlCol="0" anchor="ctr"/>
+          <a:lstStyle/>
+          <a:p>
+            <a:pPr marL="0" indent="0">
+              <a:buNone/>
+            </a:pPr>
+            <a:r>
+              <a:rPr lang="en-US" sz="1400" dirty="0">
+                <a:solidFill>
+                  <a:srgbClr val="F2C14E"/>
+                </a:solidFill>
+                <a:latin typeface="Consolas" pitchFamily="34" charset="0"/>
+                <a:ea typeface="Consolas" pitchFamily="34" charset="-122"/>
+                <a:cs typeface="Consolas" pitchFamily="34" charset="-120"/>
+              </a:rPr>
+              <a:t>minimum / maximum</a:t>
+            </a:r>
+            <a:endParaRPr lang="en-US" sz="1400" dirty="0"/>
+          </a:p>
+        </p:txBody>
+      </p:sp>
+      <p:sp>
+        <p:nvSpPr>
+          <p:cNvPr id="23" name="Shape 20"/>
+          <p:cNvSpPr/>
+          <p:nvPr/>
+        </p:nvSpPr>
+        <p:spPr>
+          <a:xfrm>
+            <a:off x="640080" y="4105656"/>
+            <a:ext cx="10881360" cy="530352"/>
+          </a:xfrm>
+          <a:prstGeom prst="roundRect">
+            <a:avLst>
+              <a:gd name="adj" fmla="val 10345"/>
+            </a:avLst>
+          </a:prstGeom>
+          <a:solidFill>
+            <a:srgbClr val="1C2530"/>
+          </a:solidFill>
+          <a:ln w="12700">
+            <a:solidFill>
+              <a:srgbClr val="2C3949"/>
+            </a:solidFill>
+            <a:prstDash val="solid"/>
+          </a:ln>
+        </p:spPr>
+        <p:txBody>
+          <a:bodyPr/>
+          <a:lstStyle/>
+          <a:p>
+            <a:endParaRPr lang="en-US"/>
+          </a:p>
+        </p:txBody>
+      </p:sp>
+      <p:sp>
+        <p:nvSpPr>
+          <p:cNvPr id="24" name="Text 21"/>
+          <p:cNvSpPr/>
+          <p:nvPr/>
+        </p:nvSpPr>
+        <p:spPr>
+          <a:xfrm>
+            <a:off x="868680" y="4105656"/>
+            <a:ext cx="5212080" cy="530352"/>
+          </a:xfrm>
+          <a:prstGeom prst="rect">
+            <a:avLst/>
+          </a:prstGeom>
+          <a:noFill/>
+          <a:ln/>
+        </p:spPr>
+        <p:txBody>
+          <a:bodyPr wrap="square" lIns="0" tIns="0" rIns="0" bIns="0" rtlCol="0" anchor="ctr"/>
+          <a:lstStyle/>
+          <a:p>
+            <a:pPr marL="0" indent="0">
+              <a:buNone/>
+            </a:pPr>
+            <a:r>
+              <a:rPr lang="en-US" sz="1400" dirty="0">
+                <a:solidFill>
+                  <a:srgbClr val="5FD3BC"/>
+                </a:solidFill>
+                <a:latin typeface="Consolas" pitchFamily="34" charset="0"/>
+                <a:ea typeface="Consolas" pitchFamily="34" charset="-122"/>
+                <a:cs typeface="Consolas" pitchFamily="34" charset="-120"/>
+              </a:rPr>
+              <a:t>.PARAMETER help / HelpMessage</a:t>
+            </a:r>
+            <a:endParaRPr lang="en-US" sz="1400" dirty="0"/>
+          </a:p>
+        </p:txBody>
+      </p:sp>
+      <p:sp>
+        <p:nvSpPr>
+          <p:cNvPr id="25" name="Text 22"/>
+          <p:cNvSpPr/>
+          <p:nvPr/>
+        </p:nvSpPr>
+        <p:spPr>
+          <a:xfrm>
+            <a:off x="6126480" y="4105656"/>
+            <a:ext cx="365760" cy="530352"/>
+          </a:xfrm>
+          <a:prstGeom prst="rect">
+            <a:avLst/>
+          </a:prstGeom>
+          <a:noFill/>
+          <a:ln/>
+        </p:spPr>
+        <p:txBody>
+          <a:bodyPr wrap="square" lIns="0" tIns="0" rIns="0" bIns="0" rtlCol="0" anchor="ctr"/>
+          <a:lstStyle/>
+          <a:p>
+            <a:pPr marL="0" indent="0" algn="ctr">
+              <a:buNone/>
+            </a:pPr>
+            <a:r>
+              <a:rPr lang="en-US" sz="1600" dirty="0">
+                <a:solidFill>
+                  <a:srgbClr val="8A9AAE"/>
+                </a:solidFill>
+                <a:latin typeface="Calibri" pitchFamily="34" charset="0"/>
+                <a:ea typeface="Calibri" pitchFamily="34" charset="-122"/>
+                <a:cs typeface="Calibri" pitchFamily="34" charset="-120"/>
+              </a:rPr>
+              <a:t>→</a:t>
+            </a:r>
+            <a:endParaRPr lang="en-US" sz="1600" dirty="0"/>
+          </a:p>
+        </p:txBody>
+      </p:sp>
+      <p:sp>
+        <p:nvSpPr>
+          <p:cNvPr id="26" name="Text 23"/>
+          <p:cNvSpPr/>
+          <p:nvPr/>
+        </p:nvSpPr>
+        <p:spPr>
+          <a:xfrm>
+            <a:off x="6720840" y="4105656"/>
+            <a:ext cx="4663440" cy="530352"/>
+          </a:xfrm>
+          <a:prstGeom prst="rect">
+            <a:avLst/>
+          </a:prstGeom>
+          <a:noFill/>
+          <a:ln/>
+        </p:spPr>
+        <p:txBody>
+          <a:bodyPr wrap="square" lIns="0" tIns="0" rIns="0" bIns="0" rtlCol="0" anchor="ctr"/>
+          <a:lstStyle/>
+          <a:p>
+            <a:pPr marL="0" indent="0">
+              <a:buNone/>
+            </a:pPr>
+            <a:r>
+              <a:rPr lang="en-US" sz="1400" dirty="0">
+                <a:solidFill>
+                  <a:srgbClr val="F2C14E"/>
+                </a:solidFill>
+                <a:latin typeface="Consolas" pitchFamily="34" charset="0"/>
+                <a:ea typeface="Consolas" pitchFamily="34" charset="-122"/>
+                <a:cs typeface="Consolas" pitchFamily="34" charset="-120"/>
+              </a:rPr>
+              <a:t>property description</a:t>
+            </a:r>
+            <a:endParaRPr lang="en-US" sz="1400" dirty="0"/>
+          </a:p>
+        </p:txBody>
+      </p:sp>
+      <p:sp>
+        <p:nvSpPr>
+          <p:cNvPr id="27" name="Shape 24"/>
+          <p:cNvSpPr/>
+          <p:nvPr/>
+        </p:nvSpPr>
+        <p:spPr>
+          <a:xfrm>
+            <a:off x="640080" y="4709160"/>
+            <a:ext cx="10881360" cy="530352"/>
+          </a:xfrm>
+          <a:prstGeom prst="roundRect">
+            <a:avLst>
+              <a:gd name="adj" fmla="val 10345"/>
+            </a:avLst>
+          </a:prstGeom>
+          <a:solidFill>
+            <a:srgbClr val="1C2530"/>
+          </a:solidFill>
+          <a:ln w="12700">
+            <a:solidFill>
+              <a:srgbClr val="2C3949"/>
+            </a:solidFill>
+            <a:prstDash val="solid"/>
+          </a:ln>
+        </p:spPr>
+        <p:txBody>
+          <a:bodyPr/>
+          <a:lstStyle/>
+          <a:p>
+            <a:endParaRPr lang="en-US"/>
+          </a:p>
+        </p:txBody>
+      </p:sp>
+      <p:sp>
+        <p:nvSpPr>
+          <p:cNvPr id="28" name="Text 25"/>
+          <p:cNvSpPr/>
+          <p:nvPr/>
+        </p:nvSpPr>
+        <p:spPr>
+          <a:xfrm>
+            <a:off x="868680" y="4709160"/>
+            <a:ext cx="5212080" cy="530352"/>
+          </a:xfrm>
+          <a:prstGeom prst="rect">
+            <a:avLst/>
+          </a:prstGeom>
+          <a:noFill/>
+          <a:ln/>
+        </p:spPr>
+        <p:txBody>
+          <a:bodyPr wrap="square" lIns="0" tIns="0" rIns="0" bIns="0" rtlCol="0" anchor="ctr"/>
+          <a:lstStyle/>
+          <a:p>
+            <a:pPr marL="0" indent="0">
+              <a:buNone/>
+            </a:pPr>
+            <a:r>
+              <a:rPr lang="en-US" sz="1400" dirty="0">
+                <a:solidFill>
+                  <a:srgbClr val="5FD3BC"/>
+                </a:solidFill>
+                <a:latin typeface="Consolas" pitchFamily="34" charset="0"/>
+                <a:ea typeface="Consolas" pitchFamily="34" charset="-122"/>
+                <a:cs typeface="Consolas" pitchFamily="34" charset="-120"/>
+              </a:rPr>
+              <a:t>.SYNOPSIS</a:t>
+            </a:r>
+            <a:endParaRPr lang="en-US" sz="1400" dirty="0"/>
+          </a:p>
+        </p:txBody>
+      </p:sp>
+      <p:sp>
+        <p:nvSpPr>
+          <p:cNvPr id="29" name="Text 26"/>
+          <p:cNvSpPr/>
+          <p:nvPr/>
+        </p:nvSpPr>
+        <p:spPr>
+          <a:xfrm>
+            <a:off x="6126480" y="4709160"/>
+            <a:ext cx="365760" cy="530352"/>
+          </a:xfrm>
+          <a:prstGeom prst="rect">
+            <a:avLst/>
+          </a:prstGeom>
+          <a:noFill/>
+          <a:ln/>
+        </p:spPr>
+        <p:txBody>
+          <a:bodyPr wrap="square" lIns="0" tIns="0" rIns="0" bIns="0" rtlCol="0" anchor="ctr"/>
+          <a:lstStyle/>
+          <a:p>
+            <a:pPr marL="0" indent="0" algn="ctr">
+              <a:buNone/>
+            </a:pPr>
+            <a:r>
+              <a:rPr lang="en-US" sz="1600" dirty="0">
+                <a:solidFill>
+                  <a:srgbClr val="8A9AAE"/>
+                </a:solidFill>
+                <a:latin typeface="Calibri" pitchFamily="34" charset="0"/>
+                <a:ea typeface="Calibri" pitchFamily="34" charset="-122"/>
+                <a:cs typeface="Calibri" pitchFamily="34" charset="-120"/>
+              </a:rPr>
+              <a:t>→</a:t>
+            </a:r>
+            <a:endParaRPr lang="en-US" sz="1600" dirty="0"/>
+          </a:p>
+        </p:txBody>
+      </p:sp>
+      <p:sp>
+        <p:nvSpPr>
+          <p:cNvPr id="30" name="Text 27"/>
+          <p:cNvSpPr/>
+          <p:nvPr/>
+        </p:nvSpPr>
+        <p:spPr>
+          <a:xfrm>
+            <a:off x="6720840" y="4709160"/>
+            <a:ext cx="4663440" cy="530352"/>
+          </a:xfrm>
+          <a:prstGeom prst="rect">
+            <a:avLst/>
+          </a:prstGeom>
+          <a:noFill/>
+          <a:ln/>
+        </p:spPr>
+        <p:txBody>
+          <a:bodyPr wrap="square" lIns="0" tIns="0" rIns="0" bIns="0" rtlCol="0" anchor="ctr"/>
+          <a:lstStyle/>
+          <a:p>
+            <a:pPr marL="0" indent="0">
+              <a:buNone/>
+            </a:pPr>
+            <a:r>
+              <a:rPr lang="en-US" sz="1400" dirty="0">
+                <a:solidFill>
+                  <a:srgbClr val="F2C14E"/>
+                </a:solidFill>
+                <a:latin typeface="Consolas" pitchFamily="34" charset="0"/>
+                <a:ea typeface="Consolas" pitchFamily="34" charset="-122"/>
+                <a:cs typeface="Consolas" pitchFamily="34" charset="-120"/>
+              </a:rPr>
+              <a:t>tool description</a:t>
+            </a:r>
+            <a:endParaRPr lang="en-US" sz="1400" dirty="0"/>
+          </a:p>
+        </p:txBody>
+      </p:sp>
+      <p:sp>
+        <p:nvSpPr>
+          <p:cNvPr id="31" name="Shape 28"/>
+          <p:cNvSpPr/>
+          <p:nvPr/>
+        </p:nvSpPr>
+        <p:spPr>
+          <a:xfrm>
+            <a:off x="640080" y="5312664"/>
+            <a:ext cx="10881360" cy="530352"/>
+          </a:xfrm>
+          <a:prstGeom prst="roundRect">
+            <a:avLst>
+              <a:gd name="adj" fmla="val 10345"/>
+            </a:avLst>
+          </a:prstGeom>
+          <a:solidFill>
+            <a:srgbClr val="1C2530"/>
+          </a:solidFill>
+          <a:ln w="12700">
+            <a:solidFill>
+              <a:srgbClr val="2C3949"/>
+            </a:solidFill>
+            <a:prstDash val="solid"/>
+          </a:ln>
+        </p:spPr>
+        <p:txBody>
+          <a:bodyPr/>
+          <a:lstStyle/>
+          <a:p>
+            <a:endParaRPr lang="en-US"/>
+          </a:p>
+        </p:txBody>
+      </p:sp>
+      <p:sp>
+        <p:nvSpPr>
+          <p:cNvPr id="32" name="Text 29"/>
+          <p:cNvSpPr/>
+          <p:nvPr/>
+        </p:nvSpPr>
+        <p:spPr>
+          <a:xfrm>
+            <a:off x="868680" y="5312664"/>
+            <a:ext cx="5212080" cy="530352"/>
+          </a:xfrm>
+          <a:prstGeom prst="rect">
+            <a:avLst/>
+          </a:prstGeom>
+          <a:noFill/>
+          <a:ln/>
+        </p:spPr>
+        <p:txBody>
+          <a:bodyPr wrap="square" lIns="0" tIns="0" rIns="0" bIns="0" rtlCol="0" anchor="ctr"/>
+          <a:lstStyle/>
+          <a:p>
+            <a:pPr marL="0" indent="0">
+              <a:buNone/>
+            </a:pPr>
+            <a:r>
+              <a:rPr lang="en-US" sz="1400" dirty="0">
+                <a:solidFill>
+                  <a:srgbClr val="5FD3BC"/>
+                </a:solidFill>
+                <a:latin typeface="Consolas" pitchFamily="34" charset="0"/>
+                <a:ea typeface="Consolas" pitchFamily="34" charset="-122"/>
+                <a:cs typeface="Consolas" pitchFamily="34" charset="-120"/>
+              </a:rPr>
+              <a:t>approved verb + SupportsShouldProcess</a:t>
+            </a:r>
+            <a:endParaRPr lang="en-US" sz="1400" dirty="0"/>
+          </a:p>
+        </p:txBody>
+      </p:sp>
+      <p:sp>
+        <p:nvSpPr>
+          <p:cNvPr id="33" name="Text 30"/>
+          <p:cNvSpPr/>
+          <p:nvPr/>
+        </p:nvSpPr>
+        <p:spPr>
+          <a:xfrm>
+            <a:off x="6126480" y="5312664"/>
+            <a:ext cx="365760" cy="530352"/>
+          </a:xfrm>
+          <a:prstGeom prst="rect">
+            <a:avLst/>
+          </a:prstGeom>
+          <a:noFill/>
+          <a:ln/>
+        </p:spPr>
+        <p:txBody>
+          <a:bodyPr wrap="square" lIns="0" tIns="0" rIns="0" bIns="0" rtlCol="0" anchor="ctr"/>
+          <a:lstStyle/>
+          <a:p>
+            <a:pPr marL="0" indent="0" algn="ctr">
+              <a:buNone/>
+            </a:pPr>
+            <a:r>
+              <a:rPr lang="en-US" sz="1600" dirty="0">
+                <a:solidFill>
+                  <a:srgbClr val="8A9AAE"/>
+                </a:solidFill>
+                <a:latin typeface="Calibri" pitchFamily="34" charset="0"/>
+                <a:ea typeface="Calibri" pitchFamily="34" charset="-122"/>
+                <a:cs typeface="Calibri" pitchFamily="34" charset="-120"/>
+              </a:rPr>
+              <a:t>→</a:t>
+            </a:r>
+            <a:endParaRPr lang="en-US" sz="1600" dirty="0"/>
+          </a:p>
+        </p:txBody>
+      </p:sp>
+      <p:sp>
+        <p:nvSpPr>
+          <p:cNvPr id="34" name="Text 31"/>
+          <p:cNvSpPr/>
+          <p:nvPr/>
+        </p:nvSpPr>
+        <p:spPr>
+          <a:xfrm>
+            <a:off x="6720840" y="5312664"/>
+            <a:ext cx="4663440" cy="530352"/>
+          </a:xfrm>
+          <a:prstGeom prst="rect">
+            <a:avLst/>
+          </a:prstGeom>
+          <a:noFill/>
+          <a:ln/>
+        </p:spPr>
+        <p:txBody>
+          <a:bodyPr wrap="square" lIns="0" tIns="0" rIns="0" bIns="0" rtlCol="0" anchor="ctr"/>
+          <a:lstStyle/>
+          <a:p>
+            <a:pPr marL="0" indent="0">
+              <a:buNone/>
+            </a:pPr>
+            <a:r>
+              <a:rPr lang="en-US" sz="1400" dirty="0">
+                <a:solidFill>
+                  <a:srgbClr val="F2C14E"/>
+                </a:solidFill>
+                <a:latin typeface="Consolas" pitchFamily="34" charset="0"/>
+                <a:ea typeface="Consolas" pitchFamily="34" charset="-122"/>
+                <a:cs typeface="Consolas" pitchFamily="34" charset="-120"/>
+              </a:rPr>
+              <a:t>readOnlyHint / destructiveHint</a:t>
+            </a:r>
+            <a:endParaRPr lang="en-US" sz="1400" dirty="0"/>
+          </a:p>
+        </p:txBody>
+      </p:sp>
+      <p:sp>
+        <p:nvSpPr>
+          <p:cNvPr id="35" name="Text 32"/>
+          <p:cNvSpPr/>
+          <p:nvPr/>
+        </p:nvSpPr>
+        <p:spPr>
+          <a:xfrm>
+            <a:off x="2463209" y="5989320"/>
+            <a:ext cx="7235101" cy="365760"/>
+          </a:xfrm>
+          <a:prstGeom prst="rect">
+            <a:avLst/>
+          </a:prstGeom>
+          <a:noFill/>
+          <a:ln/>
+        </p:spPr>
+        <p:txBody>
+          <a:bodyPr wrap="square" lIns="0" tIns="0" rIns="0" bIns="0" rtlCol="0" anchor="ctr"/>
+          <a:lstStyle/>
+          <a:p>
+            <a:r>
+              <a:rPr lang="en-US" sz="1600" dirty="0">
+                <a:solidFill>
+                  <a:schemeClr val="bg2"/>
+                </a:solidFill>
+              </a:rPr>
+              <a:t>Get-ToolManifest.ps1 reads your param blocks and help. No schema is written by hand.</a:t>
+            </a:r>
+            <a:endParaRPr lang="en-US" sz="1500" dirty="0">
+              <a:solidFill>
+                <a:schemeClr val="bg2"/>
+              </a:solidFill>
+            </a:endParaRPr>
+          </a:p>
+        </p:txBody>
+      </p:sp>
+    </p:spTree>
+  </p:cSld>
+  <p:clrMapOvr>
+    <a:masterClrMapping/>
+  </p:clrMapOvr>
+</p:sld>
+</file>
+
+<file path=ppt/slides/slide11.xml><?xml version="1.0" encoding="utf-8"?>
+<p:sld xmlns:a="http://schemas.openxmlformats.org/drawingml/2006/main" xmlns:r="http://schemas.openxmlformats.org/officeDocument/2006/relationships" xmlns:p="http://schemas.openxmlformats.org/presentationml/2006/main">
   <p:cSld name="Slide 10">
     <p:bg>
       <p:bgPr>
@@ -2759,7 +4085,7 @@
 </p:sld>
 </file>
 
-<file path=ppt/slides/slide11.xml><?xml version="1.0" encoding="utf-8"?>
+<file path=ppt/slides/slide12.xml><?xml version="1.0" encoding="utf-8"?>
 <p:sld xmlns:a="http://schemas.openxmlformats.org/drawingml/2006/main" xmlns:r="http://schemas.openxmlformats.org/officeDocument/2006/relationships" xmlns:p="http://schemas.openxmlformats.org/presentationml/2006/main">
   <p:cSld name="Slide 11">
     <p:bg>
@@ -3021,7 +4347,7 @@
 </p:sld>
 </file>
 
-<file path=ppt/slides/slide12.xml><?xml version="1.0" encoding="utf-8"?>
+<file path=ppt/slides/slide13.xml><?xml version="1.0" encoding="utf-8"?>
 <p:sld xmlns:a="http://schemas.openxmlformats.org/drawingml/2006/main" xmlns:r="http://schemas.openxmlformats.org/officeDocument/2006/relationships" xmlns:p="http://schemas.openxmlformats.org/presentationml/2006/main">
   <p:cSld name="Slide 12">
     <p:bg>
@@ -3283,7 +4609,7 @@
 </p:sld>
 </file>
 
-<file path=ppt/slides/slide13.xml><?xml version="1.0" encoding="utf-8"?>
+<file path=ppt/slides/slide14.xml><?xml version="1.0" encoding="utf-8"?>
 <p:sld xmlns:a="http://schemas.openxmlformats.org/drawingml/2006/main" xmlns:r="http://schemas.openxmlformats.org/officeDocument/2006/relationships" xmlns:p="http://schemas.openxmlformats.org/presentationml/2006/main">
   <p:cSld name="Slide 13">
     <p:bg>
@@ -3764,7 +5090,7 @@
 </p:sld>
 </file>
 
-<file path=ppt/slides/slide14.xml><?xml version="1.0" encoding="utf-8"?>
+<file path=ppt/slides/slide15.xml><?xml version="1.0" encoding="utf-8"?>
 <p:sld xmlns:a="http://schemas.openxmlformats.org/drawingml/2006/main" xmlns:r="http://schemas.openxmlformats.org/officeDocument/2006/relationships" xmlns:p="http://schemas.openxmlformats.org/presentationml/2006/main">
   <p:cSld name="Slide 14">
     <p:bg>
@@ -4026,7 +5352,7 @@
 </p:sld>
 </file>
 
-<file path=ppt/slides/slide15.xml><?xml version="1.0" encoding="utf-8"?>
+<file path=ppt/slides/slide16.xml><?xml version="1.0" encoding="utf-8"?>
 <p:sld xmlns:a="http://schemas.openxmlformats.org/drawingml/2006/main" xmlns:r="http://schemas.openxmlformats.org/officeDocument/2006/relationships" xmlns:p="http://schemas.openxmlformats.org/presentationml/2006/main">
   <p:cSld name="Slide 15">
     <p:bg>
@@ -4509,7 +5835,7 @@
 </p:sld>
 </file>
 
-<file path=ppt/slides/slide16.xml><?xml version="1.0" encoding="utf-8"?>
+<file path=ppt/slides/slide17.xml><?xml version="1.0" encoding="utf-8"?>
 <p:sld xmlns:a="http://schemas.openxmlformats.org/drawingml/2006/main" xmlns:r="http://schemas.openxmlformats.org/officeDocument/2006/relationships" xmlns:p="http://schemas.openxmlformats.org/presentationml/2006/main">
   <p:cSld name="Slide 16">
     <p:bg>
@@ -4771,7 +6097,7 @@
 </p:sld>
 </file>
 
-<file path=ppt/slides/slide17.xml><?xml version="1.0" encoding="utf-8"?>
+<file path=ppt/slides/slide18.xml><?xml version="1.0" encoding="utf-8"?>
 <p:sld xmlns:a="http://schemas.openxmlformats.org/drawingml/2006/main" xmlns:r="http://schemas.openxmlformats.org/officeDocument/2006/relationships" xmlns:p="http://schemas.openxmlformats.org/presentationml/2006/main">
   <p:cSld name="Slide 17">
     <p:bg>
@@ -5481,7 +6807,7 @@
 </p:sld>
 </file>
 
-<file path=ppt/slides/slide18.xml><?xml version="1.0" encoding="utf-8"?>
+<file path=ppt/slides/slide19.xml><?xml version="1.0" encoding="utf-8"?>
 <p:sld xmlns:a="http://schemas.openxmlformats.org/drawingml/2006/main" xmlns:r="http://schemas.openxmlformats.org/officeDocument/2006/relationships" xmlns:p="http://schemas.openxmlformats.org/presentationml/2006/main">
   <p:cSld name="Slide 19">
     <p:bg>
@@ -6029,7 +7355,163 @@
 </p:sld>
 </file>
 
-<file path=ppt/slides/slide19.xml><?xml version="1.0" encoding="utf-8"?>
+<file path=ppt/slides/slide2.xml><?xml version="1.0" encoding="utf-8"?>
+<p:sld xmlns:a="http://schemas.openxmlformats.org/drawingml/2006/main" xmlns:r="http://schemas.openxmlformats.org/officeDocument/2006/relationships" xmlns:p="http://schemas.openxmlformats.org/presentationml/2006/main">
+  <p:cSld name="Slide 2">
+    <p:bg>
+      <p:bgPr>
+        <a:solidFill>
+          <a:srgbClr val="0F1419"/>
+        </a:solidFill>
+        <a:effectLst/>
+      </p:bgPr>
+    </p:bg>
+    <p:spTree>
+      <p:nvGrpSpPr>
+        <p:cNvPr id="1" name=""/>
+        <p:cNvGrpSpPr/>
+        <p:nvPr/>
+      </p:nvGrpSpPr>
+      <p:grpSpPr>
+        <a:xfrm>
+          <a:off x="0" y="0"/>
+          <a:ext cx="0" cy="0"/>
+          <a:chOff x="0" y="0"/>
+          <a:chExt cx="0" cy="0"/>
+        </a:xfrm>
+      </p:grpSpPr>
+      <p:sp>
+        <p:nvSpPr>
+          <p:cNvPr id="3" name="Text 0"/>
+          <p:cNvSpPr/>
+          <p:nvPr/>
+        </p:nvSpPr>
+        <p:spPr>
+          <a:xfrm>
+            <a:off x="640080" y="411480"/>
+            <a:ext cx="10908792" cy="731520"/>
+          </a:xfrm>
+          <a:prstGeom prst="rect">
+            <a:avLst/>
+          </a:prstGeom>
+          <a:noFill/>
+          <a:ln/>
+        </p:spPr>
+        <p:txBody>
+          <a:bodyPr wrap="square" lIns="0" tIns="0" rIns="0" bIns="0" rtlCol="0" anchor="ctr"/>
+          <a:lstStyle/>
+          <a:p>
+            <a:pPr marL="0" indent="0">
+              <a:buNone/>
+            </a:pPr>
+            <a:r>
+              <a:rPr lang="en-US" sz="3200" b="1" dirty="0">
+                <a:solidFill>
+                  <a:srgbClr val="E9EEF5"/>
+                </a:solidFill>
+                <a:latin typeface="Calibri" pitchFamily="34" charset="0"/>
+                <a:ea typeface="Calibri" pitchFamily="34" charset="-122"/>
+                <a:cs typeface="Calibri" pitchFamily="34" charset="-120"/>
+              </a:rPr>
+              <a:t>Donnie Taylor</a:t>
+            </a:r>
+            <a:endParaRPr lang="en-US" sz="3200" dirty="0"/>
+          </a:p>
+        </p:txBody>
+      </p:sp>
+      <p:sp>
+        <p:nvSpPr>
+          <p:cNvPr id="4" name="Text 1"/>
+          <p:cNvSpPr/>
+          <p:nvPr/>
+        </p:nvSpPr>
+        <p:spPr>
+          <a:xfrm>
+            <a:off x="640080" y="1463040"/>
+            <a:ext cx="10908792" cy="4572000"/>
+          </a:xfrm>
+          <a:prstGeom prst="rect">
+            <a:avLst/>
+          </a:prstGeom>
+          <a:noFill/>
+          <a:ln/>
+        </p:spPr>
+        <p:txBody>
+          <a:bodyPr wrap="square" lIns="0" tIns="0" rIns="0" bIns="0" rtlCol="0" anchor="t"/>
+          <a:lstStyle/>
+          <a:p>
+            <a:pPr marL="279400" indent="-279400">
+              <a:spcAft>
+                <a:spcPts val="1000"/>
+              </a:spcAft>
+              <a:buSzPct val="100000"/>
+              <a:buChar char="•"/>
+            </a:pPr>
+            <a:r>
+              <a:rPr lang="en-US" sz="2000" dirty="0">
+                <a:solidFill>
+                  <a:srgbClr val="E9EEF5"/>
+                </a:solidFill>
+                <a:latin typeface="Calibri" pitchFamily="34" charset="0"/>
+                <a:ea typeface="Calibri" pitchFamily="34" charset="-122"/>
+                <a:cs typeface="Calibri" pitchFamily="34" charset="-120"/>
+              </a:rPr>
+              <a:t>Microsoft MVP</a:t>
+            </a:r>
+            <a:endParaRPr lang="en-US" sz="2000" dirty="0"/>
+          </a:p>
+          <a:p>
+            <a:pPr marL="279400" indent="-279400">
+              <a:spcAft>
+                <a:spcPts val="1000"/>
+              </a:spcAft>
+              <a:buSzPct val="100000"/>
+              <a:buChar char="•"/>
+            </a:pPr>
+            <a:r>
+              <a:rPr lang="en-US" sz="2000" dirty="0">
+                <a:solidFill>
+                  <a:srgbClr val="E9EEF5"/>
+                </a:solidFill>
+                <a:latin typeface="Calibri" pitchFamily="34" charset="0"/>
+                <a:ea typeface="Calibri" pitchFamily="34" charset="-122"/>
+                <a:cs typeface="Calibri" pitchFamily="34" charset="-120"/>
+              </a:rPr>
+              <a:t>Azure, PowerShell, AI wrangler</a:t>
+            </a:r>
+          </a:p>
+          <a:p>
+            <a:pPr marL="279400" indent="-279400">
+              <a:spcAft>
+                <a:spcPts val="1000"/>
+              </a:spcAft>
+              <a:buSzPct val="100000"/>
+              <a:buChar char="•"/>
+            </a:pPr>
+            <a:r>
+              <a:rPr lang="en-US" sz="2000" dirty="0">
+                <a:solidFill>
+                  <a:srgbClr val="E9EEF5"/>
+                </a:solidFill>
+                <a:latin typeface="Calibri" pitchFamily="34" charset="0"/>
+                <a:ea typeface="Calibri" pitchFamily="34" charset="-122"/>
+                <a:cs typeface="Calibri" pitchFamily="34" charset="-120"/>
+              </a:rPr>
+              <a:t>draith.com  ·  github.com/donnietaylor  ·  @donnietaylor.bsky.social</a:t>
+            </a:r>
+            <a:endParaRPr lang="en-US" sz="2000" dirty="0"/>
+          </a:p>
+        </p:txBody>
+      </p:sp>
+    </p:spTree>
+  </p:cSld>
+  <p:clrMapOvr>
+    <a:masterClrMapping/>
+  </p:clrMapOvr>
+</p:sld>
+</file>
+
+<file path=ppt/slides/slide20.xml><?xml version="1.0" encoding="utf-8"?>
 <p:sld xmlns:a="http://schemas.openxmlformats.org/drawingml/2006/main" xmlns:r="http://schemas.openxmlformats.org/officeDocument/2006/relationships" xmlns:p="http://schemas.openxmlformats.org/presentationml/2006/main">
   <p:cSld name="Slide 20">
     <p:bg>
@@ -6542,163 +8024,7 @@
 </p:sld>
 </file>
 
-<file path=ppt/slides/slide2.xml><?xml version="1.0" encoding="utf-8"?>
-<p:sld xmlns:a="http://schemas.openxmlformats.org/drawingml/2006/main" xmlns:r="http://schemas.openxmlformats.org/officeDocument/2006/relationships" xmlns:p="http://schemas.openxmlformats.org/presentationml/2006/main">
-  <p:cSld name="Slide 2">
-    <p:bg>
-      <p:bgPr>
-        <a:solidFill>
-          <a:srgbClr val="0F1419"/>
-        </a:solidFill>
-        <a:effectLst/>
-      </p:bgPr>
-    </p:bg>
-    <p:spTree>
-      <p:nvGrpSpPr>
-        <p:cNvPr id="1" name=""/>
-        <p:cNvGrpSpPr/>
-        <p:nvPr/>
-      </p:nvGrpSpPr>
-      <p:grpSpPr>
-        <a:xfrm>
-          <a:off x="0" y="0"/>
-          <a:ext cx="0" cy="0"/>
-          <a:chOff x="0" y="0"/>
-          <a:chExt cx="0" cy="0"/>
-        </a:xfrm>
-      </p:grpSpPr>
-      <p:sp>
-        <p:nvSpPr>
-          <p:cNvPr id="3" name="Text 0"/>
-          <p:cNvSpPr/>
-          <p:nvPr/>
-        </p:nvSpPr>
-        <p:spPr>
-          <a:xfrm>
-            <a:off x="640080" y="411480"/>
-            <a:ext cx="10908792" cy="731520"/>
-          </a:xfrm>
-          <a:prstGeom prst="rect">
-            <a:avLst/>
-          </a:prstGeom>
-          <a:noFill/>
-          <a:ln/>
-        </p:spPr>
-        <p:txBody>
-          <a:bodyPr wrap="square" lIns="0" tIns="0" rIns="0" bIns="0" rtlCol="0" anchor="ctr"/>
-          <a:lstStyle/>
-          <a:p>
-            <a:pPr marL="0" indent="0">
-              <a:buNone/>
-            </a:pPr>
-            <a:r>
-              <a:rPr lang="en-US" sz="3200" b="1" dirty="0">
-                <a:solidFill>
-                  <a:srgbClr val="E9EEF5"/>
-                </a:solidFill>
-                <a:latin typeface="Calibri" pitchFamily="34" charset="0"/>
-                <a:ea typeface="Calibri" pitchFamily="34" charset="-122"/>
-                <a:cs typeface="Calibri" pitchFamily="34" charset="-120"/>
-              </a:rPr>
-              <a:t>Donnie Taylor</a:t>
-            </a:r>
-            <a:endParaRPr lang="en-US" sz="3200" dirty="0"/>
-          </a:p>
-        </p:txBody>
-      </p:sp>
-      <p:sp>
-        <p:nvSpPr>
-          <p:cNvPr id="4" name="Text 1"/>
-          <p:cNvSpPr/>
-          <p:nvPr/>
-        </p:nvSpPr>
-        <p:spPr>
-          <a:xfrm>
-            <a:off x="640080" y="1463040"/>
-            <a:ext cx="10908792" cy="4572000"/>
-          </a:xfrm>
-          <a:prstGeom prst="rect">
-            <a:avLst/>
-          </a:prstGeom>
-          <a:noFill/>
-          <a:ln/>
-        </p:spPr>
-        <p:txBody>
-          <a:bodyPr wrap="square" lIns="0" tIns="0" rIns="0" bIns="0" rtlCol="0" anchor="t"/>
-          <a:lstStyle/>
-          <a:p>
-            <a:pPr marL="279400" indent="-279400">
-              <a:spcAft>
-                <a:spcPts val="1000"/>
-              </a:spcAft>
-              <a:buSzPct val="100000"/>
-              <a:buChar char="•"/>
-            </a:pPr>
-            <a:r>
-              <a:rPr lang="en-US" sz="2000" dirty="0">
-                <a:solidFill>
-                  <a:srgbClr val="E9EEF5"/>
-                </a:solidFill>
-                <a:latin typeface="Calibri" pitchFamily="34" charset="0"/>
-                <a:ea typeface="Calibri" pitchFamily="34" charset="-122"/>
-                <a:cs typeface="Calibri" pitchFamily="34" charset="-120"/>
-              </a:rPr>
-              <a:t>Microsoft MVP</a:t>
-            </a:r>
-            <a:endParaRPr lang="en-US" sz="2000" dirty="0"/>
-          </a:p>
-          <a:p>
-            <a:pPr marL="279400" indent="-279400">
-              <a:spcAft>
-                <a:spcPts val="1000"/>
-              </a:spcAft>
-              <a:buSzPct val="100000"/>
-              <a:buChar char="•"/>
-            </a:pPr>
-            <a:r>
-              <a:rPr lang="en-US" sz="2000" dirty="0">
-                <a:solidFill>
-                  <a:srgbClr val="E9EEF5"/>
-                </a:solidFill>
-                <a:latin typeface="Calibri" pitchFamily="34" charset="0"/>
-                <a:ea typeface="Calibri" pitchFamily="34" charset="-122"/>
-                <a:cs typeface="Calibri" pitchFamily="34" charset="-120"/>
-              </a:rPr>
-              <a:t>Azure, PowerShell, AI wrangler</a:t>
-            </a:r>
-          </a:p>
-          <a:p>
-            <a:pPr marL="279400" indent="-279400">
-              <a:spcAft>
-                <a:spcPts val="1000"/>
-              </a:spcAft>
-              <a:buSzPct val="100000"/>
-              <a:buChar char="•"/>
-            </a:pPr>
-            <a:r>
-              <a:rPr lang="en-US" sz="2000" dirty="0">
-                <a:solidFill>
-                  <a:srgbClr val="E9EEF5"/>
-                </a:solidFill>
-                <a:latin typeface="Calibri" pitchFamily="34" charset="0"/>
-                <a:ea typeface="Calibri" pitchFamily="34" charset="-122"/>
-                <a:cs typeface="Calibri" pitchFamily="34" charset="-120"/>
-              </a:rPr>
-              <a:t>draith.com  ·  github.com/donnietaylor  ·  @donnietaylor.bsky.social</a:t>
-            </a:r>
-            <a:endParaRPr lang="en-US" sz="2000" dirty="0"/>
-          </a:p>
-        </p:txBody>
-      </p:sp>
-    </p:spTree>
-  </p:cSld>
-  <p:clrMapOvr>
-    <a:masterClrMapping/>
-  </p:clrMapOvr>
-</p:sld>
-</file>
-
-<file path=ppt/slides/slide20.xml><?xml version="1.0" encoding="utf-8"?>
+<file path=ppt/slides/slide21.xml><?xml version="1.0" encoding="utf-8"?>
 <p:sld xmlns:a="http://schemas.openxmlformats.org/drawingml/2006/main" xmlns:r="http://schemas.openxmlformats.org/officeDocument/2006/relationships" xmlns:p="http://schemas.openxmlformats.org/presentationml/2006/main">
   <p:cSld name="Slide 21">
     <p:bg>
@@ -6889,6 +8215,31 @@
 
 <file path=ppt/slides/slide3.xml><?xml version="1.0" encoding="utf-8"?>
 <p:sld xmlns:a="http://schemas.openxmlformats.org/drawingml/2006/main" xmlns:r="http://schemas.openxmlformats.org/officeDocument/2006/relationships" xmlns:p="http://schemas.openxmlformats.org/presentationml/2006/main">
+  <p:cSld>
+    <p:spTree>
+      <p:nvGrpSpPr>
+        <p:cNvPr id="1" name=""/>
+        <p:cNvGrpSpPr/>
+        <p:nvPr/>
+      </p:nvGrpSpPr>
+      <p:grpSpPr>
+        <a:xfrm>
+          <a:off x="0" y="0"/>
+          <a:ext cx="0" cy="0"/>
+          <a:chOff x="0" y="0"/>
+          <a:chExt cx="0" cy="0"/>
+        </a:xfrm>
+      </p:grpSpPr>
+    </p:spTree>
+  </p:cSld>
+  <p:clrMapOvr>
+    <a:masterClrMapping/>
+  </p:clrMapOvr>
+</p:sld>
+</file>
+
+<file path=ppt/slides/slide4.xml><?xml version="1.0" encoding="utf-8"?>
+<p:sld xmlns:a="http://schemas.openxmlformats.org/drawingml/2006/main" xmlns:r="http://schemas.openxmlformats.org/officeDocument/2006/relationships" xmlns:p="http://schemas.openxmlformats.org/presentationml/2006/main">
   <p:cSld name="Slide 4">
     <p:bg>
       <p:bgPr>
@@ -7558,7 +8909,7 @@
 </p:sld>
 </file>
 
-<file path=ppt/slides/slide4.xml><?xml version="1.0" encoding="utf-8"?>
+<file path=ppt/slides/slide5.xml><?xml version="1.0" encoding="utf-8"?>
 <p:sld xmlns:a="http://schemas.openxmlformats.org/drawingml/2006/main" xmlns:r="http://schemas.openxmlformats.org/officeDocument/2006/relationships" xmlns:p="http://schemas.openxmlformats.org/presentationml/2006/main">
   <p:cSld name="Slide 3">
     <p:bg>
@@ -8110,7 +9461,7 @@
 </p:sld>
 </file>
 
-<file path=ppt/slides/slide5.xml><?xml version="1.0" encoding="utf-8"?>
+<file path=ppt/slides/slide6.xml><?xml version="1.0" encoding="utf-8"?>
 <p:sld xmlns:a="http://schemas.openxmlformats.org/drawingml/2006/main" xmlns:r="http://schemas.openxmlformats.org/officeDocument/2006/relationships" xmlns:p="http://schemas.openxmlformats.org/presentationml/2006/main">
   <p:cSld name="Slide 5">
     <p:bg>
@@ -9328,7 +10679,7 @@
 </p:sld>
 </file>
 
-<file path=ppt/slides/slide6.xml><?xml version="1.0" encoding="utf-8"?>
+<file path=ppt/slides/slide7.xml><?xml version="1.0" encoding="utf-8"?>
 <p:sld xmlns:a="http://schemas.openxmlformats.org/drawingml/2006/main" xmlns:r="http://schemas.openxmlformats.org/officeDocument/2006/relationships" xmlns:p="http://schemas.openxmlformats.org/presentationml/2006/main">
   <p:cSld name="Slide 6">
     <p:bg>
@@ -10263,7 +11614,7 @@
 </p:sld>
 </file>
 
-<file path=ppt/slides/slide7.xml><?xml version="1.0" encoding="utf-8"?>
+<file path=ppt/slides/slide8.xml><?xml version="1.0" encoding="utf-8"?>
 <p:sld xmlns:a="http://schemas.openxmlformats.org/drawingml/2006/main" xmlns:r="http://schemas.openxmlformats.org/officeDocument/2006/relationships" xmlns:p="http://schemas.openxmlformats.org/presentationml/2006/main">
   <p:cSld name="Slide 7">
     <p:bg>
@@ -11937,7 +13288,7 @@
 </p:sld>
 </file>
 
-<file path=ppt/slides/slide8.xml><?xml version="1.0" encoding="utf-8"?>
+<file path=ppt/slides/slide9.xml><?xml version="1.0" encoding="utf-8"?>
 <p:sld xmlns:a="http://schemas.openxmlformats.org/drawingml/2006/main" xmlns:r="http://schemas.openxmlformats.org/officeDocument/2006/relationships" xmlns:p="http://schemas.openxmlformats.org/presentationml/2006/main">
   <p:cSld name="Slide 8">
     <p:bg>
@@ -12188,1289 +13539,6 @@
               <a:t>Greet me like a Texan.</a:t>
             </a:r>
             <a:endParaRPr lang="en-US" sz="1700" dirty="0"/>
-          </a:p>
-        </p:txBody>
-      </p:sp>
-    </p:spTree>
-  </p:cSld>
-  <p:clrMapOvr>
-    <a:masterClrMapping/>
-  </p:clrMapOvr>
-</p:sld>
-</file>
-
-<file path=ppt/slides/slide9.xml><?xml version="1.0" encoding="utf-8"?>
-<p:sld xmlns:a="http://schemas.openxmlformats.org/drawingml/2006/main" xmlns:r="http://schemas.openxmlformats.org/officeDocument/2006/relationships" xmlns:p="http://schemas.openxmlformats.org/presentationml/2006/main">
-  <p:cSld name="Slide 9">
-    <p:bg>
-      <p:bgPr>
-        <a:solidFill>
-          <a:srgbClr val="0F1419"/>
-        </a:solidFill>
-        <a:effectLst/>
-      </p:bgPr>
-    </p:bg>
-    <p:spTree>
-      <p:nvGrpSpPr>
-        <p:cNvPr id="1" name=""/>
-        <p:cNvGrpSpPr/>
-        <p:nvPr/>
-      </p:nvGrpSpPr>
-      <p:grpSpPr>
-        <a:xfrm>
-          <a:off x="0" y="0"/>
-          <a:ext cx="0" cy="0"/>
-          <a:chOff x="0" y="0"/>
-          <a:chExt cx="0" cy="0"/>
-        </a:xfrm>
-      </p:grpSpPr>
-      <p:sp>
-        <p:nvSpPr>
-          <p:cNvPr id="3" name="Text 0"/>
-          <p:cNvSpPr/>
-          <p:nvPr/>
-        </p:nvSpPr>
-        <p:spPr>
-          <a:xfrm>
-            <a:off x="640080" y="201168"/>
-            <a:ext cx="10908792" cy="256032"/>
-          </a:xfrm>
-          <a:prstGeom prst="rect">
-            <a:avLst/>
-          </a:prstGeom>
-          <a:noFill/>
-          <a:ln/>
-        </p:spPr>
-        <p:txBody>
-          <a:bodyPr wrap="square" lIns="0" tIns="0" rIns="0" bIns="0" rtlCol="0" anchor="ctr"/>
-          <a:lstStyle/>
-          <a:p>
-            <a:pPr marL="0" indent="0">
-              <a:buNone/>
-            </a:pPr>
-            <a:r>
-              <a:rPr lang="en-US" sz="1200" b="1" kern="0" spc="200" dirty="0">
-                <a:solidFill>
-                  <a:srgbClr val="8A9AAE"/>
-                </a:solidFill>
-                <a:latin typeface="Calibri" pitchFamily="34" charset="0"/>
-                <a:ea typeface="Calibri" pitchFamily="34" charset="-122"/>
-                <a:cs typeface="Calibri" pitchFamily="34" charset="-120"/>
-              </a:rPr>
-              <a:t>DEMO 1</a:t>
-            </a:r>
-            <a:endParaRPr lang="en-US" sz="1200" dirty="0"/>
-          </a:p>
-        </p:txBody>
-      </p:sp>
-      <p:sp>
-        <p:nvSpPr>
-          <p:cNvPr id="4" name="Text 1"/>
-          <p:cNvSpPr/>
-          <p:nvPr/>
-        </p:nvSpPr>
-        <p:spPr>
-          <a:xfrm>
-            <a:off x="640080" y="411480"/>
-            <a:ext cx="10908792" cy="731520"/>
-          </a:xfrm>
-          <a:prstGeom prst="rect">
-            <a:avLst/>
-          </a:prstGeom>
-          <a:noFill/>
-          <a:ln/>
-        </p:spPr>
-        <p:txBody>
-          <a:bodyPr wrap="square" lIns="0" tIns="0" rIns="0" bIns="0" rtlCol="0" anchor="ctr"/>
-          <a:lstStyle/>
-          <a:p>
-            <a:pPr marL="0" indent="0">
-              <a:buNone/>
-            </a:pPr>
-            <a:r>
-              <a:rPr lang="en-US" sz="3200" b="1" dirty="0">
-                <a:solidFill>
-                  <a:srgbClr val="E9EEF5"/>
-                </a:solidFill>
-                <a:latin typeface="Calibri" pitchFamily="34" charset="0"/>
-                <a:ea typeface="Calibri" pitchFamily="34" charset="-122"/>
-                <a:cs typeface="Calibri" pitchFamily="34" charset="-120"/>
-              </a:rPr>
-              <a:t>How a param block becomes a schema</a:t>
-            </a:r>
-            <a:endParaRPr lang="en-US" sz="3200" dirty="0"/>
-          </a:p>
-        </p:txBody>
-      </p:sp>
-      <p:sp>
-        <p:nvSpPr>
-          <p:cNvPr id="5" name="Text 2"/>
-          <p:cNvSpPr/>
-          <p:nvPr/>
-        </p:nvSpPr>
-        <p:spPr>
-          <a:xfrm>
-            <a:off x="868680" y="1371600"/>
-            <a:ext cx="4754880" cy="274320"/>
-          </a:xfrm>
-          <a:prstGeom prst="rect">
-            <a:avLst/>
-          </a:prstGeom>
-          <a:noFill/>
-          <a:ln/>
-        </p:spPr>
-        <p:txBody>
-          <a:bodyPr wrap="square" lIns="0" tIns="0" rIns="0" bIns="0" rtlCol="0" anchor="ctr"/>
-          <a:lstStyle/>
-          <a:p>
-            <a:pPr marL="0" indent="0">
-              <a:buNone/>
-            </a:pPr>
-            <a:r>
-              <a:rPr lang="en-US" sz="1200" b="1" kern="0" spc="200" dirty="0">
-                <a:solidFill>
-                  <a:srgbClr val="5FD3BC"/>
-                </a:solidFill>
-                <a:latin typeface="Calibri" pitchFamily="34" charset="0"/>
-                <a:ea typeface="Calibri" pitchFamily="34" charset="-122"/>
-                <a:cs typeface="Calibri" pitchFamily="34" charset="-120"/>
-              </a:rPr>
-              <a:t>PowerShell</a:t>
-            </a:r>
-            <a:endParaRPr lang="en-US" sz="1200" dirty="0"/>
-          </a:p>
-        </p:txBody>
-      </p:sp>
-      <p:sp>
-        <p:nvSpPr>
-          <p:cNvPr id="6" name="Text 3"/>
-          <p:cNvSpPr/>
-          <p:nvPr/>
-        </p:nvSpPr>
-        <p:spPr>
-          <a:xfrm>
-            <a:off x="6720840" y="1371600"/>
-            <a:ext cx="4754880" cy="274320"/>
-          </a:xfrm>
-          <a:prstGeom prst="rect">
-            <a:avLst/>
-          </a:prstGeom>
-          <a:noFill/>
-          <a:ln/>
-        </p:spPr>
-        <p:txBody>
-          <a:bodyPr wrap="square" lIns="0" tIns="0" rIns="0" bIns="0" rtlCol="0" anchor="ctr"/>
-          <a:lstStyle/>
-          <a:p>
-            <a:pPr marL="0" indent="0">
-              <a:buNone/>
-            </a:pPr>
-            <a:r>
-              <a:rPr lang="en-US" sz="1200" b="1" kern="0" spc="200" dirty="0">
-                <a:solidFill>
-                  <a:srgbClr val="F2C14E"/>
-                </a:solidFill>
-                <a:latin typeface="Calibri" pitchFamily="34" charset="0"/>
-                <a:ea typeface="Calibri" pitchFamily="34" charset="-122"/>
-                <a:cs typeface="Calibri" pitchFamily="34" charset="-120"/>
-              </a:rPr>
-              <a:t>JSON Schema / MCP</a:t>
-            </a:r>
-            <a:endParaRPr lang="en-US" sz="1200" dirty="0"/>
-          </a:p>
-        </p:txBody>
-      </p:sp>
-      <p:sp>
-        <p:nvSpPr>
-          <p:cNvPr id="7" name="Shape 4"/>
-          <p:cNvSpPr/>
-          <p:nvPr/>
-        </p:nvSpPr>
-        <p:spPr>
-          <a:xfrm>
-            <a:off x="640080" y="1691640"/>
-            <a:ext cx="10881360" cy="530352"/>
-          </a:xfrm>
-          <a:prstGeom prst="roundRect">
-            <a:avLst>
-              <a:gd name="adj" fmla="val 10345"/>
-            </a:avLst>
-          </a:prstGeom>
-          <a:solidFill>
-            <a:srgbClr val="1C2530"/>
-          </a:solidFill>
-          <a:ln w="12700">
-            <a:solidFill>
-              <a:srgbClr val="2C3949"/>
-            </a:solidFill>
-            <a:prstDash val="solid"/>
-          </a:ln>
-        </p:spPr>
-        <p:txBody>
-          <a:bodyPr/>
-          <a:lstStyle/>
-          <a:p>
-            <a:endParaRPr lang="en-US"/>
-          </a:p>
-        </p:txBody>
-      </p:sp>
-      <p:sp>
-        <p:nvSpPr>
-          <p:cNvPr id="8" name="Text 5"/>
-          <p:cNvSpPr/>
-          <p:nvPr/>
-        </p:nvSpPr>
-        <p:spPr>
-          <a:xfrm>
-            <a:off x="868680" y="1691640"/>
-            <a:ext cx="5212080" cy="530352"/>
-          </a:xfrm>
-          <a:prstGeom prst="rect">
-            <a:avLst/>
-          </a:prstGeom>
-          <a:noFill/>
-          <a:ln/>
-        </p:spPr>
-        <p:txBody>
-          <a:bodyPr wrap="square" lIns="0" tIns="0" rIns="0" bIns="0" rtlCol="0" anchor="ctr"/>
-          <a:lstStyle/>
-          <a:p>
-            <a:pPr marL="0" indent="0">
-              <a:buNone/>
-            </a:pPr>
-            <a:r>
-              <a:rPr lang="en-US" sz="1400" dirty="0">
-                <a:solidFill>
-                  <a:srgbClr val="5FD3BC"/>
-                </a:solidFill>
-                <a:latin typeface="Consolas" pitchFamily="34" charset="0"/>
-                <a:ea typeface="Consolas" pitchFamily="34" charset="-122"/>
-                <a:cs typeface="Consolas" pitchFamily="34" charset="-120"/>
-              </a:rPr>
-              <a:t>[Parameter(Mandatory)]</a:t>
-            </a:r>
-            <a:endParaRPr lang="en-US" sz="1400" dirty="0"/>
-          </a:p>
-        </p:txBody>
-      </p:sp>
-      <p:sp>
-        <p:nvSpPr>
-          <p:cNvPr id="9" name="Text 6"/>
-          <p:cNvSpPr/>
-          <p:nvPr/>
-        </p:nvSpPr>
-        <p:spPr>
-          <a:xfrm>
-            <a:off x="6126480" y="1691640"/>
-            <a:ext cx="365760" cy="530352"/>
-          </a:xfrm>
-          <a:prstGeom prst="rect">
-            <a:avLst/>
-          </a:prstGeom>
-          <a:noFill/>
-          <a:ln/>
-        </p:spPr>
-        <p:txBody>
-          <a:bodyPr wrap="square" lIns="0" tIns="0" rIns="0" bIns="0" rtlCol="0" anchor="ctr"/>
-          <a:lstStyle/>
-          <a:p>
-            <a:pPr marL="0" indent="0" algn="ctr">
-              <a:buNone/>
-            </a:pPr>
-            <a:r>
-              <a:rPr lang="en-US" sz="1600" dirty="0">
-                <a:solidFill>
-                  <a:srgbClr val="8A9AAE"/>
-                </a:solidFill>
-                <a:latin typeface="Calibri" pitchFamily="34" charset="0"/>
-                <a:ea typeface="Calibri" pitchFamily="34" charset="-122"/>
-                <a:cs typeface="Calibri" pitchFamily="34" charset="-120"/>
-              </a:rPr>
-              <a:t>→</a:t>
-            </a:r>
-            <a:endParaRPr lang="en-US" sz="1600" dirty="0"/>
-          </a:p>
-        </p:txBody>
-      </p:sp>
-      <p:sp>
-        <p:nvSpPr>
-          <p:cNvPr id="10" name="Text 7"/>
-          <p:cNvSpPr/>
-          <p:nvPr/>
-        </p:nvSpPr>
-        <p:spPr>
-          <a:xfrm>
-            <a:off x="6720840" y="1691640"/>
-            <a:ext cx="4663440" cy="530352"/>
-          </a:xfrm>
-          <a:prstGeom prst="rect">
-            <a:avLst/>
-          </a:prstGeom>
-          <a:noFill/>
-          <a:ln/>
-        </p:spPr>
-        <p:txBody>
-          <a:bodyPr wrap="square" lIns="0" tIns="0" rIns="0" bIns="0" rtlCol="0" anchor="ctr"/>
-          <a:lstStyle/>
-          <a:p>
-            <a:pPr marL="0" indent="0">
-              <a:buNone/>
-            </a:pPr>
-            <a:r>
-              <a:rPr lang="en-US" sz="1400" dirty="0">
-                <a:solidFill>
-                  <a:srgbClr val="F2C14E"/>
-                </a:solidFill>
-                <a:latin typeface="Consolas" pitchFamily="34" charset="0"/>
-                <a:ea typeface="Consolas" pitchFamily="34" charset="-122"/>
-                <a:cs typeface="Consolas" pitchFamily="34" charset="-120"/>
-              </a:rPr>
-              <a:t>required</a:t>
-            </a:r>
-            <a:endParaRPr lang="en-US" sz="1400" dirty="0"/>
-          </a:p>
-        </p:txBody>
-      </p:sp>
-      <p:sp>
-        <p:nvSpPr>
-          <p:cNvPr id="11" name="Shape 8"/>
-          <p:cNvSpPr/>
-          <p:nvPr/>
-        </p:nvSpPr>
-        <p:spPr>
-          <a:xfrm>
-            <a:off x="640080" y="2295144"/>
-            <a:ext cx="10881360" cy="530352"/>
-          </a:xfrm>
-          <a:prstGeom prst="roundRect">
-            <a:avLst>
-              <a:gd name="adj" fmla="val 10345"/>
-            </a:avLst>
-          </a:prstGeom>
-          <a:solidFill>
-            <a:srgbClr val="1C2530"/>
-          </a:solidFill>
-          <a:ln w="12700">
-            <a:solidFill>
-              <a:srgbClr val="2C3949"/>
-            </a:solidFill>
-            <a:prstDash val="solid"/>
-          </a:ln>
-        </p:spPr>
-        <p:txBody>
-          <a:bodyPr/>
-          <a:lstStyle/>
-          <a:p>
-            <a:endParaRPr lang="en-US"/>
-          </a:p>
-        </p:txBody>
-      </p:sp>
-      <p:sp>
-        <p:nvSpPr>
-          <p:cNvPr id="12" name="Text 9"/>
-          <p:cNvSpPr/>
-          <p:nvPr/>
-        </p:nvSpPr>
-        <p:spPr>
-          <a:xfrm>
-            <a:off x="868680" y="2295144"/>
-            <a:ext cx="5212080" cy="530352"/>
-          </a:xfrm>
-          <a:prstGeom prst="rect">
-            <a:avLst/>
-          </a:prstGeom>
-          <a:noFill/>
-          <a:ln/>
-        </p:spPr>
-        <p:txBody>
-          <a:bodyPr wrap="square" lIns="0" tIns="0" rIns="0" bIns="0" rtlCol="0" anchor="ctr"/>
-          <a:lstStyle/>
-          <a:p>
-            <a:pPr marL="0" indent="0">
-              <a:buNone/>
-            </a:pPr>
-            <a:r>
-              <a:rPr lang="en-US" sz="1400" dirty="0">
-                <a:solidFill>
-                  <a:srgbClr val="5FD3BC"/>
-                </a:solidFill>
-                <a:latin typeface="Consolas" pitchFamily="34" charset="0"/>
-                <a:ea typeface="Consolas" pitchFamily="34" charset="-122"/>
-                <a:cs typeface="Consolas" pitchFamily="34" charset="-120"/>
-              </a:rPr>
-              <a:t>[string]  [int]  [bool]  [datetime]</a:t>
-            </a:r>
-            <a:endParaRPr lang="en-US" sz="1400" dirty="0"/>
-          </a:p>
-        </p:txBody>
-      </p:sp>
-      <p:sp>
-        <p:nvSpPr>
-          <p:cNvPr id="13" name="Text 10"/>
-          <p:cNvSpPr/>
-          <p:nvPr/>
-        </p:nvSpPr>
-        <p:spPr>
-          <a:xfrm>
-            <a:off x="6126480" y="2295144"/>
-            <a:ext cx="365760" cy="530352"/>
-          </a:xfrm>
-          <a:prstGeom prst="rect">
-            <a:avLst/>
-          </a:prstGeom>
-          <a:noFill/>
-          <a:ln/>
-        </p:spPr>
-        <p:txBody>
-          <a:bodyPr wrap="square" lIns="0" tIns="0" rIns="0" bIns="0" rtlCol="0" anchor="ctr"/>
-          <a:lstStyle/>
-          <a:p>
-            <a:pPr marL="0" indent="0" algn="ctr">
-              <a:buNone/>
-            </a:pPr>
-            <a:r>
-              <a:rPr lang="en-US" sz="1600" dirty="0">
-                <a:solidFill>
-                  <a:srgbClr val="8A9AAE"/>
-                </a:solidFill>
-                <a:latin typeface="Calibri" pitchFamily="34" charset="0"/>
-                <a:ea typeface="Calibri" pitchFamily="34" charset="-122"/>
-                <a:cs typeface="Calibri" pitchFamily="34" charset="-120"/>
-              </a:rPr>
-              <a:t>→</a:t>
-            </a:r>
-            <a:endParaRPr lang="en-US" sz="1600" dirty="0"/>
-          </a:p>
-        </p:txBody>
-      </p:sp>
-      <p:sp>
-        <p:nvSpPr>
-          <p:cNvPr id="14" name="Text 11"/>
-          <p:cNvSpPr/>
-          <p:nvPr/>
-        </p:nvSpPr>
-        <p:spPr>
-          <a:xfrm>
-            <a:off x="6720840" y="2295144"/>
-            <a:ext cx="4663440" cy="530352"/>
-          </a:xfrm>
-          <a:prstGeom prst="rect">
-            <a:avLst/>
-          </a:prstGeom>
-          <a:noFill/>
-          <a:ln/>
-        </p:spPr>
-        <p:txBody>
-          <a:bodyPr wrap="square" lIns="0" tIns="0" rIns="0" bIns="0" rtlCol="0" anchor="ctr"/>
-          <a:lstStyle/>
-          <a:p>
-            <a:pPr marL="0" indent="0">
-              <a:buNone/>
-            </a:pPr>
-            <a:r>
-              <a:rPr lang="en-US" sz="1400" dirty="0">
-                <a:solidFill>
-                  <a:srgbClr val="F2C14E"/>
-                </a:solidFill>
-                <a:latin typeface="Consolas" pitchFamily="34" charset="0"/>
-                <a:ea typeface="Consolas" pitchFamily="34" charset="-122"/>
-                <a:cs typeface="Consolas" pitchFamily="34" charset="-120"/>
-              </a:rPr>
-              <a:t>type</a:t>
-            </a:r>
-            <a:endParaRPr lang="en-US" sz="1400" dirty="0"/>
-          </a:p>
-        </p:txBody>
-      </p:sp>
-      <p:sp>
-        <p:nvSpPr>
-          <p:cNvPr id="15" name="Shape 12"/>
-          <p:cNvSpPr/>
-          <p:nvPr/>
-        </p:nvSpPr>
-        <p:spPr>
-          <a:xfrm>
-            <a:off x="640080" y="2898648"/>
-            <a:ext cx="10881360" cy="530352"/>
-          </a:xfrm>
-          <a:prstGeom prst="roundRect">
-            <a:avLst>
-              <a:gd name="adj" fmla="val 10345"/>
-            </a:avLst>
-          </a:prstGeom>
-          <a:solidFill>
-            <a:srgbClr val="1C2530"/>
-          </a:solidFill>
-          <a:ln w="12700">
-            <a:solidFill>
-              <a:srgbClr val="2C3949"/>
-            </a:solidFill>
-            <a:prstDash val="solid"/>
-          </a:ln>
-        </p:spPr>
-        <p:txBody>
-          <a:bodyPr/>
-          <a:lstStyle/>
-          <a:p>
-            <a:endParaRPr lang="en-US"/>
-          </a:p>
-        </p:txBody>
-      </p:sp>
-      <p:sp>
-        <p:nvSpPr>
-          <p:cNvPr id="16" name="Text 13"/>
-          <p:cNvSpPr/>
-          <p:nvPr/>
-        </p:nvSpPr>
-        <p:spPr>
-          <a:xfrm>
-            <a:off x="868680" y="2898648"/>
-            <a:ext cx="5212080" cy="530352"/>
-          </a:xfrm>
-          <a:prstGeom prst="rect">
-            <a:avLst/>
-          </a:prstGeom>
-          <a:noFill/>
-          <a:ln/>
-        </p:spPr>
-        <p:txBody>
-          <a:bodyPr wrap="square" lIns="0" tIns="0" rIns="0" bIns="0" rtlCol="0" anchor="ctr"/>
-          <a:lstStyle/>
-          <a:p>
-            <a:pPr marL="0" indent="0">
-              <a:buNone/>
-            </a:pPr>
-            <a:r>
-              <a:rPr lang="en-US" sz="1400" dirty="0">
-                <a:solidFill>
-                  <a:srgbClr val="5FD3BC"/>
-                </a:solidFill>
-                <a:latin typeface="Consolas" pitchFamily="34" charset="0"/>
-                <a:ea typeface="Consolas" pitchFamily="34" charset="-122"/>
-                <a:cs typeface="Consolas" pitchFamily="34" charset="-120"/>
-              </a:rPr>
-              <a:t>[ValidateSet('A','B')]</a:t>
-            </a:r>
-            <a:endParaRPr lang="en-US" sz="1400" dirty="0"/>
-          </a:p>
-        </p:txBody>
-      </p:sp>
-      <p:sp>
-        <p:nvSpPr>
-          <p:cNvPr id="17" name="Text 14"/>
-          <p:cNvSpPr/>
-          <p:nvPr/>
-        </p:nvSpPr>
-        <p:spPr>
-          <a:xfrm>
-            <a:off x="6126480" y="2898648"/>
-            <a:ext cx="365760" cy="530352"/>
-          </a:xfrm>
-          <a:prstGeom prst="rect">
-            <a:avLst/>
-          </a:prstGeom>
-          <a:noFill/>
-          <a:ln/>
-        </p:spPr>
-        <p:txBody>
-          <a:bodyPr wrap="square" lIns="0" tIns="0" rIns="0" bIns="0" rtlCol="0" anchor="ctr"/>
-          <a:lstStyle/>
-          <a:p>
-            <a:pPr marL="0" indent="0" algn="ctr">
-              <a:buNone/>
-            </a:pPr>
-            <a:r>
-              <a:rPr lang="en-US" sz="1600" dirty="0">
-                <a:solidFill>
-                  <a:srgbClr val="8A9AAE"/>
-                </a:solidFill>
-                <a:latin typeface="Calibri" pitchFamily="34" charset="0"/>
-                <a:ea typeface="Calibri" pitchFamily="34" charset="-122"/>
-                <a:cs typeface="Calibri" pitchFamily="34" charset="-120"/>
-              </a:rPr>
-              <a:t>→</a:t>
-            </a:r>
-            <a:endParaRPr lang="en-US" sz="1600" dirty="0"/>
-          </a:p>
-        </p:txBody>
-      </p:sp>
-      <p:sp>
-        <p:nvSpPr>
-          <p:cNvPr id="18" name="Text 15"/>
-          <p:cNvSpPr/>
-          <p:nvPr/>
-        </p:nvSpPr>
-        <p:spPr>
-          <a:xfrm>
-            <a:off x="6720840" y="2898648"/>
-            <a:ext cx="4663440" cy="530352"/>
-          </a:xfrm>
-          <a:prstGeom prst="rect">
-            <a:avLst/>
-          </a:prstGeom>
-          <a:noFill/>
-          <a:ln/>
-        </p:spPr>
-        <p:txBody>
-          <a:bodyPr wrap="square" lIns="0" tIns="0" rIns="0" bIns="0" rtlCol="0" anchor="ctr"/>
-          <a:lstStyle/>
-          <a:p>
-            <a:pPr marL="0" indent="0">
-              <a:buNone/>
-            </a:pPr>
-            <a:r>
-              <a:rPr lang="en-US" sz="1400" dirty="0">
-                <a:solidFill>
-                  <a:srgbClr val="F2C14E"/>
-                </a:solidFill>
-                <a:latin typeface="Consolas" pitchFamily="34" charset="0"/>
-                <a:ea typeface="Consolas" pitchFamily="34" charset="-122"/>
-                <a:cs typeface="Consolas" pitchFamily="34" charset="-120"/>
-              </a:rPr>
-              <a:t>enum</a:t>
-            </a:r>
-            <a:endParaRPr lang="en-US" sz="1400" dirty="0"/>
-          </a:p>
-        </p:txBody>
-      </p:sp>
-      <p:sp>
-        <p:nvSpPr>
-          <p:cNvPr id="19" name="Shape 16"/>
-          <p:cNvSpPr/>
-          <p:nvPr/>
-        </p:nvSpPr>
-        <p:spPr>
-          <a:xfrm>
-            <a:off x="640080" y="3502152"/>
-            <a:ext cx="10881360" cy="530352"/>
-          </a:xfrm>
-          <a:prstGeom prst="roundRect">
-            <a:avLst>
-              <a:gd name="adj" fmla="val 10345"/>
-            </a:avLst>
-          </a:prstGeom>
-          <a:solidFill>
-            <a:srgbClr val="1C2530"/>
-          </a:solidFill>
-          <a:ln w="12700">
-            <a:solidFill>
-              <a:srgbClr val="2C3949"/>
-            </a:solidFill>
-            <a:prstDash val="solid"/>
-          </a:ln>
-        </p:spPr>
-        <p:txBody>
-          <a:bodyPr/>
-          <a:lstStyle/>
-          <a:p>
-            <a:endParaRPr lang="en-US"/>
-          </a:p>
-        </p:txBody>
-      </p:sp>
-      <p:sp>
-        <p:nvSpPr>
-          <p:cNvPr id="20" name="Text 17"/>
-          <p:cNvSpPr/>
-          <p:nvPr/>
-        </p:nvSpPr>
-        <p:spPr>
-          <a:xfrm>
-            <a:off x="868680" y="3502152"/>
-            <a:ext cx="5212080" cy="530352"/>
-          </a:xfrm>
-          <a:prstGeom prst="rect">
-            <a:avLst/>
-          </a:prstGeom>
-          <a:noFill/>
-          <a:ln/>
-        </p:spPr>
-        <p:txBody>
-          <a:bodyPr wrap="square" lIns="0" tIns="0" rIns="0" bIns="0" rtlCol="0" anchor="ctr"/>
-          <a:lstStyle/>
-          <a:p>
-            <a:pPr marL="0" indent="0">
-              <a:buNone/>
-            </a:pPr>
-            <a:r>
-              <a:rPr lang="en-US" sz="1400" dirty="0">
-                <a:solidFill>
-                  <a:srgbClr val="5FD3BC"/>
-                </a:solidFill>
-                <a:latin typeface="Consolas" pitchFamily="34" charset="0"/>
-                <a:ea typeface="Consolas" pitchFamily="34" charset="-122"/>
-                <a:cs typeface="Consolas" pitchFamily="34" charset="-120"/>
-              </a:rPr>
-              <a:t>[ValidateRange(1,5)]</a:t>
-            </a:r>
-            <a:endParaRPr lang="en-US" sz="1400" dirty="0"/>
-          </a:p>
-        </p:txBody>
-      </p:sp>
-      <p:sp>
-        <p:nvSpPr>
-          <p:cNvPr id="21" name="Text 18"/>
-          <p:cNvSpPr/>
-          <p:nvPr/>
-        </p:nvSpPr>
-        <p:spPr>
-          <a:xfrm>
-            <a:off x="6126480" y="3502152"/>
-            <a:ext cx="365760" cy="530352"/>
-          </a:xfrm>
-          <a:prstGeom prst="rect">
-            <a:avLst/>
-          </a:prstGeom>
-          <a:noFill/>
-          <a:ln/>
-        </p:spPr>
-        <p:txBody>
-          <a:bodyPr wrap="square" lIns="0" tIns="0" rIns="0" bIns="0" rtlCol="0" anchor="ctr"/>
-          <a:lstStyle/>
-          <a:p>
-            <a:pPr marL="0" indent="0" algn="ctr">
-              <a:buNone/>
-            </a:pPr>
-            <a:r>
-              <a:rPr lang="en-US" sz="1600" dirty="0">
-                <a:solidFill>
-                  <a:srgbClr val="8A9AAE"/>
-                </a:solidFill>
-                <a:latin typeface="Calibri" pitchFamily="34" charset="0"/>
-                <a:ea typeface="Calibri" pitchFamily="34" charset="-122"/>
-                <a:cs typeface="Calibri" pitchFamily="34" charset="-120"/>
-              </a:rPr>
-              <a:t>→</a:t>
-            </a:r>
-            <a:endParaRPr lang="en-US" sz="1600" dirty="0"/>
-          </a:p>
-        </p:txBody>
-      </p:sp>
-      <p:sp>
-        <p:nvSpPr>
-          <p:cNvPr id="22" name="Text 19"/>
-          <p:cNvSpPr/>
-          <p:nvPr/>
-        </p:nvSpPr>
-        <p:spPr>
-          <a:xfrm>
-            <a:off x="6720840" y="3502152"/>
-            <a:ext cx="4663440" cy="530352"/>
-          </a:xfrm>
-          <a:prstGeom prst="rect">
-            <a:avLst/>
-          </a:prstGeom>
-          <a:noFill/>
-          <a:ln/>
-        </p:spPr>
-        <p:txBody>
-          <a:bodyPr wrap="square" lIns="0" tIns="0" rIns="0" bIns="0" rtlCol="0" anchor="ctr"/>
-          <a:lstStyle/>
-          <a:p>
-            <a:pPr marL="0" indent="0">
-              <a:buNone/>
-            </a:pPr>
-            <a:r>
-              <a:rPr lang="en-US" sz="1400" dirty="0">
-                <a:solidFill>
-                  <a:srgbClr val="F2C14E"/>
-                </a:solidFill>
-                <a:latin typeface="Consolas" pitchFamily="34" charset="0"/>
-                <a:ea typeface="Consolas" pitchFamily="34" charset="-122"/>
-                <a:cs typeface="Consolas" pitchFamily="34" charset="-120"/>
-              </a:rPr>
-              <a:t>minimum / maximum</a:t>
-            </a:r>
-            <a:endParaRPr lang="en-US" sz="1400" dirty="0"/>
-          </a:p>
-        </p:txBody>
-      </p:sp>
-      <p:sp>
-        <p:nvSpPr>
-          <p:cNvPr id="23" name="Shape 20"/>
-          <p:cNvSpPr/>
-          <p:nvPr/>
-        </p:nvSpPr>
-        <p:spPr>
-          <a:xfrm>
-            <a:off x="640080" y="4105656"/>
-            <a:ext cx="10881360" cy="530352"/>
-          </a:xfrm>
-          <a:prstGeom prst="roundRect">
-            <a:avLst>
-              <a:gd name="adj" fmla="val 10345"/>
-            </a:avLst>
-          </a:prstGeom>
-          <a:solidFill>
-            <a:srgbClr val="1C2530"/>
-          </a:solidFill>
-          <a:ln w="12700">
-            <a:solidFill>
-              <a:srgbClr val="2C3949"/>
-            </a:solidFill>
-            <a:prstDash val="solid"/>
-          </a:ln>
-        </p:spPr>
-        <p:txBody>
-          <a:bodyPr/>
-          <a:lstStyle/>
-          <a:p>
-            <a:endParaRPr lang="en-US"/>
-          </a:p>
-        </p:txBody>
-      </p:sp>
-      <p:sp>
-        <p:nvSpPr>
-          <p:cNvPr id="24" name="Text 21"/>
-          <p:cNvSpPr/>
-          <p:nvPr/>
-        </p:nvSpPr>
-        <p:spPr>
-          <a:xfrm>
-            <a:off x="868680" y="4105656"/>
-            <a:ext cx="5212080" cy="530352"/>
-          </a:xfrm>
-          <a:prstGeom prst="rect">
-            <a:avLst/>
-          </a:prstGeom>
-          <a:noFill/>
-          <a:ln/>
-        </p:spPr>
-        <p:txBody>
-          <a:bodyPr wrap="square" lIns="0" tIns="0" rIns="0" bIns="0" rtlCol="0" anchor="ctr"/>
-          <a:lstStyle/>
-          <a:p>
-            <a:pPr marL="0" indent="0">
-              <a:buNone/>
-            </a:pPr>
-            <a:r>
-              <a:rPr lang="en-US" sz="1400" dirty="0">
-                <a:solidFill>
-                  <a:srgbClr val="5FD3BC"/>
-                </a:solidFill>
-                <a:latin typeface="Consolas" pitchFamily="34" charset="0"/>
-                <a:ea typeface="Consolas" pitchFamily="34" charset="-122"/>
-                <a:cs typeface="Consolas" pitchFamily="34" charset="-120"/>
-              </a:rPr>
-              <a:t>.PARAMETER help / HelpMessage</a:t>
-            </a:r>
-            <a:endParaRPr lang="en-US" sz="1400" dirty="0"/>
-          </a:p>
-        </p:txBody>
-      </p:sp>
-      <p:sp>
-        <p:nvSpPr>
-          <p:cNvPr id="25" name="Text 22"/>
-          <p:cNvSpPr/>
-          <p:nvPr/>
-        </p:nvSpPr>
-        <p:spPr>
-          <a:xfrm>
-            <a:off x="6126480" y="4105656"/>
-            <a:ext cx="365760" cy="530352"/>
-          </a:xfrm>
-          <a:prstGeom prst="rect">
-            <a:avLst/>
-          </a:prstGeom>
-          <a:noFill/>
-          <a:ln/>
-        </p:spPr>
-        <p:txBody>
-          <a:bodyPr wrap="square" lIns="0" tIns="0" rIns="0" bIns="0" rtlCol="0" anchor="ctr"/>
-          <a:lstStyle/>
-          <a:p>
-            <a:pPr marL="0" indent="0" algn="ctr">
-              <a:buNone/>
-            </a:pPr>
-            <a:r>
-              <a:rPr lang="en-US" sz="1600" dirty="0">
-                <a:solidFill>
-                  <a:srgbClr val="8A9AAE"/>
-                </a:solidFill>
-                <a:latin typeface="Calibri" pitchFamily="34" charset="0"/>
-                <a:ea typeface="Calibri" pitchFamily="34" charset="-122"/>
-                <a:cs typeface="Calibri" pitchFamily="34" charset="-120"/>
-              </a:rPr>
-              <a:t>→</a:t>
-            </a:r>
-            <a:endParaRPr lang="en-US" sz="1600" dirty="0"/>
-          </a:p>
-        </p:txBody>
-      </p:sp>
-      <p:sp>
-        <p:nvSpPr>
-          <p:cNvPr id="26" name="Text 23"/>
-          <p:cNvSpPr/>
-          <p:nvPr/>
-        </p:nvSpPr>
-        <p:spPr>
-          <a:xfrm>
-            <a:off x="6720840" y="4105656"/>
-            <a:ext cx="4663440" cy="530352"/>
-          </a:xfrm>
-          <a:prstGeom prst="rect">
-            <a:avLst/>
-          </a:prstGeom>
-          <a:noFill/>
-          <a:ln/>
-        </p:spPr>
-        <p:txBody>
-          <a:bodyPr wrap="square" lIns="0" tIns="0" rIns="0" bIns="0" rtlCol="0" anchor="ctr"/>
-          <a:lstStyle/>
-          <a:p>
-            <a:pPr marL="0" indent="0">
-              <a:buNone/>
-            </a:pPr>
-            <a:r>
-              <a:rPr lang="en-US" sz="1400" dirty="0">
-                <a:solidFill>
-                  <a:srgbClr val="F2C14E"/>
-                </a:solidFill>
-                <a:latin typeface="Consolas" pitchFamily="34" charset="0"/>
-                <a:ea typeface="Consolas" pitchFamily="34" charset="-122"/>
-                <a:cs typeface="Consolas" pitchFamily="34" charset="-120"/>
-              </a:rPr>
-              <a:t>property description</a:t>
-            </a:r>
-            <a:endParaRPr lang="en-US" sz="1400" dirty="0"/>
-          </a:p>
-        </p:txBody>
-      </p:sp>
-      <p:sp>
-        <p:nvSpPr>
-          <p:cNvPr id="27" name="Shape 24"/>
-          <p:cNvSpPr/>
-          <p:nvPr/>
-        </p:nvSpPr>
-        <p:spPr>
-          <a:xfrm>
-            <a:off x="640080" y="4709160"/>
-            <a:ext cx="10881360" cy="530352"/>
-          </a:xfrm>
-          <a:prstGeom prst="roundRect">
-            <a:avLst>
-              <a:gd name="adj" fmla="val 10345"/>
-            </a:avLst>
-          </a:prstGeom>
-          <a:solidFill>
-            <a:srgbClr val="1C2530"/>
-          </a:solidFill>
-          <a:ln w="12700">
-            <a:solidFill>
-              <a:srgbClr val="2C3949"/>
-            </a:solidFill>
-            <a:prstDash val="solid"/>
-          </a:ln>
-        </p:spPr>
-        <p:txBody>
-          <a:bodyPr/>
-          <a:lstStyle/>
-          <a:p>
-            <a:endParaRPr lang="en-US"/>
-          </a:p>
-        </p:txBody>
-      </p:sp>
-      <p:sp>
-        <p:nvSpPr>
-          <p:cNvPr id="28" name="Text 25"/>
-          <p:cNvSpPr/>
-          <p:nvPr/>
-        </p:nvSpPr>
-        <p:spPr>
-          <a:xfrm>
-            <a:off x="868680" y="4709160"/>
-            <a:ext cx="5212080" cy="530352"/>
-          </a:xfrm>
-          <a:prstGeom prst="rect">
-            <a:avLst/>
-          </a:prstGeom>
-          <a:noFill/>
-          <a:ln/>
-        </p:spPr>
-        <p:txBody>
-          <a:bodyPr wrap="square" lIns="0" tIns="0" rIns="0" bIns="0" rtlCol="0" anchor="ctr"/>
-          <a:lstStyle/>
-          <a:p>
-            <a:pPr marL="0" indent="0">
-              <a:buNone/>
-            </a:pPr>
-            <a:r>
-              <a:rPr lang="en-US" sz="1400" dirty="0">
-                <a:solidFill>
-                  <a:srgbClr val="5FD3BC"/>
-                </a:solidFill>
-                <a:latin typeface="Consolas" pitchFamily="34" charset="0"/>
-                <a:ea typeface="Consolas" pitchFamily="34" charset="-122"/>
-                <a:cs typeface="Consolas" pitchFamily="34" charset="-120"/>
-              </a:rPr>
-              <a:t>.SYNOPSIS</a:t>
-            </a:r>
-            <a:endParaRPr lang="en-US" sz="1400" dirty="0"/>
-          </a:p>
-        </p:txBody>
-      </p:sp>
-      <p:sp>
-        <p:nvSpPr>
-          <p:cNvPr id="29" name="Text 26"/>
-          <p:cNvSpPr/>
-          <p:nvPr/>
-        </p:nvSpPr>
-        <p:spPr>
-          <a:xfrm>
-            <a:off x="6126480" y="4709160"/>
-            <a:ext cx="365760" cy="530352"/>
-          </a:xfrm>
-          <a:prstGeom prst="rect">
-            <a:avLst/>
-          </a:prstGeom>
-          <a:noFill/>
-          <a:ln/>
-        </p:spPr>
-        <p:txBody>
-          <a:bodyPr wrap="square" lIns="0" tIns="0" rIns="0" bIns="0" rtlCol="0" anchor="ctr"/>
-          <a:lstStyle/>
-          <a:p>
-            <a:pPr marL="0" indent="0" algn="ctr">
-              <a:buNone/>
-            </a:pPr>
-            <a:r>
-              <a:rPr lang="en-US" sz="1600" dirty="0">
-                <a:solidFill>
-                  <a:srgbClr val="8A9AAE"/>
-                </a:solidFill>
-                <a:latin typeface="Calibri" pitchFamily="34" charset="0"/>
-                <a:ea typeface="Calibri" pitchFamily="34" charset="-122"/>
-                <a:cs typeface="Calibri" pitchFamily="34" charset="-120"/>
-              </a:rPr>
-              <a:t>→</a:t>
-            </a:r>
-            <a:endParaRPr lang="en-US" sz="1600" dirty="0"/>
-          </a:p>
-        </p:txBody>
-      </p:sp>
-      <p:sp>
-        <p:nvSpPr>
-          <p:cNvPr id="30" name="Text 27"/>
-          <p:cNvSpPr/>
-          <p:nvPr/>
-        </p:nvSpPr>
-        <p:spPr>
-          <a:xfrm>
-            <a:off x="6720840" y="4709160"/>
-            <a:ext cx="4663440" cy="530352"/>
-          </a:xfrm>
-          <a:prstGeom prst="rect">
-            <a:avLst/>
-          </a:prstGeom>
-          <a:noFill/>
-          <a:ln/>
-        </p:spPr>
-        <p:txBody>
-          <a:bodyPr wrap="square" lIns="0" tIns="0" rIns="0" bIns="0" rtlCol="0" anchor="ctr"/>
-          <a:lstStyle/>
-          <a:p>
-            <a:pPr marL="0" indent="0">
-              <a:buNone/>
-            </a:pPr>
-            <a:r>
-              <a:rPr lang="en-US" sz="1400" dirty="0">
-                <a:solidFill>
-                  <a:srgbClr val="F2C14E"/>
-                </a:solidFill>
-                <a:latin typeface="Consolas" pitchFamily="34" charset="0"/>
-                <a:ea typeface="Consolas" pitchFamily="34" charset="-122"/>
-                <a:cs typeface="Consolas" pitchFamily="34" charset="-120"/>
-              </a:rPr>
-              <a:t>tool description</a:t>
-            </a:r>
-            <a:endParaRPr lang="en-US" sz="1400" dirty="0"/>
-          </a:p>
-        </p:txBody>
-      </p:sp>
-      <p:sp>
-        <p:nvSpPr>
-          <p:cNvPr id="31" name="Shape 28"/>
-          <p:cNvSpPr/>
-          <p:nvPr/>
-        </p:nvSpPr>
-        <p:spPr>
-          <a:xfrm>
-            <a:off x="640080" y="5312664"/>
-            <a:ext cx="10881360" cy="530352"/>
-          </a:xfrm>
-          <a:prstGeom prst="roundRect">
-            <a:avLst>
-              <a:gd name="adj" fmla="val 10345"/>
-            </a:avLst>
-          </a:prstGeom>
-          <a:solidFill>
-            <a:srgbClr val="1C2530"/>
-          </a:solidFill>
-          <a:ln w="12700">
-            <a:solidFill>
-              <a:srgbClr val="2C3949"/>
-            </a:solidFill>
-            <a:prstDash val="solid"/>
-          </a:ln>
-        </p:spPr>
-        <p:txBody>
-          <a:bodyPr/>
-          <a:lstStyle/>
-          <a:p>
-            <a:endParaRPr lang="en-US"/>
-          </a:p>
-        </p:txBody>
-      </p:sp>
-      <p:sp>
-        <p:nvSpPr>
-          <p:cNvPr id="32" name="Text 29"/>
-          <p:cNvSpPr/>
-          <p:nvPr/>
-        </p:nvSpPr>
-        <p:spPr>
-          <a:xfrm>
-            <a:off x="868680" y="5312664"/>
-            <a:ext cx="5212080" cy="530352"/>
-          </a:xfrm>
-          <a:prstGeom prst="rect">
-            <a:avLst/>
-          </a:prstGeom>
-          <a:noFill/>
-          <a:ln/>
-        </p:spPr>
-        <p:txBody>
-          <a:bodyPr wrap="square" lIns="0" tIns="0" rIns="0" bIns="0" rtlCol="0" anchor="ctr"/>
-          <a:lstStyle/>
-          <a:p>
-            <a:pPr marL="0" indent="0">
-              <a:buNone/>
-            </a:pPr>
-            <a:r>
-              <a:rPr lang="en-US" sz="1400" dirty="0">
-                <a:solidFill>
-                  <a:srgbClr val="5FD3BC"/>
-                </a:solidFill>
-                <a:latin typeface="Consolas" pitchFamily="34" charset="0"/>
-                <a:ea typeface="Consolas" pitchFamily="34" charset="-122"/>
-                <a:cs typeface="Consolas" pitchFamily="34" charset="-120"/>
-              </a:rPr>
-              <a:t>approved verb + SupportsShouldProcess</a:t>
-            </a:r>
-            <a:endParaRPr lang="en-US" sz="1400" dirty="0"/>
-          </a:p>
-        </p:txBody>
-      </p:sp>
-      <p:sp>
-        <p:nvSpPr>
-          <p:cNvPr id="33" name="Text 30"/>
-          <p:cNvSpPr/>
-          <p:nvPr/>
-        </p:nvSpPr>
-        <p:spPr>
-          <a:xfrm>
-            <a:off x="6126480" y="5312664"/>
-            <a:ext cx="365760" cy="530352"/>
-          </a:xfrm>
-          <a:prstGeom prst="rect">
-            <a:avLst/>
-          </a:prstGeom>
-          <a:noFill/>
-          <a:ln/>
-        </p:spPr>
-        <p:txBody>
-          <a:bodyPr wrap="square" lIns="0" tIns="0" rIns="0" bIns="0" rtlCol="0" anchor="ctr"/>
-          <a:lstStyle/>
-          <a:p>
-            <a:pPr marL="0" indent="0" algn="ctr">
-              <a:buNone/>
-            </a:pPr>
-            <a:r>
-              <a:rPr lang="en-US" sz="1600" dirty="0">
-                <a:solidFill>
-                  <a:srgbClr val="8A9AAE"/>
-                </a:solidFill>
-                <a:latin typeface="Calibri" pitchFamily="34" charset="0"/>
-                <a:ea typeface="Calibri" pitchFamily="34" charset="-122"/>
-                <a:cs typeface="Calibri" pitchFamily="34" charset="-120"/>
-              </a:rPr>
-              <a:t>→</a:t>
-            </a:r>
-            <a:endParaRPr lang="en-US" sz="1600" dirty="0"/>
-          </a:p>
-        </p:txBody>
-      </p:sp>
-      <p:sp>
-        <p:nvSpPr>
-          <p:cNvPr id="34" name="Text 31"/>
-          <p:cNvSpPr/>
-          <p:nvPr/>
-        </p:nvSpPr>
-        <p:spPr>
-          <a:xfrm>
-            <a:off x="6720840" y="5312664"/>
-            <a:ext cx="4663440" cy="530352"/>
-          </a:xfrm>
-          <a:prstGeom prst="rect">
-            <a:avLst/>
-          </a:prstGeom>
-          <a:noFill/>
-          <a:ln/>
-        </p:spPr>
-        <p:txBody>
-          <a:bodyPr wrap="square" lIns="0" tIns="0" rIns="0" bIns="0" rtlCol="0" anchor="ctr"/>
-          <a:lstStyle/>
-          <a:p>
-            <a:pPr marL="0" indent="0">
-              <a:buNone/>
-            </a:pPr>
-            <a:r>
-              <a:rPr lang="en-US" sz="1400" dirty="0">
-                <a:solidFill>
-                  <a:srgbClr val="F2C14E"/>
-                </a:solidFill>
-                <a:latin typeface="Consolas" pitchFamily="34" charset="0"/>
-                <a:ea typeface="Consolas" pitchFamily="34" charset="-122"/>
-                <a:cs typeface="Consolas" pitchFamily="34" charset="-120"/>
-              </a:rPr>
-              <a:t>readOnlyHint / destructiveHint</a:t>
-            </a:r>
-            <a:endParaRPr lang="en-US" sz="1400" dirty="0"/>
-          </a:p>
-        </p:txBody>
-      </p:sp>
-      <p:sp>
-        <p:nvSpPr>
-          <p:cNvPr id="35" name="Text 32"/>
-          <p:cNvSpPr/>
-          <p:nvPr/>
-        </p:nvSpPr>
-        <p:spPr>
-          <a:xfrm>
-            <a:off x="2463209" y="5989320"/>
-            <a:ext cx="7235101" cy="365760"/>
-          </a:xfrm>
-          <a:prstGeom prst="rect">
-            <a:avLst/>
-          </a:prstGeom>
-          <a:noFill/>
-          <a:ln/>
-        </p:spPr>
-        <p:txBody>
-          <a:bodyPr wrap="square" lIns="0" tIns="0" rIns="0" bIns="0" rtlCol="0" anchor="ctr"/>
-          <a:lstStyle/>
-          <a:p>
-            <a:r>
-              <a:rPr lang="en-US" sz="1600" dirty="0">
-                <a:solidFill>
-                  <a:schemeClr val="bg2"/>
-                </a:solidFill>
-              </a:rPr>
-              <a:t>Get-ToolManifest.ps1 reads your param blocks and help. No schema is written by hand.</a:t>
-            </a:r>
-            <a:endParaRPr lang="en-US" sz="1500" dirty="0">
-              <a:solidFill>
-                <a:schemeClr val="bg2"/>
-              </a:solidFill>
-            </a:endParaRPr>
           </a:p>
         </p:txBody>
       </p:sp>
